--- a/outputs/TCGA_KIRC_Presentation.pptx
+++ b/outputs/TCGA_KIRC_Presentation.pptx
@@ -3684,7 +3684,7 @@
                 </a:solidFill>
               </a:rPr>
               <a:t>2.  Project GitHub Repository:
-     https://github.com/[USERNAME]/tcga-kirc-project</a:t>
+     https://github.com/LikithaDudala/tcga-kirc-project</a:t>
             </a:r>
           </a:p>
           <a:p>
@@ -4117,7 +4117,7 @@
                   <a:srgbClr val="BBD4FF"/>
                 </a:solidFill>
               </a:rPr>
-              <a:t>GitHub:  https://github.com/[USERNAME]/tcga-kirc-project</a:t>
+              <a:t>GitHub:  https://github.com/LikithaDudala/tcga-kirc-project</a:t>
             </a:r>
           </a:p>
         </p:txBody>

--- a/outputs/TCGA_KIRC_Presentation.pptx
+++ b/outputs/TCGA_KIRC_Presentation.pptx
@@ -17,7 +17,7 @@
     <p:sldId id="265" r:id="rId16"/>
     <p:sldId id="266" r:id="rId17"/>
   </p:sldIdLst>
-  <p:sldSz cx="9144000" cy="6858000" type="screen4x3"/>
+  <p:sldSz cx="12188952" cy="6858000" type="screen4x3"/>
   <p:notesSz cx="6858000" cy="9144000"/>
   <p:defaultTextStyle>
     <a:defPPr>
@@ -3107,204 +3107,7 @@
         <p:spPr>
           <a:xfrm>
             <a:off x="0" y="0"/>
-            <a:ext cx="9144000" cy="3749039"/>
-          </a:xfrm>
-          <a:prstGeom prst="rect">
-            <a:avLst/>
-          </a:prstGeom>
-          <a:solidFill>
-            <a:srgbClr val="0053A5"/>
-          </a:solidFill>
-          <a:ln>
-            <a:noFill/>
-          </a:ln>
-        </p:spPr>
-        <p:style>
-          <a:lnRef idx="1">
-            <a:schemeClr val="accent1"/>
-          </a:lnRef>
-          <a:fillRef idx="3">
-            <a:schemeClr val="accent1"/>
-          </a:fillRef>
-          <a:effectRef idx="2">
-            <a:schemeClr val="accent1"/>
-          </a:effectRef>
-          <a:fontRef idx="minor">
-            <a:schemeClr val="lt1"/>
-          </a:fontRef>
-        </p:style>
-        <p:txBody>
-          <a:bodyPr rtlCol="0" anchor="ctr"/>
-          <a:lstStyle/>
-          <a:p>
-            <a:pPr algn="ctr"/>
-          </a:p>
-        </p:txBody>
-      </p:sp>
-      <p:sp>
-        <p:nvSpPr>
-          <p:cNvPr id="3" name="Rectangle 2"/>
-          <p:cNvSpPr/>
-          <p:nvPr/>
-        </p:nvSpPr>
-        <p:spPr>
-          <a:xfrm>
-            <a:off x="0" y="3749039"/>
-            <a:ext cx="9144000" cy="3108960"/>
-          </a:xfrm>
-          <a:prstGeom prst="rect">
-            <a:avLst/>
-          </a:prstGeom>
-          <a:solidFill>
-            <a:srgbClr val="F4F6F9"/>
-          </a:solidFill>
-          <a:ln>
-            <a:noFill/>
-          </a:ln>
-        </p:spPr>
-        <p:style>
-          <a:lnRef idx="1">
-            <a:schemeClr val="accent1"/>
-          </a:lnRef>
-          <a:fillRef idx="3">
-            <a:schemeClr val="accent1"/>
-          </a:fillRef>
-          <a:effectRef idx="2">
-            <a:schemeClr val="accent1"/>
-          </a:effectRef>
-          <a:fontRef idx="minor">
-            <a:schemeClr val="lt1"/>
-          </a:fontRef>
-        </p:style>
-        <p:txBody>
-          <a:bodyPr rtlCol="0" anchor="ctr"/>
-          <a:lstStyle/>
-          <a:p>
-            <a:pPr algn="ctr"/>
-          </a:p>
-        </p:txBody>
-      </p:sp>
-      <p:sp>
-        <p:nvSpPr>
-          <p:cNvPr id="4" name="Rectangle 3"/>
-          <p:cNvSpPr/>
-          <p:nvPr/>
-        </p:nvSpPr>
-        <p:spPr>
-          <a:xfrm>
-            <a:off x="0" y="3611880"/>
-            <a:ext cx="9144000" cy="137160"/>
-          </a:xfrm>
-          <a:prstGeom prst="rect">
-            <a:avLst/>
-          </a:prstGeom>
-          <a:solidFill>
-            <a:srgbClr val="E65400"/>
-          </a:solidFill>
-          <a:ln>
-            <a:noFill/>
-          </a:ln>
-        </p:spPr>
-        <p:style>
-          <a:lnRef idx="1">
-            <a:schemeClr val="accent1"/>
-          </a:lnRef>
-          <a:fillRef idx="3">
-            <a:schemeClr val="accent1"/>
-          </a:fillRef>
-          <a:effectRef idx="2">
-            <a:schemeClr val="accent1"/>
-          </a:effectRef>
-          <a:fontRef idx="minor">
-            <a:schemeClr val="lt1"/>
-          </a:fontRef>
-        </p:style>
-        <p:txBody>
-          <a:bodyPr rtlCol="0" anchor="ctr"/>
-          <a:lstStyle/>
-          <a:p>
-            <a:pPr algn="ctr"/>
-          </a:p>
-        </p:txBody>
-      </p:sp>
-      <p:sp>
-        <p:nvSpPr>
-          <p:cNvPr id="5" name="TextBox 4"/>
-          <p:cNvSpPr txBox="1"/>
-          <p:nvPr/>
-        </p:nvSpPr>
-        <p:spPr>
-          <a:xfrm>
-            <a:off x="457200" y="594360"/>
-            <a:ext cx="8229600" cy="1371600"/>
-          </a:xfrm>
-          <a:prstGeom prst="rect">
-            <a:avLst/>
-          </a:prstGeom>
-          <a:noFill/>
-        </p:spPr>
-        <p:txBody>
-          <a:bodyPr wrap="square">
-            <a:spAutoFit/>
-          </a:bodyPr>
-          <a:lstStyle/>
-          <a:p>
-            <a:pPr algn="ctr"/>
-            <a:r>
-              <a:rPr sz="4000" b="1">
-                <a:solidFill>
-                  <a:srgbClr val="FFFFFF"/>
-                </a:solidFill>
-              </a:rPr>
-              <a:t>TCGA KIRC — Survival Analysis</a:t>
-            </a:r>
-          </a:p>
-        </p:txBody>
-      </p:sp>
-      <p:sp>
-        <p:nvSpPr>
-          <p:cNvPr id="6" name="TextBox 5"/>
-          <p:cNvSpPr txBox="1"/>
-          <p:nvPr/>
-        </p:nvSpPr>
-        <p:spPr>
-          <a:xfrm>
-            <a:off x="457200" y="1920240"/>
-            <a:ext cx="8229600" cy="914400"/>
-          </a:xfrm>
-          <a:prstGeom prst="rect">
-            <a:avLst/>
-          </a:prstGeom>
-          <a:noFill/>
-        </p:spPr>
-        <p:txBody>
-          <a:bodyPr wrap="square">
-            <a:spAutoFit/>
-          </a:bodyPr>
-          <a:lstStyle/>
-          <a:p>
-            <a:pPr algn="ctr"/>
-            <a:r>
-              <a:rPr sz="1700">
-                <a:solidFill>
-                  <a:srgbClr val="BBD4FF"/>
-                </a:solidFill>
-              </a:rPr>
-              <a:t>Multi-Model Survival Prediction · Kidney Renal Clear Cell Carcinoma</a:t>
-            </a:r>
-          </a:p>
-        </p:txBody>
-      </p:sp>
-      <p:sp>
-        <p:nvSpPr>
-          <p:cNvPr id="7" name="Rectangle 6"/>
-          <p:cNvSpPr/>
-          <p:nvPr/>
-        </p:nvSpPr>
-        <p:spPr>
-          <a:xfrm>
-            <a:off x="1371600" y="3886200"/>
-            <a:ext cx="6400800" cy="2286000"/>
+            <a:ext cx="7863840" cy="6858000"/>
           </a:xfrm>
           <a:prstGeom prst="rect">
             <a:avLst/>
@@ -3340,138 +3143,20 @@
       </p:sp>
       <p:sp>
         <p:nvSpPr>
-          <p:cNvPr id="8" name="TextBox 7"/>
-          <p:cNvSpPr txBox="1"/>
-          <p:nvPr/>
-        </p:nvSpPr>
-        <p:spPr>
-          <a:xfrm>
-            <a:off x="1463040" y="3977639"/>
-            <a:ext cx="6217920" cy="2103120"/>
-          </a:xfrm>
-          <a:prstGeom prst="rect">
-            <a:avLst/>
-          </a:prstGeom>
-          <a:noFill/>
-        </p:spPr>
-        <p:txBody>
-          <a:bodyPr wrap="square">
-            <a:spAutoFit/>
-          </a:bodyPr>
-          <a:lstStyle/>
-          <a:p>
-            <a:pPr algn="ctr"/>
-            <a:r>
-              <a:rPr sz="1300" b="1">
-                <a:solidFill>
-                  <a:srgbClr val="0053A5"/>
-                </a:solidFill>
-              </a:rPr>
-              <a:t>Student Name:  </a:t>
-            </a:r>
-            <a:r>
-              <a:rPr sz="1300">
-                <a:solidFill>
-                  <a:srgbClr val="1A1A2E"/>
-                </a:solidFill>
-              </a:rPr>
-              <a:t>[STUDENT NAME]</a:t>
-            </a:r>
-          </a:p>
-          <a:p>
-            <a:pPr algn="ctr"/>
-            <a:r>
-              <a:rPr sz="1300" b="1">
-                <a:solidFill>
-                  <a:srgbClr val="0053A5"/>
-                </a:solidFill>
-              </a:rPr>
-              <a:t>College:  </a:t>
-            </a:r>
-            <a:r>
-              <a:rPr sz="1300">
-                <a:solidFill>
-                  <a:srgbClr val="1A1A2E"/>
-                </a:solidFill>
-              </a:rPr>
-              <a:t>[COLLEGE]</a:t>
-            </a:r>
-          </a:p>
-          <a:p>
-            <a:pPr algn="ctr"/>
-            <a:r>
-              <a:rPr sz="1300" b="1">
-                <a:solidFill>
-                  <a:srgbClr val="0053A5"/>
-                </a:solidFill>
-              </a:rPr>
-              <a:t>Department:  </a:t>
-            </a:r>
-            <a:r>
-              <a:rPr sz="1300">
-                <a:solidFill>
-                  <a:srgbClr val="1A1A2E"/>
-                </a:solidFill>
-              </a:rPr>
-              <a:t>[DEPARTMENT]</a:t>
-            </a:r>
-          </a:p>
-          <a:p>
-            <a:pPr algn="ctr"/>
-            <a:r>
-              <a:rPr sz="1300" b="1">
-                <a:solidFill>
-                  <a:srgbClr val="0053A5"/>
-                </a:solidFill>
-              </a:rPr>
-              <a:t>Email:  </a:t>
-            </a:r>
-            <a:r>
-              <a:rPr sz="1300">
-                <a:solidFill>
-                  <a:srgbClr val="1A1A2E"/>
-                </a:solidFill>
-              </a:rPr>
-              <a:t>[EMAIL]</a:t>
-            </a:r>
-          </a:p>
-          <a:p>
-            <a:pPr algn="ctr"/>
-            <a:r>
-              <a:rPr sz="1300" b="1">
-                <a:solidFill>
-                  <a:srgbClr val="0053A5"/>
-                </a:solidFill>
-              </a:rPr>
-              <a:t>Program:  </a:t>
-            </a:r>
-            <a:r>
-              <a:rPr sz="1300">
-                <a:solidFill>
-                  <a:srgbClr val="1A1A2E"/>
-                </a:solidFill>
-              </a:rPr>
-              <a:t>MS Elevate Internship</a:t>
-            </a:r>
-          </a:p>
-        </p:txBody>
-      </p:sp>
-      <p:sp>
-        <p:nvSpPr>
-          <p:cNvPr id="9" name="Rectangle 8"/>
+          <p:cNvPr id="3" name="Rectangle 2"/>
           <p:cNvSpPr/>
           <p:nvPr/>
         </p:nvSpPr>
         <p:spPr>
           <a:xfrm>
-            <a:off x="2286000" y="6291072"/>
-            <a:ext cx="4572000" cy="457200"/>
+            <a:off x="0" y="0"/>
+            <a:ext cx="201168" cy="6858000"/>
           </a:xfrm>
           <a:prstGeom prst="rect">
             <a:avLst/>
           </a:prstGeom>
           <a:solidFill>
-            <a:srgbClr val="007C89"/>
+            <a:srgbClr val="00A050"/>
           </a:solidFill>
           <a:ln>
             <a:noFill/>
@@ -3501,14 +3186,272 @@
       </p:sp>
       <p:sp>
         <p:nvSpPr>
+          <p:cNvPr id="4" name="Rectangle 3"/>
+          <p:cNvSpPr/>
+          <p:nvPr/>
+        </p:nvSpPr>
+        <p:spPr>
+          <a:xfrm>
+            <a:off x="7863840" y="0"/>
+            <a:ext cx="4325112" cy="6858000"/>
+          </a:xfrm>
+          <a:prstGeom prst="rect">
+            <a:avLst/>
+          </a:prstGeom>
+          <a:solidFill>
+            <a:srgbClr val="007080"/>
+          </a:solidFill>
+          <a:ln>
+            <a:noFill/>
+          </a:ln>
+        </p:spPr>
+        <p:style>
+          <a:lnRef idx="1">
+            <a:schemeClr val="accent1"/>
+          </a:lnRef>
+          <a:fillRef idx="3">
+            <a:schemeClr val="accent1"/>
+          </a:fillRef>
+          <a:effectRef idx="2">
+            <a:schemeClr val="accent1"/>
+          </a:effectRef>
+          <a:fontRef idx="minor">
+            <a:schemeClr val="lt1"/>
+          </a:fontRef>
+        </p:style>
+        <p:txBody>
+          <a:bodyPr rtlCol="0" anchor="ctr"/>
+          <a:lstStyle/>
+          <a:p>
+            <a:pPr algn="ctr"/>
+          </a:p>
+        </p:txBody>
+      </p:sp>
+      <p:sp>
+        <p:nvSpPr>
+          <p:cNvPr id="5" name="Rectangle 4"/>
+          <p:cNvSpPr/>
+          <p:nvPr/>
+        </p:nvSpPr>
+        <p:spPr>
+          <a:xfrm>
+            <a:off x="0" y="6556248"/>
+            <a:ext cx="12188952" cy="301752"/>
+          </a:xfrm>
+          <a:prstGeom prst="rect">
+            <a:avLst/>
+          </a:prstGeom>
+          <a:solidFill>
+            <a:srgbClr val="00A050"/>
+          </a:solidFill>
+          <a:ln>
+            <a:noFill/>
+          </a:ln>
+        </p:spPr>
+        <p:style>
+          <a:lnRef idx="1">
+            <a:schemeClr val="accent1"/>
+          </a:lnRef>
+          <a:fillRef idx="3">
+            <a:schemeClr val="accent1"/>
+          </a:fillRef>
+          <a:effectRef idx="2">
+            <a:schemeClr val="accent1"/>
+          </a:effectRef>
+          <a:fontRef idx="minor">
+            <a:schemeClr val="lt1"/>
+          </a:fontRef>
+        </p:style>
+        <p:txBody>
+          <a:bodyPr rtlCol="0" anchor="ctr"/>
+          <a:lstStyle/>
+          <a:p>
+            <a:pPr algn="ctr"/>
+          </a:p>
+        </p:txBody>
+      </p:sp>
+      <p:sp>
+        <p:nvSpPr>
+          <p:cNvPr id="6" name="Rectangle 5"/>
+          <p:cNvSpPr/>
+          <p:nvPr/>
+        </p:nvSpPr>
+        <p:spPr>
+          <a:xfrm>
+            <a:off x="347472" y="228600"/>
+            <a:ext cx="128016" cy="128016"/>
+          </a:xfrm>
+          <a:prstGeom prst="rect">
+            <a:avLst/>
+          </a:prstGeom>
+          <a:solidFill>
+            <a:srgbClr val="F25022"/>
+          </a:solidFill>
+          <a:ln>
+            <a:noFill/>
+          </a:ln>
+        </p:spPr>
+        <p:style>
+          <a:lnRef idx="1">
+            <a:schemeClr val="accent1"/>
+          </a:lnRef>
+          <a:fillRef idx="3">
+            <a:schemeClr val="accent1"/>
+          </a:fillRef>
+          <a:effectRef idx="2">
+            <a:schemeClr val="accent1"/>
+          </a:effectRef>
+          <a:fontRef idx="minor">
+            <a:schemeClr val="lt1"/>
+          </a:fontRef>
+        </p:style>
+        <p:txBody>
+          <a:bodyPr rtlCol="0" anchor="ctr"/>
+          <a:lstStyle/>
+          <a:p>
+            <a:pPr algn="ctr"/>
+          </a:p>
+        </p:txBody>
+      </p:sp>
+      <p:sp>
+        <p:nvSpPr>
+          <p:cNvPr id="7" name="Rectangle 6"/>
+          <p:cNvSpPr/>
+          <p:nvPr/>
+        </p:nvSpPr>
+        <p:spPr>
+          <a:xfrm>
+            <a:off x="498348" y="228600"/>
+            <a:ext cx="128016" cy="128016"/>
+          </a:xfrm>
+          <a:prstGeom prst="rect">
+            <a:avLst/>
+          </a:prstGeom>
+          <a:solidFill>
+            <a:srgbClr val="7FBA00"/>
+          </a:solidFill>
+          <a:ln>
+            <a:noFill/>
+          </a:ln>
+        </p:spPr>
+        <p:style>
+          <a:lnRef idx="1">
+            <a:schemeClr val="accent1"/>
+          </a:lnRef>
+          <a:fillRef idx="3">
+            <a:schemeClr val="accent1"/>
+          </a:fillRef>
+          <a:effectRef idx="2">
+            <a:schemeClr val="accent1"/>
+          </a:effectRef>
+          <a:fontRef idx="minor">
+            <a:schemeClr val="lt1"/>
+          </a:fontRef>
+        </p:style>
+        <p:txBody>
+          <a:bodyPr rtlCol="0" anchor="ctr"/>
+          <a:lstStyle/>
+          <a:p>
+            <a:pPr algn="ctr"/>
+          </a:p>
+        </p:txBody>
+      </p:sp>
+      <p:sp>
+        <p:nvSpPr>
+          <p:cNvPr id="8" name="Rectangle 7"/>
+          <p:cNvSpPr/>
+          <p:nvPr/>
+        </p:nvSpPr>
+        <p:spPr>
+          <a:xfrm>
+            <a:off x="347472" y="379476"/>
+            <a:ext cx="128016" cy="128016"/>
+          </a:xfrm>
+          <a:prstGeom prst="rect">
+            <a:avLst/>
+          </a:prstGeom>
+          <a:solidFill>
+            <a:srgbClr val="00A4EF"/>
+          </a:solidFill>
+          <a:ln>
+            <a:noFill/>
+          </a:ln>
+        </p:spPr>
+        <p:style>
+          <a:lnRef idx="1">
+            <a:schemeClr val="accent1"/>
+          </a:lnRef>
+          <a:fillRef idx="3">
+            <a:schemeClr val="accent1"/>
+          </a:fillRef>
+          <a:effectRef idx="2">
+            <a:schemeClr val="accent1"/>
+          </a:effectRef>
+          <a:fontRef idx="minor">
+            <a:schemeClr val="lt1"/>
+          </a:fontRef>
+        </p:style>
+        <p:txBody>
+          <a:bodyPr rtlCol="0" anchor="ctr"/>
+          <a:lstStyle/>
+          <a:p>
+            <a:pPr algn="ctr"/>
+          </a:p>
+        </p:txBody>
+      </p:sp>
+      <p:sp>
+        <p:nvSpPr>
+          <p:cNvPr id="9" name="Rectangle 8"/>
+          <p:cNvSpPr/>
+          <p:nvPr/>
+        </p:nvSpPr>
+        <p:spPr>
+          <a:xfrm>
+            <a:off x="498348" y="379476"/>
+            <a:ext cx="128016" cy="128016"/>
+          </a:xfrm>
+          <a:prstGeom prst="rect">
+            <a:avLst/>
+          </a:prstGeom>
+          <a:solidFill>
+            <a:srgbClr val="FFB900"/>
+          </a:solidFill>
+          <a:ln>
+            <a:noFill/>
+          </a:ln>
+        </p:spPr>
+        <p:style>
+          <a:lnRef idx="1">
+            <a:schemeClr val="accent1"/>
+          </a:lnRef>
+          <a:fillRef idx="3">
+            <a:schemeClr val="accent1"/>
+          </a:fillRef>
+          <a:effectRef idx="2">
+            <a:schemeClr val="accent1"/>
+          </a:effectRef>
+          <a:fontRef idx="minor">
+            <a:schemeClr val="lt1"/>
+          </a:fontRef>
+        </p:style>
+        <p:txBody>
+          <a:bodyPr rtlCol="0" anchor="ctr"/>
+          <a:lstStyle/>
+          <a:p>
+            <a:pPr algn="ctr"/>
+          </a:p>
+        </p:txBody>
+      </p:sp>
+      <p:sp>
+        <p:nvSpPr>
           <p:cNvPr id="10" name="TextBox 9"/>
           <p:cNvSpPr txBox="1"/>
           <p:nvPr/>
         </p:nvSpPr>
         <p:spPr>
           <a:xfrm>
-            <a:off x="2286000" y="6291072"/>
-            <a:ext cx="4572000" cy="457200"/>
+            <a:off x="690372" y="219456"/>
+            <a:ext cx="1371600" cy="201168"/>
           </a:xfrm>
           <a:prstGeom prst="rect">
             <a:avLst/>
@@ -3521,18 +3464,280 @@
           </a:bodyPr>
           <a:lstStyle/>
           <a:p>
-            <a:pPr algn="ctr"/>
+            <a:r>
+              <a:rPr sz="1000">
+                <a:solidFill>
+                  <a:srgbClr val="1A1A2E"/>
+                </a:solidFill>
+              </a:rPr>
+              <a:t>Microsoft</a:t>
+            </a:r>
+          </a:p>
+        </p:txBody>
+      </p:sp>
+      <p:sp>
+        <p:nvSpPr>
+          <p:cNvPr id="11" name="TextBox 10"/>
+          <p:cNvSpPr txBox="1"/>
+          <p:nvPr/>
+        </p:nvSpPr>
+        <p:spPr>
+          <a:xfrm>
+            <a:off x="690372" y="393192"/>
+            <a:ext cx="1371600" cy="201168"/>
+          </a:xfrm>
+          <a:prstGeom prst="rect">
+            <a:avLst/>
+          </a:prstGeom>
+          <a:noFill/>
+        </p:spPr>
+        <p:txBody>
+          <a:bodyPr wrap="square">
+            <a:spAutoFit/>
+          </a:bodyPr>
+          <a:lstStyle/>
+          <a:p>
+            <a:r>
+              <a:rPr sz="1000">
+                <a:solidFill>
+                  <a:srgbClr val="1A1A2E"/>
+                </a:solidFill>
+              </a:rPr>
+              <a:t>Elevate</a:t>
+            </a:r>
+          </a:p>
+        </p:txBody>
+      </p:sp>
+      <p:sp>
+        <p:nvSpPr>
+          <p:cNvPr id="12" name="TextBox 11"/>
+          <p:cNvSpPr txBox="1"/>
+          <p:nvPr/>
+        </p:nvSpPr>
+        <p:spPr>
+          <a:xfrm>
+            <a:off x="411480" y="1325880"/>
+            <a:ext cx="7132320" cy="384048"/>
+          </a:xfrm>
+          <a:prstGeom prst="rect">
+            <a:avLst/>
+          </a:prstGeom>
+          <a:noFill/>
+        </p:spPr>
+        <p:txBody>
+          <a:bodyPr wrap="square">
+            <a:spAutoFit/>
+          </a:bodyPr>
+          <a:lstStyle/>
+          <a:p>
+            <a:r>
+              <a:rPr sz="1400" b="1">
+                <a:solidFill>
+                  <a:srgbClr val="1A1A2E"/>
+                </a:solidFill>
+              </a:rPr>
+              <a:t>CAPSTONE PROJECT</a:t>
+            </a:r>
+          </a:p>
+        </p:txBody>
+      </p:sp>
+      <p:sp>
+        <p:nvSpPr>
+          <p:cNvPr id="13" name="TextBox 12"/>
+          <p:cNvSpPr txBox="1"/>
+          <p:nvPr/>
+        </p:nvSpPr>
+        <p:spPr>
+          <a:xfrm>
+            <a:off x="411480" y="1719072"/>
+            <a:ext cx="7132320" cy="1554480"/>
+          </a:xfrm>
+          <a:prstGeom prst="rect">
+            <a:avLst/>
+          </a:prstGeom>
+          <a:noFill/>
+        </p:spPr>
+        <p:txBody>
+          <a:bodyPr wrap="square">
+            <a:spAutoFit/>
+          </a:bodyPr>
+          <a:lstStyle/>
+          <a:p>
+            <a:r>
+              <a:rPr sz="4600" b="1">
+                <a:solidFill>
+                  <a:srgbClr val="000000"/>
+                </a:solidFill>
+              </a:rPr>
+              <a:t>TCGA KIRC:</a:t>
+            </a:r>
+          </a:p>
+          <a:p>
+            <a:r>
+              <a:rPr sz="3800" b="1">
+                <a:solidFill>
+                  <a:srgbClr val="000000"/>
+                </a:solidFill>
+              </a:rPr>
+              <a:t>Survival Analysis</a:t>
+            </a:r>
+          </a:p>
+        </p:txBody>
+      </p:sp>
+      <p:sp>
+        <p:nvSpPr>
+          <p:cNvPr id="14" name="TextBox 13"/>
+          <p:cNvSpPr txBox="1"/>
+          <p:nvPr/>
+        </p:nvSpPr>
+        <p:spPr>
+          <a:xfrm>
+            <a:off x="411480" y="3429000"/>
+            <a:ext cx="7315200" cy="2926080"/>
+          </a:xfrm>
+          <a:prstGeom prst="rect">
+            <a:avLst/>
+          </a:prstGeom>
+          <a:noFill/>
+        </p:spPr>
+        <p:txBody>
+          <a:bodyPr wrap="square">
+            <a:spAutoFit/>
+          </a:bodyPr>
+          <a:lstStyle/>
+          <a:p>
+            <a:pPr>
+              <a:spcBef>
+                <a:spcPts val="400"/>
+              </a:spcBef>
+            </a:pPr>
+            <a:r>
+              <a:rPr sz="1400" b="1">
+                <a:solidFill>
+                  <a:srgbClr val="1A1A2E"/>
+                </a:solidFill>
+              </a:rPr>
+              <a:t>PRESENTED BY</a:t>
+            </a:r>
+          </a:p>
+          <a:p>
+            <a:pPr>
+              <a:spcBef>
+                <a:spcPts val="400"/>
+              </a:spcBef>
+            </a:pPr>
             <a:r>
               <a:rPr sz="1300" b="1">
                 <a:solidFill>
-                  <a:srgbClr val="FFFFFF"/>
-                </a:solidFill>
-              </a:rPr>
-              <a:t>Best: LASSO Cox  |  C-index = 0.805</a:t>
-            </a:r>
-          </a:p>
-        </p:txBody>
-      </p:sp>
+                  <a:srgbClr val="1A1A2E"/>
+                </a:solidFill>
+              </a:rPr>
+              <a:t>STUDENT NAME:  </a:t>
+            </a:r>
+            <a:r>
+              <a:rPr sz="1300" b="0">
+                <a:solidFill>
+                  <a:srgbClr val="555555"/>
+                </a:solidFill>
+              </a:rPr>
+              <a:t>Likitha Dudala</a:t>
+            </a:r>
+          </a:p>
+          <a:p>
+            <a:pPr>
+              <a:spcBef>
+                <a:spcPts val="400"/>
+              </a:spcBef>
+            </a:pPr>
+            <a:r>
+              <a:rPr sz="1300" b="1">
+                <a:solidFill>
+                  <a:srgbClr val="1A1A2E"/>
+                </a:solidFill>
+              </a:rPr>
+              <a:t>COLLEGE NAME:  </a:t>
+            </a:r>
+            <a:r>
+              <a:rPr sz="1300" b="0">
+                <a:solidFill>
+                  <a:srgbClr val="555555"/>
+                </a:solidFill>
+              </a:rPr>
+              <a:t>Sardar Vallabhbhai Patel Institute of Technology</a:t>
+            </a:r>
+          </a:p>
+          <a:p>
+            <a:pPr>
+              <a:spcBef>
+                <a:spcPts val="400"/>
+              </a:spcBef>
+            </a:pPr>
+            <a:r>
+              <a:rPr sz="1300" b="1">
+                <a:solidFill>
+                  <a:srgbClr val="1A1A2E"/>
+                </a:solidFill>
+              </a:rPr>
+              <a:t>DEPARTMENT:  </a:t>
+            </a:r>
+            <a:r>
+              <a:rPr sz="1300" b="0">
+                <a:solidFill>
+                  <a:srgbClr val="555555"/>
+                </a:solidFill>
+              </a:rPr>
+              <a:t>Computer Engineering</a:t>
+            </a:r>
+          </a:p>
+          <a:p>
+            <a:pPr>
+              <a:spcBef>
+                <a:spcPts val="400"/>
+              </a:spcBef>
+            </a:pPr>
+            <a:r>
+              <a:rPr sz="1300" b="1">
+                <a:solidFill>
+                  <a:srgbClr val="1A1A2E"/>
+                </a:solidFill>
+              </a:rPr>
+              <a:t>EMAIL ID:  </a:t>
+            </a:r>
+            <a:r>
+              <a:rPr sz="1300" b="0">
+                <a:solidFill>
+                  <a:srgbClr val="555555"/>
+                </a:solidFill>
+              </a:rPr>
+              <a:t>likithadudala04@gmail.com</a:t>
+            </a:r>
+          </a:p>
+        </p:txBody>
+      </p:sp>
+      <p:pic>
+        <p:nvPicPr>
+          <p:cNvPr id="15" name="Picture 14" descr="03_km_overall.png"/>
+          <p:cNvPicPr>
+            <a:picLocks noChangeAspect="1"/>
+          </p:cNvPicPr>
+          <p:nvPr/>
+        </p:nvPicPr>
+        <p:blipFill>
+          <a:blip r:embed="rId2"/>
+          <a:stretch>
+            <a:fillRect/>
+          </a:stretch>
+        </p:blipFill>
+        <p:spPr>
+          <a:xfrm>
+            <a:off x="7909560" y="320040"/>
+            <a:ext cx="4114800" cy="6217920"/>
+          </a:xfrm>
+          <a:prstGeom prst="rect">
+            <a:avLst/>
+          </a:prstGeom>
+        </p:spPr>
+      </p:pic>
     </p:spTree>
   </p:cSld>
   <p:clrMapOvr>
@@ -3560,13 +3765,13 @@
         <p:spPr>
           <a:xfrm>
             <a:off x="0" y="0"/>
-            <a:ext cx="9144000" cy="1234440"/>
+            <a:ext cx="12188952" cy="1188720"/>
           </a:xfrm>
           <a:prstGeom prst="rect">
             <a:avLst/>
           </a:prstGeom>
           <a:solidFill>
-            <a:srgbClr val="0053A5"/>
+            <a:srgbClr val="1E355E"/>
           </a:solidFill>
           <a:ln>
             <a:noFill/>
@@ -3602,8 +3807,8 @@
         </p:nvSpPr>
         <p:spPr>
           <a:xfrm>
-            <a:off x="228600" y="109728"/>
-            <a:ext cx="8686800" cy="822960"/>
+            <a:off x="320040" y="164592"/>
+            <a:ext cx="9811512" cy="868680"/>
           </a:xfrm>
           <a:prstGeom prst="rect">
             <a:avLst/>
@@ -3617,179 +3822,32 @@
           <a:lstStyle/>
           <a:p>
             <a:r>
-              <a:rPr sz="2800" b="1">
+              <a:rPr sz="3000" b="1">
                 <a:solidFill>
                   <a:srgbClr val="FFFFFF"/>
                 </a:solidFill>
               </a:rPr>
-              <a:t>References &amp; GitHub Repository</a:t>
-            </a:r>
-          </a:p>
-        </p:txBody>
-      </p:sp>
-      <p:sp>
-        <p:nvSpPr>
-          <p:cNvPr id="4" name="TextBox 3"/>
-          <p:cNvSpPr txBox="1"/>
-          <p:nvPr/>
-        </p:nvSpPr>
-        <p:spPr>
-          <a:xfrm>
-            <a:off x="274320" y="1508760"/>
-            <a:ext cx="8595360" cy="4846320"/>
-          </a:xfrm>
-          <a:prstGeom prst="rect">
-            <a:avLst/>
-          </a:prstGeom>
-          <a:noFill/>
-        </p:spPr>
-        <p:txBody>
-          <a:bodyPr wrap="square">
-            <a:spAutoFit/>
-          </a:bodyPr>
-          <a:lstStyle/>
-          <a:p>
-            <a:pPr>
-              <a:spcBef>
-                <a:spcPts val="800"/>
-              </a:spcBef>
-            </a:pPr>
-            <a:r>
-              <a:rPr sz="1500" b="1">
-                <a:solidFill>
-                  <a:srgbClr val="0053A5"/>
-                </a:solidFill>
-              </a:rPr>
-              <a:t>Datasets</a:t>
-            </a:r>
-          </a:p>
-          <a:p>
-            <a:pPr/>
-            <a:r>
-              <a:rPr sz="1300">
-                <a:solidFill>
-                  <a:srgbClr val="1A1A2E"/>
-                </a:solidFill>
-              </a:rPr>
-              <a:t>1.  The Cancer Genome Atlas (TCGA) — GDC Data Portal
-     https://portal.gdc.cancer.gov/</a:t>
-            </a:r>
-          </a:p>
-          <a:p>
-            <a:pPr/>
-            <a:r>
-              <a:rPr sz="1300">
-                <a:solidFill>
-                  <a:srgbClr val="1A1A2E"/>
-                </a:solidFill>
-              </a:rPr>
-              <a:t>2.  Project GitHub Repository:
-     https://github.com/LikithaDudala/tcga-kirc-project</a:t>
-            </a:r>
-          </a:p>
-          <a:p>
-            <a:pPr>
-              <a:spcBef>
-                <a:spcPts val="800"/>
-              </a:spcBef>
-            </a:pPr>
-            <a:r>
-              <a:rPr sz="1500" b="1">
-                <a:solidFill>
-                  <a:srgbClr val="0053A5"/>
-                </a:solidFill>
-              </a:rPr>
-              <a:t>Libraries &amp; Frameworks</a:t>
-            </a:r>
-          </a:p>
-          <a:p>
-            <a:pPr/>
-            <a:r>
-              <a:rPr sz="1300">
-                <a:solidFill>
-                  <a:srgbClr val="1A1A2E"/>
-                </a:solidFill>
-              </a:rPr>
-              <a:t>3.  Davidson-Pilon C. (2019). lifelines: survival analysis in Python. Journal of Open Source Software.</a:t>
-            </a:r>
-          </a:p>
-          <a:p>
-            <a:pPr/>
-            <a:r>
-              <a:rPr sz="1300">
-                <a:solidFill>
-                  <a:srgbClr val="1A1A2E"/>
-                </a:solidFill>
-              </a:rPr>
-              <a:t>4.  Pölsterl S. (2020). scikit-survival: A Library for Time-to-Event Analysis Building on scikit-learn. JMLR.</a:t>
-            </a:r>
-          </a:p>
-          <a:p>
-            <a:pPr/>
-            <a:r>
-              <a:rPr sz="1300">
-                <a:solidFill>
-                  <a:srgbClr val="1A1A2E"/>
-                </a:solidFill>
-              </a:rPr>
-              <a:t>5.  Katzman J.L. et al. (2018). DeepSurv: personalised treatment recommender system using Cox regression deep neural network. BMC Med Res Methodol.</a:t>
-            </a:r>
-          </a:p>
-          <a:p>
-            <a:pPr>
-              <a:spcBef>
-                <a:spcPts val="800"/>
-              </a:spcBef>
-            </a:pPr>
-            <a:r>
-              <a:rPr sz="1500" b="1">
-                <a:solidFill>
-                  <a:srgbClr val="0053A5"/>
-                </a:solidFill>
-              </a:rPr>
-              <a:t>Clinical Background</a:t>
-            </a:r>
-          </a:p>
-          <a:p>
-            <a:pPr/>
-            <a:r>
-              <a:rPr sz="1300">
-                <a:solidFill>
-                  <a:srgbClr val="1A1A2E"/>
-                </a:solidFill>
-              </a:rPr>
-              <a:t>6.  Ricketts C.J. et al. (2018). The TCGA KIRC comprehensive molecular characterization. Cell Reports 23(1):313–326.</a:t>
-            </a:r>
-          </a:p>
-          <a:p>
-            <a:pPr/>
-            <a:r>
-              <a:rPr sz="1300">
-                <a:solidFill>
-                  <a:srgbClr val="1A1A2E"/>
-                </a:solidFill>
-              </a:rPr>
-              <a:t>7.  Srivastava A. et al. (2021). Prognostic gene signatures in clear cell RCC. Cancers 13(6):1407.</a:t>
-            </a:r>
-          </a:p>
-        </p:txBody>
-      </p:sp>
-      <p:sp>
-        <p:nvSpPr>
-          <p:cNvPr id="5" name="Rectangle 4"/>
+              <a:t>REFERENCES:</a:t>
+            </a:r>
+          </a:p>
+        </p:txBody>
+      </p:sp>
+      <p:sp>
+        <p:nvSpPr>
+          <p:cNvPr id="4" name="Rectangle 3"/>
           <p:cNvSpPr/>
           <p:nvPr/>
         </p:nvSpPr>
         <p:spPr>
           <a:xfrm>
-            <a:off x="0" y="6583680"/>
-            <a:ext cx="9144000" cy="274320"/>
+            <a:off x="10268712" y="201168"/>
+            <a:ext cx="128016" cy="128016"/>
           </a:xfrm>
           <a:prstGeom prst="rect">
             <a:avLst/>
           </a:prstGeom>
           <a:solidFill>
-            <a:srgbClr val="E0E6F0"/>
+            <a:srgbClr val="F25022"/>
           </a:solidFill>
           <a:ln>
             <a:noFill/>
@@ -3819,14 +3877,143 @@
       </p:sp>
       <p:sp>
         <p:nvSpPr>
-          <p:cNvPr id="6" name="TextBox 5"/>
+          <p:cNvPr id="5" name="Rectangle 4"/>
+          <p:cNvSpPr/>
+          <p:nvPr/>
+        </p:nvSpPr>
+        <p:spPr>
+          <a:xfrm>
+            <a:off x="10419588" y="201168"/>
+            <a:ext cx="128016" cy="128016"/>
+          </a:xfrm>
+          <a:prstGeom prst="rect">
+            <a:avLst/>
+          </a:prstGeom>
+          <a:solidFill>
+            <a:srgbClr val="7FBA00"/>
+          </a:solidFill>
+          <a:ln>
+            <a:noFill/>
+          </a:ln>
+        </p:spPr>
+        <p:style>
+          <a:lnRef idx="1">
+            <a:schemeClr val="accent1"/>
+          </a:lnRef>
+          <a:fillRef idx="3">
+            <a:schemeClr val="accent1"/>
+          </a:fillRef>
+          <a:effectRef idx="2">
+            <a:schemeClr val="accent1"/>
+          </a:effectRef>
+          <a:fontRef idx="minor">
+            <a:schemeClr val="lt1"/>
+          </a:fontRef>
+        </p:style>
+        <p:txBody>
+          <a:bodyPr rtlCol="0" anchor="ctr"/>
+          <a:lstStyle/>
+          <a:p>
+            <a:pPr algn="ctr"/>
+          </a:p>
+        </p:txBody>
+      </p:sp>
+      <p:sp>
+        <p:nvSpPr>
+          <p:cNvPr id="6" name="Rectangle 5"/>
+          <p:cNvSpPr/>
+          <p:nvPr/>
+        </p:nvSpPr>
+        <p:spPr>
+          <a:xfrm>
+            <a:off x="10268712" y="352044"/>
+            <a:ext cx="128016" cy="128016"/>
+          </a:xfrm>
+          <a:prstGeom prst="rect">
+            <a:avLst/>
+          </a:prstGeom>
+          <a:solidFill>
+            <a:srgbClr val="00A4EF"/>
+          </a:solidFill>
+          <a:ln>
+            <a:noFill/>
+          </a:ln>
+        </p:spPr>
+        <p:style>
+          <a:lnRef idx="1">
+            <a:schemeClr val="accent1"/>
+          </a:lnRef>
+          <a:fillRef idx="3">
+            <a:schemeClr val="accent1"/>
+          </a:fillRef>
+          <a:effectRef idx="2">
+            <a:schemeClr val="accent1"/>
+          </a:effectRef>
+          <a:fontRef idx="minor">
+            <a:schemeClr val="lt1"/>
+          </a:fontRef>
+        </p:style>
+        <p:txBody>
+          <a:bodyPr rtlCol="0" anchor="ctr"/>
+          <a:lstStyle/>
+          <a:p>
+            <a:pPr algn="ctr"/>
+          </a:p>
+        </p:txBody>
+      </p:sp>
+      <p:sp>
+        <p:nvSpPr>
+          <p:cNvPr id="7" name="Rectangle 6"/>
+          <p:cNvSpPr/>
+          <p:nvPr/>
+        </p:nvSpPr>
+        <p:spPr>
+          <a:xfrm>
+            <a:off x="10419588" y="352044"/>
+            <a:ext cx="128016" cy="128016"/>
+          </a:xfrm>
+          <a:prstGeom prst="rect">
+            <a:avLst/>
+          </a:prstGeom>
+          <a:solidFill>
+            <a:srgbClr val="FFB900"/>
+          </a:solidFill>
+          <a:ln>
+            <a:noFill/>
+          </a:ln>
+        </p:spPr>
+        <p:style>
+          <a:lnRef idx="1">
+            <a:schemeClr val="accent1"/>
+          </a:lnRef>
+          <a:fillRef idx="3">
+            <a:schemeClr val="accent1"/>
+          </a:fillRef>
+          <a:effectRef idx="2">
+            <a:schemeClr val="accent1"/>
+          </a:effectRef>
+          <a:fontRef idx="minor">
+            <a:schemeClr val="lt1"/>
+          </a:fontRef>
+        </p:style>
+        <p:txBody>
+          <a:bodyPr rtlCol="0" anchor="ctr"/>
+          <a:lstStyle/>
+          <a:p>
+            <a:pPr algn="ctr"/>
+          </a:p>
+        </p:txBody>
+      </p:sp>
+      <p:sp>
+        <p:nvSpPr>
+          <p:cNvPr id="8" name="TextBox 7"/>
           <p:cNvSpPr txBox="1"/>
           <p:nvPr/>
         </p:nvSpPr>
         <p:spPr>
           <a:xfrm>
-            <a:off x="182880" y="6592824"/>
-            <a:ext cx="8778240" cy="256032"/>
+            <a:off x="10611612" y="192024"/>
+            <a:ext cx="1371600" cy="201168"/>
           </a:xfrm>
           <a:prstGeom prst="rect">
             <a:avLst/>
@@ -3839,14 +4026,289 @@
           </a:bodyPr>
           <a:lstStyle/>
           <a:p>
+            <a:r>
+              <a:rPr sz="1000">
+                <a:solidFill>
+                  <a:srgbClr val="FFFFFF"/>
+                </a:solidFill>
+              </a:rPr>
+              <a:t>Microsoft</a:t>
+            </a:r>
+          </a:p>
+        </p:txBody>
+      </p:sp>
+      <p:sp>
+        <p:nvSpPr>
+          <p:cNvPr id="9" name="TextBox 8"/>
+          <p:cNvSpPr txBox="1"/>
+          <p:nvPr/>
+        </p:nvSpPr>
+        <p:spPr>
+          <a:xfrm>
+            <a:off x="10611612" y="365760"/>
+            <a:ext cx="1371600" cy="201168"/>
+          </a:xfrm>
+          <a:prstGeom prst="rect">
+            <a:avLst/>
+          </a:prstGeom>
+          <a:noFill/>
+        </p:spPr>
+        <p:txBody>
+          <a:bodyPr wrap="square">
+            <a:spAutoFit/>
+          </a:bodyPr>
+          <a:lstStyle/>
+          <a:p>
+            <a:r>
+              <a:rPr sz="1000">
+                <a:solidFill>
+                  <a:srgbClr val="FFFFFF"/>
+                </a:solidFill>
+              </a:rPr>
+              <a:t>Elevate</a:t>
+            </a:r>
+          </a:p>
+        </p:txBody>
+      </p:sp>
+      <p:sp>
+        <p:nvSpPr>
+          <p:cNvPr id="10" name="Rectangle 9"/>
+          <p:cNvSpPr/>
+          <p:nvPr/>
+        </p:nvSpPr>
+        <p:spPr>
+          <a:xfrm>
+            <a:off x="0" y="6556248"/>
+            <a:ext cx="12188952" cy="301752"/>
+          </a:xfrm>
+          <a:prstGeom prst="rect">
+            <a:avLst/>
+          </a:prstGeom>
+          <a:solidFill>
+            <a:srgbClr val="00A050"/>
+          </a:solidFill>
+          <a:ln>
+            <a:noFill/>
+          </a:ln>
+        </p:spPr>
+        <p:style>
+          <a:lnRef idx="1">
+            <a:schemeClr val="accent1"/>
+          </a:lnRef>
+          <a:fillRef idx="3">
+            <a:schemeClr val="accent1"/>
+          </a:fillRef>
+          <a:effectRef idx="2">
+            <a:schemeClr val="accent1"/>
+          </a:effectRef>
+          <a:fontRef idx="minor">
+            <a:schemeClr val="lt1"/>
+          </a:fontRef>
+        </p:style>
+        <p:txBody>
+          <a:bodyPr rtlCol="0" anchor="ctr"/>
+          <a:lstStyle/>
+          <a:p>
             <a:pPr algn="ctr"/>
-            <a:r>
-              <a:rPr sz="900">
-                <a:solidFill>
-                  <a:srgbClr val="555555"/>
-                </a:solidFill>
-              </a:rPr>
-              <a:t>TCGA KIRC — Survival Analysis  ·  MS Elevate Internship Project</a:t>
+          </a:p>
+        </p:txBody>
+      </p:sp>
+      <p:sp>
+        <p:nvSpPr>
+          <p:cNvPr id="11" name="TextBox 10"/>
+          <p:cNvSpPr txBox="1"/>
+          <p:nvPr/>
+        </p:nvSpPr>
+        <p:spPr>
+          <a:xfrm>
+            <a:off x="320040" y="1298448"/>
+            <a:ext cx="11548872" cy="5148072"/>
+          </a:xfrm>
+          <a:prstGeom prst="rect">
+            <a:avLst/>
+          </a:prstGeom>
+          <a:noFill/>
+        </p:spPr>
+        <p:txBody>
+          <a:bodyPr wrap="square">
+            <a:spAutoFit/>
+          </a:bodyPr>
+          <a:lstStyle/>
+          <a:p>
+            <a:pPr>
+              <a:spcBef>
+                <a:spcPts val="900"/>
+              </a:spcBef>
+            </a:pPr>
+            <a:r>
+              <a:rPr sz="1500" b="1">
+                <a:solidFill>
+                  <a:srgbClr val="1E355E"/>
+                </a:solidFill>
+              </a:rPr>
+              <a:t>Datasets</a:t>
+            </a:r>
+          </a:p>
+          <a:p>
+            <a:pPr lvl="1"/>
+            <a:r>
+              <a:rPr sz="1300">
+                <a:solidFill>
+                  <a:srgbClr val="000000"/>
+                </a:solidFill>
+              </a:rPr>
+              <a:t>1.  The Cancer Genome Atlas (TCGA) — GDC Data Portal</a:t>
+            </a:r>
+          </a:p>
+          <a:p>
+            <a:pPr lvl="2"/>
+            <a:r>
+              <a:rPr sz="1300">
+                <a:solidFill>
+                  <a:srgbClr val="000000"/>
+                </a:solidFill>
+              </a:rPr>
+              <a:t>https://portal.gdc.cancer.gov/projects/TCGA-KIRC</a:t>
+            </a:r>
+          </a:p>
+          <a:p>
+            <a:pPr lvl="1"/>
+            <a:r>
+              <a:rPr sz="1300">
+                <a:solidFill>
+                  <a:srgbClr val="000000"/>
+                </a:solidFill>
+              </a:rPr>
+              <a:t>2.  UCSC Xena — RNA-seq gene expression</a:t>
+            </a:r>
+          </a:p>
+          <a:p>
+            <a:pPr lvl="2"/>
+            <a:r>
+              <a:rPr sz="1300">
+                <a:solidFill>
+                  <a:srgbClr val="000000"/>
+                </a:solidFill>
+              </a:rPr>
+              <a:t>https://xenabrowser.net/datapages/</a:t>
+            </a:r>
+          </a:p>
+          <a:p>
+            <a:pPr/>
+            <a:r>
+              <a:rPr sz="1300">
+                <a:solidFill>
+                  <a:srgbClr val="000000"/>
+                </a:solidFill>
+              </a:rPr>
+              <a:t/>
+            </a:r>
+          </a:p>
+          <a:p>
+            <a:pPr>
+              <a:spcBef>
+                <a:spcPts val="900"/>
+              </a:spcBef>
+            </a:pPr>
+            <a:r>
+              <a:rPr sz="1500" b="1">
+                <a:solidFill>
+                  <a:srgbClr val="1E355E"/>
+                </a:solidFill>
+              </a:rPr>
+              <a:t>Libraries &amp; Frameworks</a:t>
+            </a:r>
+          </a:p>
+          <a:p>
+            <a:pPr lvl="1"/>
+            <a:r>
+              <a:rPr sz="1300">
+                <a:solidFill>
+                  <a:srgbClr val="000000"/>
+                </a:solidFill>
+              </a:rPr>
+              <a:t>3.  Davidson-Pilon C. et al. (2019). lifelines. Journal of Open Source Software.</a:t>
+            </a:r>
+          </a:p>
+          <a:p>
+            <a:pPr lvl="1"/>
+            <a:r>
+              <a:rPr sz="1300">
+                <a:solidFill>
+                  <a:srgbClr val="000000"/>
+                </a:solidFill>
+              </a:rPr>
+              <a:t>4.  Poelsterl S. (2020). scikit-survival. JMLR 21(212):1-6.</a:t>
+            </a:r>
+          </a:p>
+          <a:p>
+            <a:pPr lvl="1"/>
+            <a:r>
+              <a:rPr sz="1300">
+                <a:solidFill>
+                  <a:srgbClr val="000000"/>
+                </a:solidFill>
+              </a:rPr>
+              <a:t>5.  Katzman J.L. et al. (2018). DeepSurv. BMC Med Res Methodol 18:24.</a:t>
+            </a:r>
+          </a:p>
+          <a:p>
+            <a:pPr lvl="1"/>
+            <a:r>
+              <a:rPr sz="1300">
+                <a:solidFill>
+                  <a:srgbClr val="000000"/>
+                </a:solidFill>
+              </a:rPr>
+              <a:t>6.  Ricketts C.J. et al. (2018). TCGA KIRC. Cell Reports 23(1):313-326.</a:t>
+            </a:r>
+          </a:p>
+          <a:p>
+            <a:pPr/>
+            <a:r>
+              <a:rPr sz="1300">
+                <a:solidFill>
+                  <a:srgbClr val="000000"/>
+                </a:solidFill>
+              </a:rPr>
+              <a:t/>
+            </a:r>
+          </a:p>
+          <a:p>
+            <a:pPr>
+              <a:spcBef>
+                <a:spcPts val="900"/>
+              </a:spcBef>
+            </a:pPr>
+            <a:r>
+              <a:rPr sz="1500" b="1">
+                <a:solidFill>
+                  <a:srgbClr val="1E355E"/>
+                </a:solidFill>
+              </a:rPr>
+              <a:t>Project Links</a:t>
+            </a:r>
+          </a:p>
+          <a:p>
+            <a:pPr lvl="1"/>
+            <a:r>
+              <a:rPr sz="1300">
+                <a:solidFill>
+                  <a:srgbClr val="000000"/>
+                </a:solidFill>
+              </a:rPr>
+              <a:t>GitHub:   https://github.com/LikithaDudala/tcga-kirc-project</a:t>
+            </a:r>
+          </a:p>
+          <a:p>
+            <a:pPr lvl="1"/>
+            <a:r>
+              <a:rPr sz="1300">
+                <a:solidFill>
+                  <a:srgbClr val="000000"/>
+                </a:solidFill>
+              </a:rPr>
+              <a:t>Live App: https://tcga-kirc.streamlit.app/</a:t>
             </a:r>
           </a:p>
         </p:txBody>
@@ -3878,13 +4340,13 @@
         <p:spPr>
           <a:xfrm>
             <a:off x="0" y="0"/>
-            <a:ext cx="9144000" cy="6858000"/>
+            <a:ext cx="12188952" cy="1005840"/>
           </a:xfrm>
           <a:prstGeom prst="rect">
             <a:avLst/>
           </a:prstGeom>
           <a:solidFill>
-            <a:srgbClr val="0053A5"/>
+            <a:srgbClr val="1E355E"/>
           </a:solidFill>
           <a:ln>
             <a:noFill/>
@@ -3920,14 +4382,14 @@
         </p:nvSpPr>
         <p:spPr>
           <a:xfrm>
-            <a:off x="0" y="3200400"/>
-            <a:ext cx="9144000" cy="109728"/>
+            <a:off x="10268712" y="182880"/>
+            <a:ext cx="128016" cy="128016"/>
           </a:xfrm>
           <a:prstGeom prst="rect">
             <a:avLst/>
           </a:prstGeom>
           <a:solidFill>
-            <a:srgbClr val="E65400"/>
+            <a:srgbClr val="F25022"/>
           </a:solidFill>
           <a:ln>
             <a:noFill/>
@@ -3963,14 +4425,14 @@
         </p:nvSpPr>
         <p:spPr>
           <a:xfrm>
-            <a:off x="0" y="5989320"/>
-            <a:ext cx="9144000" cy="868680"/>
+            <a:off x="10419588" y="182880"/>
+            <a:ext cx="128016" cy="128016"/>
           </a:xfrm>
           <a:prstGeom prst="rect">
             <a:avLst/>
           </a:prstGeom>
           <a:solidFill>
-            <a:srgbClr val="1A1A2E"/>
+            <a:srgbClr val="7FBA00"/>
           </a:solidFill>
           <a:ln>
             <a:noFill/>
@@ -4000,14 +4462,100 @@
       </p:sp>
       <p:sp>
         <p:nvSpPr>
-          <p:cNvPr id="5" name="TextBox 4"/>
+          <p:cNvPr id="5" name="Rectangle 4"/>
+          <p:cNvSpPr/>
+          <p:nvPr/>
+        </p:nvSpPr>
+        <p:spPr>
+          <a:xfrm>
+            <a:off x="10268712" y="333756"/>
+            <a:ext cx="128016" cy="128016"/>
+          </a:xfrm>
+          <a:prstGeom prst="rect">
+            <a:avLst/>
+          </a:prstGeom>
+          <a:solidFill>
+            <a:srgbClr val="00A4EF"/>
+          </a:solidFill>
+          <a:ln>
+            <a:noFill/>
+          </a:ln>
+        </p:spPr>
+        <p:style>
+          <a:lnRef idx="1">
+            <a:schemeClr val="accent1"/>
+          </a:lnRef>
+          <a:fillRef idx="3">
+            <a:schemeClr val="accent1"/>
+          </a:fillRef>
+          <a:effectRef idx="2">
+            <a:schemeClr val="accent1"/>
+          </a:effectRef>
+          <a:fontRef idx="minor">
+            <a:schemeClr val="lt1"/>
+          </a:fontRef>
+        </p:style>
+        <p:txBody>
+          <a:bodyPr rtlCol="0" anchor="ctr"/>
+          <a:lstStyle/>
+          <a:p>
+            <a:pPr algn="ctr"/>
+          </a:p>
+        </p:txBody>
+      </p:sp>
+      <p:sp>
+        <p:nvSpPr>
+          <p:cNvPr id="6" name="Rectangle 5"/>
+          <p:cNvSpPr/>
+          <p:nvPr/>
+        </p:nvSpPr>
+        <p:spPr>
+          <a:xfrm>
+            <a:off x="10419588" y="333756"/>
+            <a:ext cx="128016" cy="128016"/>
+          </a:xfrm>
+          <a:prstGeom prst="rect">
+            <a:avLst/>
+          </a:prstGeom>
+          <a:solidFill>
+            <a:srgbClr val="FFB900"/>
+          </a:solidFill>
+          <a:ln>
+            <a:noFill/>
+          </a:ln>
+        </p:spPr>
+        <p:style>
+          <a:lnRef idx="1">
+            <a:schemeClr val="accent1"/>
+          </a:lnRef>
+          <a:fillRef idx="3">
+            <a:schemeClr val="accent1"/>
+          </a:fillRef>
+          <a:effectRef idx="2">
+            <a:schemeClr val="accent1"/>
+          </a:effectRef>
+          <a:fontRef idx="minor">
+            <a:schemeClr val="lt1"/>
+          </a:fontRef>
+        </p:style>
+        <p:txBody>
+          <a:bodyPr rtlCol="0" anchor="ctr"/>
+          <a:lstStyle/>
+          <a:p>
+            <a:pPr algn="ctr"/>
+          </a:p>
+        </p:txBody>
+      </p:sp>
+      <p:sp>
+        <p:nvSpPr>
+          <p:cNvPr id="7" name="TextBox 6"/>
           <p:cNvSpPr txBox="1"/>
           <p:nvPr/>
         </p:nvSpPr>
         <p:spPr>
           <a:xfrm>
-            <a:off x="914400" y="1005840"/>
-            <a:ext cx="7315200" cy="1645920"/>
+            <a:off x="10611612" y="173736"/>
+            <a:ext cx="1371600" cy="201168"/>
           </a:xfrm>
           <a:prstGeom prst="rect">
             <a:avLst/>
@@ -4020,28 +4568,27 @@
           </a:bodyPr>
           <a:lstStyle/>
           <a:p>
-            <a:pPr algn="ctr"/>
-            <a:r>
-              <a:rPr sz="5400" b="1">
+            <a:r>
+              <a:rPr sz="1000">
                 <a:solidFill>
                   <a:srgbClr val="FFFFFF"/>
                 </a:solidFill>
               </a:rPr>
-              <a:t>Thank You</a:t>
-            </a:r>
-          </a:p>
-        </p:txBody>
-      </p:sp>
-      <p:sp>
-        <p:nvSpPr>
-          <p:cNvPr id="6" name="TextBox 5"/>
+              <a:t>Microsoft</a:t>
+            </a:r>
+          </a:p>
+        </p:txBody>
+      </p:sp>
+      <p:sp>
+        <p:nvSpPr>
+          <p:cNvPr id="8" name="TextBox 7"/>
           <p:cNvSpPr txBox="1"/>
           <p:nvPr/>
         </p:nvSpPr>
         <p:spPr>
           <a:xfrm>
-            <a:off x="914400" y="2606040"/>
-            <a:ext cx="7315200" cy="685800"/>
+            <a:off x="10611612" y="347472"/>
+            <a:ext cx="1371600" cy="201168"/>
           </a:xfrm>
           <a:prstGeom prst="rect">
             <a:avLst/>
@@ -4054,28 +4601,70 @@
           </a:bodyPr>
           <a:lstStyle/>
           <a:p>
+            <a:r>
+              <a:rPr sz="1000">
+                <a:solidFill>
+                  <a:srgbClr val="FFFFFF"/>
+                </a:solidFill>
+              </a:rPr>
+              <a:t>Elevate</a:t>
+            </a:r>
+          </a:p>
+        </p:txBody>
+      </p:sp>
+      <p:sp>
+        <p:nvSpPr>
+          <p:cNvPr id="9" name="Rectangle 8"/>
+          <p:cNvSpPr/>
+          <p:nvPr/>
+        </p:nvSpPr>
+        <p:spPr>
+          <a:xfrm>
+            <a:off x="0" y="6556248"/>
+            <a:ext cx="12188952" cy="301752"/>
+          </a:xfrm>
+          <a:prstGeom prst="rect">
+            <a:avLst/>
+          </a:prstGeom>
+          <a:solidFill>
+            <a:srgbClr val="00A050"/>
+          </a:solidFill>
+          <a:ln>
+            <a:noFill/>
+          </a:ln>
+        </p:spPr>
+        <p:style>
+          <a:lnRef idx="1">
+            <a:schemeClr val="accent1"/>
+          </a:lnRef>
+          <a:fillRef idx="3">
+            <a:schemeClr val="accent1"/>
+          </a:fillRef>
+          <a:effectRef idx="2">
+            <a:schemeClr val="accent1"/>
+          </a:effectRef>
+          <a:fontRef idx="minor">
+            <a:schemeClr val="lt1"/>
+          </a:fontRef>
+        </p:style>
+        <p:txBody>
+          <a:bodyPr rtlCol="0" anchor="ctr"/>
+          <a:lstStyle/>
+          <a:p>
             <a:pPr algn="ctr"/>
-            <a:r>
-              <a:rPr sz="2200">
-                <a:solidFill>
-                  <a:srgbClr val="BBD4FF"/>
-                </a:solidFill>
-              </a:rPr>
-              <a:t>Questions?</a:t>
-            </a:r>
-          </a:p>
-        </p:txBody>
-      </p:sp>
-      <p:sp>
-        <p:nvSpPr>
-          <p:cNvPr id="7" name="TextBox 6"/>
+          </a:p>
+        </p:txBody>
+      </p:sp>
+      <p:sp>
+        <p:nvSpPr>
+          <p:cNvPr id="10" name="TextBox 9"/>
           <p:cNvSpPr txBox="1"/>
           <p:nvPr/>
         </p:nvSpPr>
         <p:spPr>
           <a:xfrm>
-            <a:off x="457200" y="3474720"/>
-            <a:ext cx="8229600" cy="2286000"/>
+            <a:off x="457200" y="1828800"/>
+            <a:ext cx="11274552" cy="2011680"/>
           </a:xfrm>
           <a:prstGeom prst="rect">
             <a:avLst/>
@@ -4090,68 +4679,12 @@
           <a:p>
             <a:pPr algn="ctr"/>
             <a:r>
-              <a:rPr sz="1500">
-                <a:solidFill>
-                  <a:srgbClr val="BBD4FF"/>
-                </a:solidFill>
-              </a:rPr>
-              <a:t>[STUDENT NAME]  ·  [COLLEGE]  ·  [DEPARTMENT]</a:t>
-            </a:r>
-          </a:p>
-          <a:p>
-            <a:pPr algn="ctr"/>
-            <a:r>
-              <a:rPr sz="1500">
-                <a:solidFill>
-                  <a:srgbClr val="BBD4FF"/>
-                </a:solidFill>
-              </a:rPr>
-              <a:t>[EMAIL]</a:t>
-            </a:r>
-          </a:p>
-          <a:p>
-            <a:pPr algn="ctr"/>
-            <a:r>
-              <a:rPr sz="1500">
-                <a:solidFill>
-                  <a:srgbClr val="BBD4FF"/>
-                </a:solidFill>
-              </a:rPr>
-              <a:t>GitHub:  https://github.com/LikithaDudala/tcga-kirc-project</a:t>
-            </a:r>
-          </a:p>
-        </p:txBody>
-      </p:sp>
-      <p:sp>
-        <p:nvSpPr>
-          <p:cNvPr id="8" name="TextBox 7"/>
-          <p:cNvSpPr txBox="1"/>
-          <p:nvPr/>
-        </p:nvSpPr>
-        <p:spPr>
-          <a:xfrm>
-            <a:off x="457200" y="6035040"/>
-            <a:ext cx="8229600" cy="731520"/>
-          </a:xfrm>
-          <a:prstGeom prst="rect">
-            <a:avLst/>
-          </a:prstGeom>
-          <a:noFill/>
-        </p:spPr>
-        <p:txBody>
-          <a:bodyPr wrap="square">
-            <a:spAutoFit/>
-          </a:bodyPr>
-          <a:lstStyle/>
-          <a:p>
-            <a:pPr algn="ctr"/>
-            <a:r>
-              <a:rPr sz="1100">
-                <a:solidFill>
-                  <a:srgbClr val="8899AA"/>
-                </a:solidFill>
-              </a:rPr>
-              <a:t>TCGA KIRC — Survival Analysis  ·  MS Elevate Internship Project</a:t>
+              <a:rPr sz="6400" b="1">
+                <a:solidFill>
+                  <a:srgbClr val="1E355E"/>
+                </a:solidFill>
+              </a:rPr>
+              <a:t>Thank You</a:t>
             </a:r>
           </a:p>
         </p:txBody>
@@ -4183,13 +4716,13 @@
         <p:spPr>
           <a:xfrm>
             <a:off x="0" y="0"/>
-            <a:ext cx="9144000" cy="1234440"/>
+            <a:ext cx="12188952" cy="1188720"/>
           </a:xfrm>
           <a:prstGeom prst="rect">
             <a:avLst/>
           </a:prstGeom>
           <a:solidFill>
-            <a:srgbClr val="0053A5"/>
+            <a:srgbClr val="1E355E"/>
           </a:solidFill>
           <a:ln>
             <a:noFill/>
@@ -4225,8 +4758,8 @@
         </p:nvSpPr>
         <p:spPr>
           <a:xfrm>
-            <a:off x="228600" y="109728"/>
-            <a:ext cx="8686800" cy="822960"/>
+            <a:off x="320040" y="164592"/>
+            <a:ext cx="9811512" cy="868680"/>
           </a:xfrm>
           <a:prstGeom prst="rect">
             <a:avLst/>
@@ -4240,143 +4773,32 @@
           <a:lstStyle/>
           <a:p>
             <a:r>
-              <a:rPr sz="2800" b="1">
+              <a:rPr sz="3000" b="1">
                 <a:solidFill>
                   <a:srgbClr val="FFFFFF"/>
                 </a:solidFill>
               </a:rPr>
-              <a:t>Outline</a:t>
-            </a:r>
-          </a:p>
-        </p:txBody>
-      </p:sp>
-      <p:sp>
-        <p:nvSpPr>
-          <p:cNvPr id="4" name="TextBox 3"/>
-          <p:cNvSpPr txBox="1"/>
-          <p:nvPr/>
-        </p:nvSpPr>
-        <p:spPr>
-          <a:xfrm>
-            <a:off x="274320" y="1645920"/>
-            <a:ext cx="8595360" cy="4846320"/>
-          </a:xfrm>
-          <a:prstGeom prst="rect">
-            <a:avLst/>
-          </a:prstGeom>
-          <a:noFill/>
-        </p:spPr>
-        <p:txBody>
-          <a:bodyPr wrap="square">
-            <a:spAutoFit/>
-          </a:bodyPr>
-          <a:lstStyle/>
-          <a:p>
-            <a:pPr/>
-            <a:r>
-              <a:rPr sz="1300">
-                <a:solidFill>
-                  <a:srgbClr val="1A1A2E"/>
-                </a:solidFill>
-              </a:rPr>
-              <a:t>1.   Problem Statement</a:t>
-            </a:r>
-          </a:p>
-          <a:p>
-            <a:pPr/>
-            <a:r>
-              <a:rPr sz="1300">
-                <a:solidFill>
-                  <a:srgbClr val="1A1A2E"/>
-                </a:solidFill>
-              </a:rPr>
-              <a:t>2.   Proposed Solution</a:t>
-            </a:r>
-          </a:p>
-          <a:p>
-            <a:pPr/>
-            <a:r>
-              <a:rPr sz="1300">
-                <a:solidFill>
-                  <a:srgbClr val="1A1A2E"/>
-                </a:solidFill>
-              </a:rPr>
-              <a:t>3.   System Approach &amp; Technical Stack</a:t>
-            </a:r>
-          </a:p>
-          <a:p>
-            <a:pPr/>
-            <a:r>
-              <a:rPr sz="1300">
-                <a:solidFill>
-                  <a:srgbClr val="1A1A2E"/>
-                </a:solidFill>
-              </a:rPr>
-              <a:t>4.   Algorithm &amp; Deployment</a:t>
-            </a:r>
-          </a:p>
-          <a:p>
-            <a:pPr/>
-            <a:r>
-              <a:rPr sz="1300">
-                <a:solidFill>
-                  <a:srgbClr val="1A1A2E"/>
-                </a:solidFill>
-              </a:rPr>
-              <a:t>5.   Results &amp; Model Performance</a:t>
-            </a:r>
-          </a:p>
-          <a:p>
-            <a:pPr/>
-            <a:r>
-              <a:rPr sz="1300">
-                <a:solidFill>
-                  <a:srgbClr val="1A1A2E"/>
-                </a:solidFill>
-              </a:rPr>
-              <a:t>6.   Conclusion</a:t>
-            </a:r>
-          </a:p>
-          <a:p>
-            <a:pPr/>
-            <a:r>
-              <a:rPr sz="1300">
-                <a:solidFill>
-                  <a:srgbClr val="1A1A2E"/>
-                </a:solidFill>
-              </a:rPr>
-              <a:t>7.   Future Scope</a:t>
-            </a:r>
-          </a:p>
-          <a:p>
-            <a:pPr/>
-            <a:r>
-              <a:rPr sz="1300">
-                <a:solidFill>
-                  <a:srgbClr val="1A1A2E"/>
-                </a:solidFill>
-              </a:rPr>
-              <a:t>8.   References &amp; GitHub Repository</a:t>
-            </a:r>
-          </a:p>
-        </p:txBody>
-      </p:sp>
-      <p:sp>
-        <p:nvSpPr>
-          <p:cNvPr id="5" name="Rectangle 4"/>
+              <a:t>OUTLINE:</a:t>
+            </a:r>
+          </a:p>
+        </p:txBody>
+      </p:sp>
+      <p:sp>
+        <p:nvSpPr>
+          <p:cNvPr id="4" name="Rectangle 3"/>
           <p:cNvSpPr/>
           <p:nvPr/>
         </p:nvSpPr>
         <p:spPr>
           <a:xfrm>
-            <a:off x="0" y="6583680"/>
-            <a:ext cx="9144000" cy="274320"/>
+            <a:off x="10268712" y="201168"/>
+            <a:ext cx="128016" cy="128016"/>
           </a:xfrm>
           <a:prstGeom prst="rect">
             <a:avLst/>
           </a:prstGeom>
           <a:solidFill>
-            <a:srgbClr val="E0E6F0"/>
+            <a:srgbClr val="F25022"/>
           </a:solidFill>
           <a:ln>
             <a:noFill/>
@@ -4406,14 +4828,143 @@
       </p:sp>
       <p:sp>
         <p:nvSpPr>
-          <p:cNvPr id="6" name="TextBox 5"/>
+          <p:cNvPr id="5" name="Rectangle 4"/>
+          <p:cNvSpPr/>
+          <p:nvPr/>
+        </p:nvSpPr>
+        <p:spPr>
+          <a:xfrm>
+            <a:off x="10419588" y="201168"/>
+            <a:ext cx="128016" cy="128016"/>
+          </a:xfrm>
+          <a:prstGeom prst="rect">
+            <a:avLst/>
+          </a:prstGeom>
+          <a:solidFill>
+            <a:srgbClr val="7FBA00"/>
+          </a:solidFill>
+          <a:ln>
+            <a:noFill/>
+          </a:ln>
+        </p:spPr>
+        <p:style>
+          <a:lnRef idx="1">
+            <a:schemeClr val="accent1"/>
+          </a:lnRef>
+          <a:fillRef idx="3">
+            <a:schemeClr val="accent1"/>
+          </a:fillRef>
+          <a:effectRef idx="2">
+            <a:schemeClr val="accent1"/>
+          </a:effectRef>
+          <a:fontRef idx="minor">
+            <a:schemeClr val="lt1"/>
+          </a:fontRef>
+        </p:style>
+        <p:txBody>
+          <a:bodyPr rtlCol="0" anchor="ctr"/>
+          <a:lstStyle/>
+          <a:p>
+            <a:pPr algn="ctr"/>
+          </a:p>
+        </p:txBody>
+      </p:sp>
+      <p:sp>
+        <p:nvSpPr>
+          <p:cNvPr id="6" name="Rectangle 5"/>
+          <p:cNvSpPr/>
+          <p:nvPr/>
+        </p:nvSpPr>
+        <p:spPr>
+          <a:xfrm>
+            <a:off x="10268712" y="352044"/>
+            <a:ext cx="128016" cy="128016"/>
+          </a:xfrm>
+          <a:prstGeom prst="rect">
+            <a:avLst/>
+          </a:prstGeom>
+          <a:solidFill>
+            <a:srgbClr val="00A4EF"/>
+          </a:solidFill>
+          <a:ln>
+            <a:noFill/>
+          </a:ln>
+        </p:spPr>
+        <p:style>
+          <a:lnRef idx="1">
+            <a:schemeClr val="accent1"/>
+          </a:lnRef>
+          <a:fillRef idx="3">
+            <a:schemeClr val="accent1"/>
+          </a:fillRef>
+          <a:effectRef idx="2">
+            <a:schemeClr val="accent1"/>
+          </a:effectRef>
+          <a:fontRef idx="minor">
+            <a:schemeClr val="lt1"/>
+          </a:fontRef>
+        </p:style>
+        <p:txBody>
+          <a:bodyPr rtlCol="0" anchor="ctr"/>
+          <a:lstStyle/>
+          <a:p>
+            <a:pPr algn="ctr"/>
+          </a:p>
+        </p:txBody>
+      </p:sp>
+      <p:sp>
+        <p:nvSpPr>
+          <p:cNvPr id="7" name="Rectangle 6"/>
+          <p:cNvSpPr/>
+          <p:nvPr/>
+        </p:nvSpPr>
+        <p:spPr>
+          <a:xfrm>
+            <a:off x="10419588" y="352044"/>
+            <a:ext cx="128016" cy="128016"/>
+          </a:xfrm>
+          <a:prstGeom prst="rect">
+            <a:avLst/>
+          </a:prstGeom>
+          <a:solidFill>
+            <a:srgbClr val="FFB900"/>
+          </a:solidFill>
+          <a:ln>
+            <a:noFill/>
+          </a:ln>
+        </p:spPr>
+        <p:style>
+          <a:lnRef idx="1">
+            <a:schemeClr val="accent1"/>
+          </a:lnRef>
+          <a:fillRef idx="3">
+            <a:schemeClr val="accent1"/>
+          </a:fillRef>
+          <a:effectRef idx="2">
+            <a:schemeClr val="accent1"/>
+          </a:effectRef>
+          <a:fontRef idx="minor">
+            <a:schemeClr val="lt1"/>
+          </a:fontRef>
+        </p:style>
+        <p:txBody>
+          <a:bodyPr rtlCol="0" anchor="ctr"/>
+          <a:lstStyle/>
+          <a:p>
+            <a:pPr algn="ctr"/>
+          </a:p>
+        </p:txBody>
+      </p:sp>
+      <p:sp>
+        <p:nvSpPr>
+          <p:cNvPr id="8" name="TextBox 7"/>
           <p:cNvSpPr txBox="1"/>
           <p:nvPr/>
         </p:nvSpPr>
         <p:spPr>
           <a:xfrm>
-            <a:off x="182880" y="6592824"/>
-            <a:ext cx="8778240" cy="256032"/>
+            <a:off x="10611612" y="192024"/>
+            <a:ext cx="1371600" cy="201168"/>
           </a:xfrm>
           <a:prstGeom prst="rect">
             <a:avLst/>
@@ -4426,14 +4977,200 @@
           </a:bodyPr>
           <a:lstStyle/>
           <a:p>
+            <a:r>
+              <a:rPr sz="1000">
+                <a:solidFill>
+                  <a:srgbClr val="FFFFFF"/>
+                </a:solidFill>
+              </a:rPr>
+              <a:t>Microsoft</a:t>
+            </a:r>
+          </a:p>
+        </p:txBody>
+      </p:sp>
+      <p:sp>
+        <p:nvSpPr>
+          <p:cNvPr id="9" name="TextBox 8"/>
+          <p:cNvSpPr txBox="1"/>
+          <p:nvPr/>
+        </p:nvSpPr>
+        <p:spPr>
+          <a:xfrm>
+            <a:off x="10611612" y="365760"/>
+            <a:ext cx="1371600" cy="201168"/>
+          </a:xfrm>
+          <a:prstGeom prst="rect">
+            <a:avLst/>
+          </a:prstGeom>
+          <a:noFill/>
+        </p:spPr>
+        <p:txBody>
+          <a:bodyPr wrap="square">
+            <a:spAutoFit/>
+          </a:bodyPr>
+          <a:lstStyle/>
+          <a:p>
+            <a:r>
+              <a:rPr sz="1000">
+                <a:solidFill>
+                  <a:srgbClr val="FFFFFF"/>
+                </a:solidFill>
+              </a:rPr>
+              <a:t>Elevate</a:t>
+            </a:r>
+          </a:p>
+        </p:txBody>
+      </p:sp>
+      <p:sp>
+        <p:nvSpPr>
+          <p:cNvPr id="10" name="Rectangle 9"/>
+          <p:cNvSpPr/>
+          <p:nvPr/>
+        </p:nvSpPr>
+        <p:spPr>
+          <a:xfrm>
+            <a:off x="0" y="6556248"/>
+            <a:ext cx="12188952" cy="301752"/>
+          </a:xfrm>
+          <a:prstGeom prst="rect">
+            <a:avLst/>
+          </a:prstGeom>
+          <a:solidFill>
+            <a:srgbClr val="00A050"/>
+          </a:solidFill>
+          <a:ln>
+            <a:noFill/>
+          </a:ln>
+        </p:spPr>
+        <p:style>
+          <a:lnRef idx="1">
+            <a:schemeClr val="accent1"/>
+          </a:lnRef>
+          <a:fillRef idx="3">
+            <a:schemeClr val="accent1"/>
+          </a:fillRef>
+          <a:effectRef idx="2">
+            <a:schemeClr val="accent1"/>
+          </a:effectRef>
+          <a:fontRef idx="minor">
+            <a:schemeClr val="lt1"/>
+          </a:fontRef>
+        </p:style>
+        <p:txBody>
+          <a:bodyPr rtlCol="0" anchor="ctr"/>
+          <a:lstStyle/>
+          <a:p>
             <a:pPr algn="ctr"/>
-            <a:r>
-              <a:rPr sz="900">
-                <a:solidFill>
-                  <a:srgbClr val="555555"/>
-                </a:solidFill>
-              </a:rPr>
-              <a:t>TCGA KIRC — Survival Analysis  ·  MS Elevate Internship Project</a:t>
+          </a:p>
+        </p:txBody>
+      </p:sp>
+      <p:sp>
+        <p:nvSpPr>
+          <p:cNvPr id="11" name="TextBox 10"/>
+          <p:cNvSpPr txBox="1"/>
+          <p:nvPr/>
+        </p:nvSpPr>
+        <p:spPr>
+          <a:xfrm>
+            <a:off x="320040" y="1417320"/>
+            <a:ext cx="11548872" cy="5029200"/>
+          </a:xfrm>
+          <a:prstGeom prst="rect">
+            <a:avLst/>
+          </a:prstGeom>
+          <a:noFill/>
+        </p:spPr>
+        <p:txBody>
+          <a:bodyPr wrap="square">
+            <a:spAutoFit/>
+          </a:bodyPr>
+          <a:lstStyle/>
+          <a:p>
+            <a:pPr/>
+            <a:r>
+              <a:rPr sz="1300">
+                <a:solidFill>
+                  <a:srgbClr val="000000"/>
+                </a:solidFill>
+              </a:rPr>
+              <a:t>Problem Statement</a:t>
+            </a:r>
+          </a:p>
+          <a:p>
+            <a:pPr/>
+            <a:r>
+              <a:rPr sz="1300">
+                <a:solidFill>
+                  <a:srgbClr val="000000"/>
+                </a:solidFill>
+              </a:rPr>
+              <a:t>Proposed System / Solution</a:t>
+            </a:r>
+          </a:p>
+          <a:p>
+            <a:pPr/>
+            <a:r>
+              <a:rPr sz="1300">
+                <a:solidFill>
+                  <a:srgbClr val="000000"/>
+                </a:solidFill>
+              </a:rPr>
+              <a:t>System Development Approach  (Technology Used)</a:t>
+            </a:r>
+          </a:p>
+          <a:p>
+            <a:pPr/>
+            <a:r>
+              <a:rPr sz="1300">
+                <a:solidFill>
+                  <a:srgbClr val="000000"/>
+                </a:solidFill>
+              </a:rPr>
+              <a:t>Algorithm &amp; Deployment</a:t>
+            </a:r>
+          </a:p>
+          <a:p>
+            <a:pPr/>
+            <a:r>
+              <a:rPr sz="1300">
+                <a:solidFill>
+                  <a:srgbClr val="000000"/>
+                </a:solidFill>
+              </a:rPr>
+              <a:t>Result  (Output Images)</a:t>
+            </a:r>
+          </a:p>
+          <a:p>
+            <a:pPr/>
+            <a:r>
+              <a:rPr sz="1300">
+                <a:solidFill>
+                  <a:srgbClr val="000000"/>
+                </a:solidFill>
+              </a:rPr>
+              <a:t>Conclusion</a:t>
+            </a:r>
+          </a:p>
+          <a:p>
+            <a:pPr/>
+            <a:r>
+              <a:rPr sz="1300">
+                <a:solidFill>
+                  <a:srgbClr val="000000"/>
+                </a:solidFill>
+              </a:rPr>
+              <a:t>Future Scope</a:t>
+            </a:r>
+          </a:p>
+          <a:p>
+            <a:pPr/>
+            <a:r>
+              <a:rPr sz="1300">
+                <a:solidFill>
+                  <a:srgbClr val="000000"/>
+                </a:solidFill>
+              </a:rPr>
+              <a:t>References</a:t>
             </a:r>
           </a:p>
         </p:txBody>
@@ -4465,13 +5202,13 @@
         <p:spPr>
           <a:xfrm>
             <a:off x="0" y="0"/>
-            <a:ext cx="9144000" cy="1234440"/>
+            <a:ext cx="12188952" cy="1188720"/>
           </a:xfrm>
           <a:prstGeom prst="rect">
             <a:avLst/>
           </a:prstGeom>
           <a:solidFill>
-            <a:srgbClr val="0053A5"/>
+            <a:srgbClr val="1E355E"/>
           </a:solidFill>
           <a:ln>
             <a:noFill/>
@@ -4507,8 +5244,8 @@
         </p:nvSpPr>
         <p:spPr>
           <a:xfrm>
-            <a:off x="228600" y="109728"/>
-            <a:ext cx="8686800" cy="822960"/>
+            <a:off x="320040" y="164592"/>
+            <a:ext cx="9811512" cy="868680"/>
           </a:xfrm>
           <a:prstGeom prst="rect">
             <a:avLst/>
@@ -4522,177 +5259,32 @@
           <a:lstStyle/>
           <a:p>
             <a:r>
-              <a:rPr sz="2800" b="1">
+              <a:rPr sz="3000" b="1">
                 <a:solidFill>
                   <a:srgbClr val="FFFFFF"/>
                 </a:solidFill>
               </a:rPr>
-              <a:t>Problem Statement</a:t>
-            </a:r>
-          </a:p>
-        </p:txBody>
-      </p:sp>
-      <p:sp>
-        <p:nvSpPr>
-          <p:cNvPr id="4" name="TextBox 3"/>
-          <p:cNvSpPr txBox="1"/>
-          <p:nvPr/>
-        </p:nvSpPr>
-        <p:spPr>
-          <a:xfrm>
-            <a:off x="274320" y="1554480"/>
-            <a:ext cx="8595360" cy="4846320"/>
-          </a:xfrm>
-          <a:prstGeom prst="rect">
-            <a:avLst/>
-          </a:prstGeom>
-          <a:noFill/>
-        </p:spPr>
-        <p:txBody>
-          <a:bodyPr wrap="square">
-            <a:spAutoFit/>
-          </a:bodyPr>
-          <a:lstStyle/>
-          <a:p>
-            <a:pPr>
-              <a:spcBef>
-                <a:spcPts val="800"/>
-              </a:spcBef>
-            </a:pPr>
-            <a:r>
-              <a:rPr sz="1500" b="1">
-                <a:solidFill>
-                  <a:srgbClr val="0053A5"/>
-                </a:solidFill>
-              </a:rPr>
-              <a:t>Clinical Challenge</a:t>
-            </a:r>
-          </a:p>
-          <a:p>
-            <a:pPr/>
-            <a:r>
-              <a:rPr sz="1300">
-                <a:solidFill>
-                  <a:srgbClr val="1A1A2E"/>
-                </a:solidFill>
-              </a:rPr>
-              <a:t>Kidney Renal Clear Cell Carcinoma (KIRC) is the 3rd most common urological malignancy.</a:t>
-            </a:r>
-          </a:p>
-          <a:p>
-            <a:pPr/>
-            <a:r>
-              <a:rPr sz="1300">
-                <a:solidFill>
-                  <a:srgbClr val="1A1A2E"/>
-                </a:solidFill>
-              </a:rPr>
-              <a:t>Significant survival heterogeneity exists even within the same AJCC cancer stage.</a:t>
-            </a:r>
-          </a:p>
-          <a:p>
-            <a:pPr/>
-            <a:r>
-              <a:rPr sz="1300">
-                <a:solidFill>
-                  <a:srgbClr val="1A1A2E"/>
-                </a:solidFill>
-              </a:rPr>
-              <a:t>Clinicians lack quantitative tools to stratify patients by long-term mortality risk.</a:t>
-            </a:r>
-          </a:p>
-          <a:p>
-            <a:pPr>
-              <a:spcBef>
-                <a:spcPts val="800"/>
-              </a:spcBef>
-            </a:pPr>
-            <a:r>
-              <a:rPr sz="1500" b="1">
-                <a:solidFill>
-                  <a:srgbClr val="0053A5"/>
-                </a:solidFill>
-              </a:rPr>
-              <a:t>Data Challenge</a:t>
-            </a:r>
-          </a:p>
-          <a:p>
-            <a:pPr/>
-            <a:r>
-              <a:rPr sz="1300">
-                <a:solidFill>
-                  <a:srgbClr val="1A1A2E"/>
-                </a:solidFill>
-              </a:rPr>
-              <a:t>TCGA-KIRC cohort: 529 patients, 2,000 high-variance genes + clinical features.</a:t>
-            </a:r>
-          </a:p>
-          <a:p>
-            <a:pPr/>
-            <a:r>
-              <a:rPr sz="1300">
-                <a:solidFill>
-                  <a:srgbClr val="1A1A2E"/>
-                </a:solidFill>
-              </a:rPr>
-              <a:t>Right-censored survival data — standard regression is inappropriate.</a:t>
-            </a:r>
-          </a:p>
-          <a:p>
-            <a:pPr/>
-            <a:r>
-              <a:rPr sz="1300">
-                <a:solidFill>
-                  <a:srgbClr val="1A1A2E"/>
-                </a:solidFill>
-              </a:rPr>
-              <a:t>High dimensionality (p &gt;&gt; n) requires regularisation and feature selection.</a:t>
-            </a:r>
-          </a:p>
-          <a:p>
-            <a:pPr>
-              <a:spcBef>
-                <a:spcPts val="800"/>
-              </a:spcBef>
-            </a:pPr>
-            <a:r>
-              <a:rPr sz="1500" b="1">
-                <a:solidFill>
-                  <a:srgbClr val="0053A5"/>
-                </a:solidFill>
-              </a:rPr>
-              <a:t>Research Question</a:t>
-            </a:r>
-          </a:p>
-          <a:p>
-            <a:pPr/>
-            <a:r>
-              <a:rPr sz="1300">
-                <a:solidFill>
-                  <a:srgbClr val="1A1A2E"/>
-                </a:solidFill>
-              </a:rPr>
-              <a:t>Can multi-model survival analysis on TCGA-KIRC accurately stratify patients into high- and low-risk groups, and which genomic / clinical features drive mortality?</a:t>
-            </a:r>
-          </a:p>
-        </p:txBody>
-      </p:sp>
-      <p:sp>
-        <p:nvSpPr>
-          <p:cNvPr id="5" name="Rectangle 4"/>
+              <a:t>PROBLEM STATEMENT:</a:t>
+            </a:r>
+          </a:p>
+        </p:txBody>
+      </p:sp>
+      <p:sp>
+        <p:nvSpPr>
+          <p:cNvPr id="4" name="Rectangle 3"/>
           <p:cNvSpPr/>
           <p:nvPr/>
         </p:nvSpPr>
         <p:spPr>
           <a:xfrm>
-            <a:off x="0" y="6583680"/>
-            <a:ext cx="9144000" cy="274320"/>
+            <a:off x="10268712" y="201168"/>
+            <a:ext cx="128016" cy="128016"/>
           </a:xfrm>
           <a:prstGeom prst="rect">
             <a:avLst/>
           </a:prstGeom>
           <a:solidFill>
-            <a:srgbClr val="E0E6F0"/>
+            <a:srgbClr val="F25022"/>
           </a:solidFill>
           <a:ln>
             <a:noFill/>
@@ -4722,14 +5314,143 @@
       </p:sp>
       <p:sp>
         <p:nvSpPr>
-          <p:cNvPr id="6" name="TextBox 5"/>
+          <p:cNvPr id="5" name="Rectangle 4"/>
+          <p:cNvSpPr/>
+          <p:nvPr/>
+        </p:nvSpPr>
+        <p:spPr>
+          <a:xfrm>
+            <a:off x="10419588" y="201168"/>
+            <a:ext cx="128016" cy="128016"/>
+          </a:xfrm>
+          <a:prstGeom prst="rect">
+            <a:avLst/>
+          </a:prstGeom>
+          <a:solidFill>
+            <a:srgbClr val="7FBA00"/>
+          </a:solidFill>
+          <a:ln>
+            <a:noFill/>
+          </a:ln>
+        </p:spPr>
+        <p:style>
+          <a:lnRef idx="1">
+            <a:schemeClr val="accent1"/>
+          </a:lnRef>
+          <a:fillRef idx="3">
+            <a:schemeClr val="accent1"/>
+          </a:fillRef>
+          <a:effectRef idx="2">
+            <a:schemeClr val="accent1"/>
+          </a:effectRef>
+          <a:fontRef idx="minor">
+            <a:schemeClr val="lt1"/>
+          </a:fontRef>
+        </p:style>
+        <p:txBody>
+          <a:bodyPr rtlCol="0" anchor="ctr"/>
+          <a:lstStyle/>
+          <a:p>
+            <a:pPr algn="ctr"/>
+          </a:p>
+        </p:txBody>
+      </p:sp>
+      <p:sp>
+        <p:nvSpPr>
+          <p:cNvPr id="6" name="Rectangle 5"/>
+          <p:cNvSpPr/>
+          <p:nvPr/>
+        </p:nvSpPr>
+        <p:spPr>
+          <a:xfrm>
+            <a:off x="10268712" y="352044"/>
+            <a:ext cx="128016" cy="128016"/>
+          </a:xfrm>
+          <a:prstGeom prst="rect">
+            <a:avLst/>
+          </a:prstGeom>
+          <a:solidFill>
+            <a:srgbClr val="00A4EF"/>
+          </a:solidFill>
+          <a:ln>
+            <a:noFill/>
+          </a:ln>
+        </p:spPr>
+        <p:style>
+          <a:lnRef idx="1">
+            <a:schemeClr val="accent1"/>
+          </a:lnRef>
+          <a:fillRef idx="3">
+            <a:schemeClr val="accent1"/>
+          </a:fillRef>
+          <a:effectRef idx="2">
+            <a:schemeClr val="accent1"/>
+          </a:effectRef>
+          <a:fontRef idx="minor">
+            <a:schemeClr val="lt1"/>
+          </a:fontRef>
+        </p:style>
+        <p:txBody>
+          <a:bodyPr rtlCol="0" anchor="ctr"/>
+          <a:lstStyle/>
+          <a:p>
+            <a:pPr algn="ctr"/>
+          </a:p>
+        </p:txBody>
+      </p:sp>
+      <p:sp>
+        <p:nvSpPr>
+          <p:cNvPr id="7" name="Rectangle 6"/>
+          <p:cNvSpPr/>
+          <p:nvPr/>
+        </p:nvSpPr>
+        <p:spPr>
+          <a:xfrm>
+            <a:off x="10419588" y="352044"/>
+            <a:ext cx="128016" cy="128016"/>
+          </a:xfrm>
+          <a:prstGeom prst="rect">
+            <a:avLst/>
+          </a:prstGeom>
+          <a:solidFill>
+            <a:srgbClr val="FFB900"/>
+          </a:solidFill>
+          <a:ln>
+            <a:noFill/>
+          </a:ln>
+        </p:spPr>
+        <p:style>
+          <a:lnRef idx="1">
+            <a:schemeClr val="accent1"/>
+          </a:lnRef>
+          <a:fillRef idx="3">
+            <a:schemeClr val="accent1"/>
+          </a:fillRef>
+          <a:effectRef idx="2">
+            <a:schemeClr val="accent1"/>
+          </a:effectRef>
+          <a:fontRef idx="minor">
+            <a:schemeClr val="lt1"/>
+          </a:fontRef>
+        </p:style>
+        <p:txBody>
+          <a:bodyPr rtlCol="0" anchor="ctr"/>
+          <a:lstStyle/>
+          <a:p>
+            <a:pPr algn="ctr"/>
+          </a:p>
+        </p:txBody>
+      </p:sp>
+      <p:sp>
+        <p:nvSpPr>
+          <p:cNvPr id="8" name="TextBox 7"/>
           <p:cNvSpPr txBox="1"/>
           <p:nvPr/>
         </p:nvSpPr>
         <p:spPr>
           <a:xfrm>
-            <a:off x="182880" y="6592824"/>
-            <a:ext cx="8778240" cy="256032"/>
+            <a:off x="10611612" y="192024"/>
+            <a:ext cx="1371600" cy="201168"/>
           </a:xfrm>
           <a:prstGeom prst="rect">
             <a:avLst/>
@@ -4742,14 +5463,189 @@
           </a:bodyPr>
           <a:lstStyle/>
           <a:p>
+            <a:r>
+              <a:rPr sz="1000">
+                <a:solidFill>
+                  <a:srgbClr val="FFFFFF"/>
+                </a:solidFill>
+              </a:rPr>
+              <a:t>Microsoft</a:t>
+            </a:r>
+          </a:p>
+        </p:txBody>
+      </p:sp>
+      <p:sp>
+        <p:nvSpPr>
+          <p:cNvPr id="9" name="TextBox 8"/>
+          <p:cNvSpPr txBox="1"/>
+          <p:nvPr/>
+        </p:nvSpPr>
+        <p:spPr>
+          <a:xfrm>
+            <a:off x="10611612" y="365760"/>
+            <a:ext cx="1371600" cy="201168"/>
+          </a:xfrm>
+          <a:prstGeom prst="rect">
+            <a:avLst/>
+          </a:prstGeom>
+          <a:noFill/>
+        </p:spPr>
+        <p:txBody>
+          <a:bodyPr wrap="square">
+            <a:spAutoFit/>
+          </a:bodyPr>
+          <a:lstStyle/>
+          <a:p>
+            <a:r>
+              <a:rPr sz="1000">
+                <a:solidFill>
+                  <a:srgbClr val="FFFFFF"/>
+                </a:solidFill>
+              </a:rPr>
+              <a:t>Elevate</a:t>
+            </a:r>
+          </a:p>
+        </p:txBody>
+      </p:sp>
+      <p:sp>
+        <p:nvSpPr>
+          <p:cNvPr id="10" name="Rectangle 9"/>
+          <p:cNvSpPr/>
+          <p:nvPr/>
+        </p:nvSpPr>
+        <p:spPr>
+          <a:xfrm>
+            <a:off x="0" y="6556248"/>
+            <a:ext cx="12188952" cy="301752"/>
+          </a:xfrm>
+          <a:prstGeom prst="rect">
+            <a:avLst/>
+          </a:prstGeom>
+          <a:solidFill>
+            <a:srgbClr val="00A050"/>
+          </a:solidFill>
+          <a:ln>
+            <a:noFill/>
+          </a:ln>
+        </p:spPr>
+        <p:style>
+          <a:lnRef idx="1">
+            <a:schemeClr val="accent1"/>
+          </a:lnRef>
+          <a:fillRef idx="3">
+            <a:schemeClr val="accent1"/>
+          </a:fillRef>
+          <a:effectRef idx="2">
+            <a:schemeClr val="accent1"/>
+          </a:effectRef>
+          <a:fontRef idx="minor">
+            <a:schemeClr val="lt1"/>
+          </a:fontRef>
+        </p:style>
+        <p:txBody>
+          <a:bodyPr rtlCol="0" anchor="ctr"/>
+          <a:lstStyle/>
+          <a:p>
             <a:pPr algn="ctr"/>
-            <a:r>
-              <a:rPr sz="900">
-                <a:solidFill>
-                  <a:srgbClr val="555555"/>
-                </a:solidFill>
-              </a:rPr>
-              <a:t>TCGA KIRC — Survival Analysis  ·  MS Elevate Internship Project</a:t>
+          </a:p>
+        </p:txBody>
+      </p:sp>
+      <p:sp>
+        <p:nvSpPr>
+          <p:cNvPr id="11" name="TextBox 10"/>
+          <p:cNvSpPr txBox="1"/>
+          <p:nvPr/>
+        </p:nvSpPr>
+        <p:spPr>
+          <a:xfrm>
+            <a:off x="320040" y="1298448"/>
+            <a:ext cx="11548872" cy="5148072"/>
+          </a:xfrm>
+          <a:prstGeom prst="rect">
+            <a:avLst/>
+          </a:prstGeom>
+          <a:noFill/>
+        </p:spPr>
+        <p:txBody>
+          <a:bodyPr wrap="square">
+            <a:spAutoFit/>
+          </a:bodyPr>
+          <a:lstStyle/>
+          <a:p>
+            <a:pPr/>
+            <a:r>
+              <a:rPr sz="1300">
+                <a:solidFill>
+                  <a:srgbClr val="000000"/>
+                </a:solidFill>
+              </a:rPr>
+              <a:t>Kidney Renal Clear Cell Carcinoma (KIRC) is the most prevalent kidney cancer subtype, accounting for ~75% of all kidney malignancies. It has a 5-year survival rate below 12% for advanced metastatic disease, making accurate prognosis vital.</a:t>
+            </a:r>
+          </a:p>
+          <a:p>
+            <a:pPr/>
+            <a:r>
+              <a:rPr sz="1300">
+                <a:solidFill>
+                  <a:srgbClr val="000000"/>
+                </a:solidFill>
+              </a:rPr>
+              <a:t/>
+            </a:r>
+          </a:p>
+          <a:p>
+            <a:pPr/>
+            <a:r>
+              <a:rPr sz="1300">
+                <a:solidFill>
+                  <a:srgbClr val="000000"/>
+                </a:solidFill>
+              </a:rPr>
+              <a:t>Despite sharing the same histological type, KIRC patients exhibit dramatically different survival outcomes. Current AJCC clinical staging (Stages I–IV) is insufficient to predict individual patient prognosis or guide personalised treatment.</a:t>
+            </a:r>
+          </a:p>
+          <a:p>
+            <a:pPr/>
+            <a:r>
+              <a:rPr sz="1300">
+                <a:solidFill>
+                  <a:srgbClr val="000000"/>
+                </a:solidFill>
+              </a:rPr>
+              <a:t/>
+            </a:r>
+          </a:p>
+          <a:p>
+            <a:pPr/>
+            <a:r>
+              <a:rPr sz="1300">
+                <a:solidFill>
+                  <a:srgbClr val="000000"/>
+                </a:solidFill>
+              </a:rPr>
+              <a:t>The Cancer Genome Atlas (TCGA) provides high-dimensional genomic and clinical data for 533 KIRC patients. However, right-censored survival data and the high-dimensional gene expression space (20,530 genes) make standard regression methods inappropriate.</a:t>
+            </a:r>
+          </a:p>
+          <a:p>
+            <a:pPr/>
+            <a:r>
+              <a:rPr sz="1300">
+                <a:solidFill>
+                  <a:srgbClr val="000000"/>
+                </a:solidFill>
+              </a:rPr>
+              <a:t/>
+            </a:r>
+          </a:p>
+          <a:p>
+            <a:pPr/>
+            <a:r>
+              <a:rPr sz="1300">
+                <a:solidFill>
+                  <a:srgbClr val="000000"/>
+                </a:solidFill>
+              </a:rPr>
+              <a:t>There is a critical need for robust, interpretable, data-driven survival models that can: (1) accurately stratify patients into high- and low-risk groups, and (2) identify the key genomic and clinical features driving mortality in KIRC.</a:t>
             </a:r>
           </a:p>
         </p:txBody>
@@ -4781,13 +5677,13 @@
         <p:spPr>
           <a:xfrm>
             <a:off x="0" y="0"/>
-            <a:ext cx="9144000" cy="1234440"/>
+            <a:ext cx="12188952" cy="1188720"/>
           </a:xfrm>
           <a:prstGeom prst="rect">
             <a:avLst/>
           </a:prstGeom>
           <a:solidFill>
-            <a:srgbClr val="0053A5"/>
+            <a:srgbClr val="1E355E"/>
           </a:solidFill>
           <a:ln>
             <a:noFill/>
@@ -4823,8 +5719,8 @@
         </p:nvSpPr>
         <p:spPr>
           <a:xfrm>
-            <a:off x="228600" y="109728"/>
-            <a:ext cx="8686800" cy="822960"/>
+            <a:off x="320040" y="164592"/>
+            <a:ext cx="9811512" cy="868680"/>
           </a:xfrm>
           <a:prstGeom prst="rect">
             <a:avLst/>
@@ -4838,162 +5734,32 @@
           <a:lstStyle/>
           <a:p>
             <a:r>
-              <a:rPr sz="2800" b="1">
+              <a:rPr sz="3000" b="1">
                 <a:solidFill>
                   <a:srgbClr val="FFFFFF"/>
                 </a:solidFill>
               </a:rPr>
-              <a:t>Proposed Solution</a:t>
-            </a:r>
-          </a:p>
-        </p:txBody>
-      </p:sp>
-      <p:sp>
-        <p:nvSpPr>
-          <p:cNvPr id="4" name="TextBox 3"/>
-          <p:cNvSpPr txBox="1"/>
-          <p:nvPr/>
-        </p:nvSpPr>
-        <p:spPr>
-          <a:xfrm>
-            <a:off x="274320" y="1554480"/>
-            <a:ext cx="8595360" cy="4846320"/>
-          </a:xfrm>
-          <a:prstGeom prst="rect">
-            <a:avLst/>
-          </a:prstGeom>
-          <a:noFill/>
-        </p:spPr>
-        <p:txBody>
-          <a:bodyPr wrap="square">
-            <a:spAutoFit/>
-          </a:bodyPr>
-          <a:lstStyle/>
-          <a:p>
-            <a:pPr>
-              <a:spcBef>
-                <a:spcPts val="800"/>
-              </a:spcBef>
-            </a:pPr>
-            <a:r>
-              <a:rPr sz="1500" b="1">
-                <a:solidFill>
-                  <a:srgbClr val="0053A5"/>
-                </a:solidFill>
-              </a:rPr>
-              <a:t>End-to-End Survival Analysis Pipeline</a:t>
-            </a:r>
-          </a:p>
-          <a:p>
-            <a:pPr/>
-            <a:r>
-              <a:rPr sz="1300">
-                <a:solidFill>
-                  <a:srgbClr val="1A1A2E"/>
-                </a:solidFill>
-              </a:rPr>
-              <a:t>● Data Collection:    TCGA-KIRC clinical + gene expression data (GDC Portal)</a:t>
-            </a:r>
-          </a:p>
-          <a:p>
-            <a:pPr/>
-            <a:r>
-              <a:rPr sz="1300">
-                <a:solidFill>
-                  <a:srgbClr val="1A1A2E"/>
-                </a:solidFill>
-              </a:rPr>
-              <a:t>● Preprocessing:      survival target derivation, variance-based gene filtering, standardisation</a:t>
-            </a:r>
-          </a:p>
-          <a:p>
-            <a:pPr/>
-            <a:r>
-              <a:rPr sz="1300">
-                <a:solidFill>
-                  <a:srgbClr val="1A1A2E"/>
-                </a:solidFill>
-              </a:rPr>
-              <a:t>● Feature Engineering:  2,000 high-variance genes + 7 clinical variables (age, stage, gender…)</a:t>
-            </a:r>
-          </a:p>
-          <a:p>
-            <a:pPr/>
-            <a:r>
-              <a:rPr sz="1300">
-                <a:solidFill>
-                  <a:srgbClr val="1A1A2E"/>
-                </a:solidFill>
-              </a:rPr>
-              <a:t>● Machine Learning:   4 complementary survival models (see Algorithm slide)</a:t>
-            </a:r>
-          </a:p>
-          <a:p>
-            <a:pPr/>
-            <a:r>
-              <a:rPr sz="1300">
-                <a:solidFill>
-                  <a:srgbClr val="1A1A2E"/>
-                </a:solidFill>
-              </a:rPr>
-              <a:t>● Evaluation:         Concordance index, Integrated Brier Score, KM risk stratification</a:t>
-            </a:r>
-          </a:p>
-          <a:p>
-            <a:pPr/>
-            <a:r>
-              <a:rPr sz="1300">
-                <a:solidFill>
-                  <a:srgbClr val="1A1A2E"/>
-                </a:solidFill>
-              </a:rPr>
-              <a:t>● Deployment:         Interactive Streamlit dashboard for real-time risk prediction</a:t>
-            </a:r>
-          </a:p>
-          <a:p>
-            <a:pPr>
-              <a:spcBef>
-                <a:spcPts val="800"/>
-              </a:spcBef>
-            </a:pPr>
-            <a:r>
-              <a:rPr sz="1500" b="1">
-                <a:solidFill>
-                  <a:srgbClr val="0053A5"/>
-                </a:solidFill>
-              </a:rPr>
-              <a:t>Key Innovation</a:t>
-            </a:r>
-          </a:p>
-          <a:p>
-            <a:pPr/>
-            <a:r>
-              <a:rPr sz="1300">
-                <a:solidFill>
-                  <a:srgbClr val="1A1A2E"/>
-                </a:solidFill>
-              </a:rPr>
-              <a:t>Combining genomic expression data with clinical variables across 4 model families (Cox regression, LASSO, ensemble tree-based, deep learning) to identify the strongest predictors of survival in KIRC.</a:t>
-            </a:r>
-          </a:p>
-        </p:txBody>
-      </p:sp>
-      <p:sp>
-        <p:nvSpPr>
-          <p:cNvPr id="5" name="Rectangle 4"/>
+              <a:t>PROPOSED SOLUTION:</a:t>
+            </a:r>
+          </a:p>
+        </p:txBody>
+      </p:sp>
+      <p:sp>
+        <p:nvSpPr>
+          <p:cNvPr id="4" name="Rectangle 3"/>
           <p:cNvSpPr/>
           <p:nvPr/>
         </p:nvSpPr>
         <p:spPr>
           <a:xfrm>
-            <a:off x="0" y="6583680"/>
-            <a:ext cx="9144000" cy="274320"/>
+            <a:off x="10268712" y="201168"/>
+            <a:ext cx="128016" cy="128016"/>
           </a:xfrm>
           <a:prstGeom prst="rect">
             <a:avLst/>
           </a:prstGeom>
           <a:solidFill>
-            <a:srgbClr val="E0E6F0"/>
+            <a:srgbClr val="F25022"/>
           </a:solidFill>
           <a:ln>
             <a:noFill/>
@@ -5023,14 +5789,143 @@
       </p:sp>
       <p:sp>
         <p:nvSpPr>
-          <p:cNvPr id="6" name="TextBox 5"/>
+          <p:cNvPr id="5" name="Rectangle 4"/>
+          <p:cNvSpPr/>
+          <p:nvPr/>
+        </p:nvSpPr>
+        <p:spPr>
+          <a:xfrm>
+            <a:off x="10419588" y="201168"/>
+            <a:ext cx="128016" cy="128016"/>
+          </a:xfrm>
+          <a:prstGeom prst="rect">
+            <a:avLst/>
+          </a:prstGeom>
+          <a:solidFill>
+            <a:srgbClr val="7FBA00"/>
+          </a:solidFill>
+          <a:ln>
+            <a:noFill/>
+          </a:ln>
+        </p:spPr>
+        <p:style>
+          <a:lnRef idx="1">
+            <a:schemeClr val="accent1"/>
+          </a:lnRef>
+          <a:fillRef idx="3">
+            <a:schemeClr val="accent1"/>
+          </a:fillRef>
+          <a:effectRef idx="2">
+            <a:schemeClr val="accent1"/>
+          </a:effectRef>
+          <a:fontRef idx="minor">
+            <a:schemeClr val="lt1"/>
+          </a:fontRef>
+        </p:style>
+        <p:txBody>
+          <a:bodyPr rtlCol="0" anchor="ctr"/>
+          <a:lstStyle/>
+          <a:p>
+            <a:pPr algn="ctr"/>
+          </a:p>
+        </p:txBody>
+      </p:sp>
+      <p:sp>
+        <p:nvSpPr>
+          <p:cNvPr id="6" name="Rectangle 5"/>
+          <p:cNvSpPr/>
+          <p:nvPr/>
+        </p:nvSpPr>
+        <p:spPr>
+          <a:xfrm>
+            <a:off x="10268712" y="352044"/>
+            <a:ext cx="128016" cy="128016"/>
+          </a:xfrm>
+          <a:prstGeom prst="rect">
+            <a:avLst/>
+          </a:prstGeom>
+          <a:solidFill>
+            <a:srgbClr val="00A4EF"/>
+          </a:solidFill>
+          <a:ln>
+            <a:noFill/>
+          </a:ln>
+        </p:spPr>
+        <p:style>
+          <a:lnRef idx="1">
+            <a:schemeClr val="accent1"/>
+          </a:lnRef>
+          <a:fillRef idx="3">
+            <a:schemeClr val="accent1"/>
+          </a:fillRef>
+          <a:effectRef idx="2">
+            <a:schemeClr val="accent1"/>
+          </a:effectRef>
+          <a:fontRef idx="minor">
+            <a:schemeClr val="lt1"/>
+          </a:fontRef>
+        </p:style>
+        <p:txBody>
+          <a:bodyPr rtlCol="0" anchor="ctr"/>
+          <a:lstStyle/>
+          <a:p>
+            <a:pPr algn="ctr"/>
+          </a:p>
+        </p:txBody>
+      </p:sp>
+      <p:sp>
+        <p:nvSpPr>
+          <p:cNvPr id="7" name="Rectangle 6"/>
+          <p:cNvSpPr/>
+          <p:nvPr/>
+        </p:nvSpPr>
+        <p:spPr>
+          <a:xfrm>
+            <a:off x="10419588" y="352044"/>
+            <a:ext cx="128016" cy="128016"/>
+          </a:xfrm>
+          <a:prstGeom prst="rect">
+            <a:avLst/>
+          </a:prstGeom>
+          <a:solidFill>
+            <a:srgbClr val="FFB900"/>
+          </a:solidFill>
+          <a:ln>
+            <a:noFill/>
+          </a:ln>
+        </p:spPr>
+        <p:style>
+          <a:lnRef idx="1">
+            <a:schemeClr val="accent1"/>
+          </a:lnRef>
+          <a:fillRef idx="3">
+            <a:schemeClr val="accent1"/>
+          </a:fillRef>
+          <a:effectRef idx="2">
+            <a:schemeClr val="accent1"/>
+          </a:effectRef>
+          <a:fontRef idx="minor">
+            <a:schemeClr val="lt1"/>
+          </a:fontRef>
+        </p:style>
+        <p:txBody>
+          <a:bodyPr rtlCol="0" anchor="ctr"/>
+          <a:lstStyle/>
+          <a:p>
+            <a:pPr algn="ctr"/>
+          </a:p>
+        </p:txBody>
+      </p:sp>
+      <p:sp>
+        <p:nvSpPr>
+          <p:cNvPr id="8" name="TextBox 7"/>
           <p:cNvSpPr txBox="1"/>
           <p:nvPr/>
         </p:nvSpPr>
         <p:spPr>
           <a:xfrm>
-            <a:off x="182880" y="6592824"/>
-            <a:ext cx="8778240" cy="256032"/>
+            <a:off x="10611612" y="192024"/>
+            <a:ext cx="1371600" cy="201168"/>
           </a:xfrm>
           <a:prstGeom prst="rect">
             <a:avLst/>
@@ -5043,14 +5938,297 @@
           </a:bodyPr>
           <a:lstStyle/>
           <a:p>
+            <a:r>
+              <a:rPr sz="1000">
+                <a:solidFill>
+                  <a:srgbClr val="FFFFFF"/>
+                </a:solidFill>
+              </a:rPr>
+              <a:t>Microsoft</a:t>
+            </a:r>
+          </a:p>
+        </p:txBody>
+      </p:sp>
+      <p:sp>
+        <p:nvSpPr>
+          <p:cNvPr id="9" name="TextBox 8"/>
+          <p:cNvSpPr txBox="1"/>
+          <p:nvPr/>
+        </p:nvSpPr>
+        <p:spPr>
+          <a:xfrm>
+            <a:off x="10611612" y="365760"/>
+            <a:ext cx="1371600" cy="201168"/>
+          </a:xfrm>
+          <a:prstGeom prst="rect">
+            <a:avLst/>
+          </a:prstGeom>
+          <a:noFill/>
+        </p:spPr>
+        <p:txBody>
+          <a:bodyPr wrap="square">
+            <a:spAutoFit/>
+          </a:bodyPr>
+          <a:lstStyle/>
+          <a:p>
+            <a:r>
+              <a:rPr sz="1000">
+                <a:solidFill>
+                  <a:srgbClr val="FFFFFF"/>
+                </a:solidFill>
+              </a:rPr>
+              <a:t>Elevate</a:t>
+            </a:r>
+          </a:p>
+        </p:txBody>
+      </p:sp>
+      <p:sp>
+        <p:nvSpPr>
+          <p:cNvPr id="10" name="Rectangle 9"/>
+          <p:cNvSpPr/>
+          <p:nvPr/>
+        </p:nvSpPr>
+        <p:spPr>
+          <a:xfrm>
+            <a:off x="0" y="6556248"/>
+            <a:ext cx="12188952" cy="301752"/>
+          </a:xfrm>
+          <a:prstGeom prst="rect">
+            <a:avLst/>
+          </a:prstGeom>
+          <a:solidFill>
+            <a:srgbClr val="00A050"/>
+          </a:solidFill>
+          <a:ln>
+            <a:noFill/>
+          </a:ln>
+        </p:spPr>
+        <p:style>
+          <a:lnRef idx="1">
+            <a:schemeClr val="accent1"/>
+          </a:lnRef>
+          <a:fillRef idx="3">
+            <a:schemeClr val="accent1"/>
+          </a:fillRef>
+          <a:effectRef idx="2">
+            <a:schemeClr val="accent1"/>
+          </a:effectRef>
+          <a:fontRef idx="minor">
+            <a:schemeClr val="lt1"/>
+          </a:fontRef>
+        </p:style>
+        <p:txBody>
+          <a:bodyPr rtlCol="0" anchor="ctr"/>
+          <a:lstStyle/>
+          <a:p>
             <a:pPr algn="ctr"/>
-            <a:r>
-              <a:rPr sz="900">
-                <a:solidFill>
-                  <a:srgbClr val="555555"/>
-                </a:solidFill>
-              </a:rPr>
-              <a:t>TCGA KIRC — Survival Analysis  ·  MS Elevate Internship Project</a:t>
+          </a:p>
+        </p:txBody>
+      </p:sp>
+      <p:sp>
+        <p:nvSpPr>
+          <p:cNvPr id="11" name="TextBox 10"/>
+          <p:cNvSpPr txBox="1"/>
+          <p:nvPr/>
+        </p:nvSpPr>
+        <p:spPr>
+          <a:xfrm>
+            <a:off x="320040" y="1298448"/>
+            <a:ext cx="11548872" cy="5148072"/>
+          </a:xfrm>
+          <a:prstGeom prst="rect">
+            <a:avLst/>
+          </a:prstGeom>
+          <a:noFill/>
+        </p:spPr>
+        <p:txBody>
+          <a:bodyPr wrap="square">
+            <a:spAutoFit/>
+          </a:bodyPr>
+          <a:lstStyle/>
+          <a:p>
+            <a:pPr/>
+            <a:r>
+              <a:rPr sz="1300">
+                <a:solidFill>
+                  <a:srgbClr val="000000"/>
+                </a:solidFill>
+              </a:rPr>
+              <a:t>The proposed system builds an end-to-end survival analysis pipeline on TCGA-KIRC data, applying four complementary machine learning models to predict patient survival and identify key prognostic biomarkers.</a:t>
+            </a:r>
+          </a:p>
+          <a:p>
+            <a:pPr/>
+            <a:r>
+              <a:rPr sz="1300">
+                <a:solidFill>
+                  <a:srgbClr val="000000"/>
+                </a:solidFill>
+              </a:rPr>
+              <a:t/>
+            </a:r>
+          </a:p>
+          <a:p>
+            <a:pPr>
+              <a:spcBef>
+                <a:spcPts val="900"/>
+              </a:spcBef>
+            </a:pPr>
+            <a:r>
+              <a:rPr sz="1500" b="1">
+                <a:solidFill>
+                  <a:srgbClr val="1E355E"/>
+                </a:solidFill>
+              </a:rPr>
+              <a:t>Data Collection</a:t>
+            </a:r>
+          </a:p>
+          <a:p>
+            <a:pPr lvl="1"/>
+            <a:r>
+              <a:rPr sz="1300">
+                <a:solidFill>
+                  <a:srgbClr val="000000"/>
+                </a:solidFill>
+              </a:rPr>
+              <a:t>TCGA-KIRC clinical.tsv + follow_up.tsv  (GDC Portal, 537 patients, OS labels)</a:t>
+            </a:r>
+          </a:p>
+          <a:p>
+            <a:pPr lvl="1"/>
+            <a:r>
+              <a:rPr sz="1300">
+                <a:solidFill>
+                  <a:srgbClr val="000000"/>
+                </a:solidFill>
+              </a:rPr>
+              <a:t>kirc_expression.tsv via UCSC Xena  (20,530 genes x 606 tumour samples)</a:t>
+            </a:r>
+          </a:p>
+          <a:p>
+            <a:pPr>
+              <a:spcBef>
+                <a:spcPts val="900"/>
+              </a:spcBef>
+            </a:pPr>
+            <a:r>
+              <a:rPr sz="1500" b="1">
+                <a:solidFill>
+                  <a:srgbClr val="1E355E"/>
+                </a:solidFill>
+              </a:rPr>
+              <a:t>Data Preprocessing</a:t>
+            </a:r>
+          </a:p>
+          <a:p>
+            <a:pPr lvl="1"/>
+            <a:r>
+              <a:rPr sz="1300">
+                <a:solidFill>
+                  <a:srgbClr val="000000"/>
+                </a:solidFill>
+              </a:rPr>
+              <a:t>Survival time and event derivation  |  patient ID alignment across datasets</a:t>
+            </a:r>
+          </a:p>
+          <a:p>
+            <a:pPr lvl="1"/>
+            <a:r>
+              <a:rPr sz="1300">
+                <a:solidFill>
+                  <a:srgbClr val="000000"/>
+                </a:solidFill>
+              </a:rPr>
+              <a:t>Variance-based gene filtering: top 2,000 genes retained  |  StandardScaler normalisation</a:t>
+            </a:r>
+          </a:p>
+          <a:p>
+            <a:pPr>
+              <a:spcBef>
+                <a:spcPts val="900"/>
+              </a:spcBef>
+            </a:pPr>
+            <a:r>
+              <a:rPr sz="1500" b="1">
+                <a:solidFill>
+                  <a:srgbClr val="1E355E"/>
+                </a:solidFill>
+              </a:rPr>
+              <a:t>Machine Learning Algorithms</a:t>
+            </a:r>
+          </a:p>
+          <a:p>
+            <a:pPr lvl="1"/>
+            <a:r>
+              <a:rPr sz="1300">
+                <a:solidFill>
+                  <a:srgbClr val="000000"/>
+                </a:solidFill>
+              </a:rPr>
+              <a:t>Cox PH  |  LASSO-penalised Cox  |  Random Survival Forest  |  DeepSurv (PyTorch MLP)</a:t>
+            </a:r>
+          </a:p>
+          <a:p>
+            <a:pPr lvl="1"/>
+            <a:r>
+              <a:rPr sz="1300">
+                <a:solidFill>
+                  <a:srgbClr val="000000"/>
+                </a:solidFill>
+              </a:rPr>
+              <a:t>70/30 stratified train/test split  |  5-fold CV for hyperparameter tuning</a:t>
+            </a:r>
+          </a:p>
+          <a:p>
+            <a:pPr>
+              <a:spcBef>
+                <a:spcPts val="900"/>
+              </a:spcBef>
+            </a:pPr>
+            <a:r>
+              <a:rPr sz="1500" b="1">
+                <a:solidFill>
+                  <a:srgbClr val="1E355E"/>
+                </a:solidFill>
+              </a:rPr>
+              <a:t>Deployment</a:t>
+            </a:r>
+          </a:p>
+          <a:p>
+            <a:pPr lvl="1"/>
+            <a:r>
+              <a:rPr sz="1300">
+                <a:solidFill>
+                  <a:srgbClr val="000000"/>
+                </a:solidFill>
+              </a:rPr>
+              <a:t>Live Streamlit dashboard: https://tcga-kirc.streamlit.app/  |  GitHub: https://github.com/LikithaDudala/tcga-kirc-project</a:t>
+            </a:r>
+          </a:p>
+          <a:p>
+            <a:pPr>
+              <a:spcBef>
+                <a:spcPts val="900"/>
+              </a:spcBef>
+            </a:pPr>
+            <a:r>
+              <a:rPr sz="1500" b="1">
+                <a:solidFill>
+                  <a:srgbClr val="1E355E"/>
+                </a:solidFill>
+              </a:rPr>
+              <a:t>Evaluation</a:t>
+            </a:r>
+          </a:p>
+          <a:p>
+            <a:pPr lvl="1"/>
+            <a:r>
+              <a:rPr sz="1300">
+                <a:solidFill>
+                  <a:srgbClr val="000000"/>
+                </a:solidFill>
+              </a:rPr>
+              <a:t>Concordance Index (C-index), Integrated Brier Score, Kaplan-Meier risk stratification</a:t>
             </a:r>
           </a:p>
         </p:txBody>
@@ -5082,13 +6260,13 @@
         <p:spPr>
           <a:xfrm>
             <a:off x="0" y="0"/>
-            <a:ext cx="9144000" cy="1234440"/>
+            <a:ext cx="12188952" cy="1188720"/>
           </a:xfrm>
           <a:prstGeom prst="rect">
             <a:avLst/>
           </a:prstGeom>
           <a:solidFill>
-            <a:srgbClr val="0053A5"/>
+            <a:srgbClr val="1E355E"/>
           </a:solidFill>
           <a:ln>
             <a:noFill/>
@@ -5124,8 +6302,8 @@
         </p:nvSpPr>
         <p:spPr>
           <a:xfrm>
-            <a:off x="228600" y="109728"/>
-            <a:ext cx="8686800" cy="822960"/>
+            <a:off x="320040" y="164592"/>
+            <a:ext cx="9811512" cy="868680"/>
           </a:xfrm>
           <a:prstGeom prst="rect">
             <a:avLst/>
@@ -5139,26 +6317,198 @@
           <a:lstStyle/>
           <a:p>
             <a:r>
-              <a:rPr sz="2800" b="1">
+              <a:rPr sz="3000" b="1">
                 <a:solidFill>
                   <a:srgbClr val="FFFFFF"/>
                 </a:solidFill>
               </a:rPr>
-              <a:t>System Approach</a:t>
-            </a:r>
-          </a:p>
-        </p:txBody>
-      </p:sp>
-      <p:sp>
-        <p:nvSpPr>
-          <p:cNvPr id="4" name="TextBox 3"/>
+              <a:t>SYSTEM DEVELOPMENT APPROACH  (Technology Used):</a:t>
+            </a:r>
+          </a:p>
+        </p:txBody>
+      </p:sp>
+      <p:sp>
+        <p:nvSpPr>
+          <p:cNvPr id="4" name="Rectangle 3"/>
+          <p:cNvSpPr/>
+          <p:nvPr/>
+        </p:nvSpPr>
+        <p:spPr>
+          <a:xfrm>
+            <a:off x="10268712" y="201168"/>
+            <a:ext cx="128016" cy="128016"/>
+          </a:xfrm>
+          <a:prstGeom prst="rect">
+            <a:avLst/>
+          </a:prstGeom>
+          <a:solidFill>
+            <a:srgbClr val="F25022"/>
+          </a:solidFill>
+          <a:ln>
+            <a:noFill/>
+          </a:ln>
+        </p:spPr>
+        <p:style>
+          <a:lnRef idx="1">
+            <a:schemeClr val="accent1"/>
+          </a:lnRef>
+          <a:fillRef idx="3">
+            <a:schemeClr val="accent1"/>
+          </a:fillRef>
+          <a:effectRef idx="2">
+            <a:schemeClr val="accent1"/>
+          </a:effectRef>
+          <a:fontRef idx="minor">
+            <a:schemeClr val="lt1"/>
+          </a:fontRef>
+        </p:style>
+        <p:txBody>
+          <a:bodyPr rtlCol="0" anchor="ctr"/>
+          <a:lstStyle/>
+          <a:p>
+            <a:pPr algn="ctr"/>
+          </a:p>
+        </p:txBody>
+      </p:sp>
+      <p:sp>
+        <p:nvSpPr>
+          <p:cNvPr id="5" name="Rectangle 4"/>
+          <p:cNvSpPr/>
+          <p:nvPr/>
+        </p:nvSpPr>
+        <p:spPr>
+          <a:xfrm>
+            <a:off x="10419588" y="201168"/>
+            <a:ext cx="128016" cy="128016"/>
+          </a:xfrm>
+          <a:prstGeom prst="rect">
+            <a:avLst/>
+          </a:prstGeom>
+          <a:solidFill>
+            <a:srgbClr val="7FBA00"/>
+          </a:solidFill>
+          <a:ln>
+            <a:noFill/>
+          </a:ln>
+        </p:spPr>
+        <p:style>
+          <a:lnRef idx="1">
+            <a:schemeClr val="accent1"/>
+          </a:lnRef>
+          <a:fillRef idx="3">
+            <a:schemeClr val="accent1"/>
+          </a:fillRef>
+          <a:effectRef idx="2">
+            <a:schemeClr val="accent1"/>
+          </a:effectRef>
+          <a:fontRef idx="minor">
+            <a:schemeClr val="lt1"/>
+          </a:fontRef>
+        </p:style>
+        <p:txBody>
+          <a:bodyPr rtlCol="0" anchor="ctr"/>
+          <a:lstStyle/>
+          <a:p>
+            <a:pPr algn="ctr"/>
+          </a:p>
+        </p:txBody>
+      </p:sp>
+      <p:sp>
+        <p:nvSpPr>
+          <p:cNvPr id="6" name="Rectangle 5"/>
+          <p:cNvSpPr/>
+          <p:nvPr/>
+        </p:nvSpPr>
+        <p:spPr>
+          <a:xfrm>
+            <a:off x="10268712" y="352044"/>
+            <a:ext cx="128016" cy="128016"/>
+          </a:xfrm>
+          <a:prstGeom prst="rect">
+            <a:avLst/>
+          </a:prstGeom>
+          <a:solidFill>
+            <a:srgbClr val="00A4EF"/>
+          </a:solidFill>
+          <a:ln>
+            <a:noFill/>
+          </a:ln>
+        </p:spPr>
+        <p:style>
+          <a:lnRef idx="1">
+            <a:schemeClr val="accent1"/>
+          </a:lnRef>
+          <a:fillRef idx="3">
+            <a:schemeClr val="accent1"/>
+          </a:fillRef>
+          <a:effectRef idx="2">
+            <a:schemeClr val="accent1"/>
+          </a:effectRef>
+          <a:fontRef idx="minor">
+            <a:schemeClr val="lt1"/>
+          </a:fontRef>
+        </p:style>
+        <p:txBody>
+          <a:bodyPr rtlCol="0" anchor="ctr"/>
+          <a:lstStyle/>
+          <a:p>
+            <a:pPr algn="ctr"/>
+          </a:p>
+        </p:txBody>
+      </p:sp>
+      <p:sp>
+        <p:nvSpPr>
+          <p:cNvPr id="7" name="Rectangle 6"/>
+          <p:cNvSpPr/>
+          <p:nvPr/>
+        </p:nvSpPr>
+        <p:spPr>
+          <a:xfrm>
+            <a:off x="10419588" y="352044"/>
+            <a:ext cx="128016" cy="128016"/>
+          </a:xfrm>
+          <a:prstGeom prst="rect">
+            <a:avLst/>
+          </a:prstGeom>
+          <a:solidFill>
+            <a:srgbClr val="FFB900"/>
+          </a:solidFill>
+          <a:ln>
+            <a:noFill/>
+          </a:ln>
+        </p:spPr>
+        <p:style>
+          <a:lnRef idx="1">
+            <a:schemeClr val="accent1"/>
+          </a:lnRef>
+          <a:fillRef idx="3">
+            <a:schemeClr val="accent1"/>
+          </a:fillRef>
+          <a:effectRef idx="2">
+            <a:schemeClr val="accent1"/>
+          </a:effectRef>
+          <a:fontRef idx="minor">
+            <a:schemeClr val="lt1"/>
+          </a:fontRef>
+        </p:style>
+        <p:txBody>
+          <a:bodyPr rtlCol="0" anchor="ctr"/>
+          <a:lstStyle/>
+          <a:p>
+            <a:pPr algn="ctr"/>
+          </a:p>
+        </p:txBody>
+      </p:sp>
+      <p:sp>
+        <p:nvSpPr>
+          <p:cNvPr id="8" name="TextBox 7"/>
           <p:cNvSpPr txBox="1"/>
           <p:nvPr/>
         </p:nvSpPr>
         <p:spPr>
           <a:xfrm>
-            <a:off x="274320" y="1508760"/>
-            <a:ext cx="4206240" cy="5029200"/>
+            <a:off x="10611612" y="192024"/>
+            <a:ext cx="1371600" cy="201168"/>
           </a:xfrm>
           <a:prstGeom prst="rect">
             <a:avLst/>
@@ -5171,135 +6521,27 @@
           </a:bodyPr>
           <a:lstStyle/>
           <a:p>
-            <a:pPr>
-              <a:spcBef>
-                <a:spcPts val="800"/>
-              </a:spcBef>
-            </a:pPr>
-            <a:r>
-              <a:rPr sz="1500" b="1">
-                <a:solidFill>
-                  <a:srgbClr val="0053A5"/>
-                </a:solidFill>
-              </a:rPr>
-              <a:t>Data Sources</a:t>
-            </a:r>
-          </a:p>
-          <a:p>
-            <a:pPr/>
-            <a:r>
-              <a:rPr sz="1300">
-                <a:solidFill>
-                  <a:srgbClr val="1A1A2E"/>
-                </a:solidFill>
-              </a:rPr>
-              <a:t>● TCGA-KIRC: clinical.tsv, follow_up.tsv</a:t>
-            </a:r>
-          </a:p>
-          <a:p>
-            <a:pPr/>
-            <a:r>
-              <a:rPr sz="1300">
-                <a:solidFill>
-                  <a:srgbClr val="1A1A2E"/>
-                </a:solidFill>
-              </a:rPr>
-              <a:t>● kirc_expression.tsv</a:t>
-            </a:r>
-          </a:p>
-          <a:p>
-            <a:pPr/>
-            <a:r>
-              <a:rPr sz="1300">
-                <a:solidFill>
-                  <a:srgbClr val="1A1A2E"/>
-                </a:solidFill>
-              </a:rPr>
-              <a:t>  · 20,530 genes × 533 tumour samples (-01)</a:t>
-            </a:r>
-          </a:p>
-          <a:p>
-            <a:pPr/>
-            <a:r>
-              <a:rPr sz="1300">
-                <a:solidFill>
-                  <a:srgbClr val="1A1A2E"/>
-                </a:solidFill>
-              </a:rPr>
-              <a:t>  · Variance filter → top 2,000 genes retained</a:t>
-            </a:r>
-          </a:p>
-          <a:p>
-            <a:pPr/>
-            <a:r>
-              <a:rPr sz="1300">
-                <a:solidFill>
-                  <a:srgbClr val="1A1A2E"/>
-                </a:solidFill>
-              </a:rPr>
-              <a:t>  · 529 patients with complete survival data</a:t>
-            </a:r>
-          </a:p>
-          <a:p>
-            <a:pPr>
-              <a:spcBef>
-                <a:spcPts val="800"/>
-              </a:spcBef>
-            </a:pPr>
-            <a:r>
-              <a:rPr sz="1500" b="1">
-                <a:solidFill>
-                  <a:srgbClr val="0053A5"/>
-                </a:solidFill>
-              </a:rPr>
-              <a:t>System Requirements</a:t>
-            </a:r>
-          </a:p>
-          <a:p>
-            <a:pPr/>
-            <a:r>
-              <a:rPr sz="1300">
-                <a:solidFill>
-                  <a:srgbClr val="1A1A2E"/>
-                </a:solidFill>
-              </a:rPr>
-              <a:t>● Python 3.12  |  Jupyter Notebook</a:t>
-            </a:r>
-          </a:p>
-          <a:p>
-            <a:pPr/>
-            <a:r>
-              <a:rPr sz="1300">
-                <a:solidFill>
-                  <a:srgbClr val="1A1A2E"/>
-                </a:solidFill>
-              </a:rPr>
-              <a:t>● Streamlit 1.x  |  python-pptx</a:t>
-            </a:r>
-          </a:p>
-          <a:p>
-            <a:pPr/>
-            <a:r>
-              <a:rPr sz="1300">
-                <a:solidFill>
-                  <a:srgbClr val="1A1A2E"/>
-                </a:solidFill>
-              </a:rPr>
-              <a:t>● Git + GitHub (version control)</a:t>
-            </a:r>
-          </a:p>
-        </p:txBody>
-      </p:sp>
-      <p:sp>
-        <p:nvSpPr>
-          <p:cNvPr id="5" name="TextBox 4"/>
+            <a:r>
+              <a:rPr sz="1000">
+                <a:solidFill>
+                  <a:srgbClr val="FFFFFF"/>
+                </a:solidFill>
+              </a:rPr>
+              <a:t>Microsoft</a:t>
+            </a:r>
+          </a:p>
+        </p:txBody>
+      </p:sp>
+      <p:sp>
+        <p:nvSpPr>
+          <p:cNvPr id="9" name="TextBox 8"/>
           <p:cNvSpPr txBox="1"/>
           <p:nvPr/>
         </p:nvSpPr>
         <p:spPr>
           <a:xfrm>
-            <a:off x="4663440" y="1508760"/>
-            <a:ext cx="4206240" cy="5029200"/>
+            <a:off x="10611612" y="365760"/>
+            <a:ext cx="1371600" cy="201168"/>
           </a:xfrm>
           <a:prstGeom prst="rect">
             <a:avLst/>
@@ -5312,18 +6554,127 @@
           </a:bodyPr>
           <a:lstStyle/>
           <a:p>
+            <a:r>
+              <a:rPr sz="1000">
+                <a:solidFill>
+                  <a:srgbClr val="FFFFFF"/>
+                </a:solidFill>
+              </a:rPr>
+              <a:t>Elevate</a:t>
+            </a:r>
+          </a:p>
+        </p:txBody>
+      </p:sp>
+      <p:sp>
+        <p:nvSpPr>
+          <p:cNvPr id="10" name="Rectangle 9"/>
+          <p:cNvSpPr/>
+          <p:nvPr/>
+        </p:nvSpPr>
+        <p:spPr>
+          <a:xfrm>
+            <a:off x="0" y="6556248"/>
+            <a:ext cx="12188952" cy="301752"/>
+          </a:xfrm>
+          <a:prstGeom prst="rect">
+            <a:avLst/>
+          </a:prstGeom>
+          <a:solidFill>
+            <a:srgbClr val="00A050"/>
+          </a:solidFill>
+          <a:ln>
+            <a:noFill/>
+          </a:ln>
+        </p:spPr>
+        <p:style>
+          <a:lnRef idx="1">
+            <a:schemeClr val="accent1"/>
+          </a:lnRef>
+          <a:fillRef idx="3">
+            <a:schemeClr val="accent1"/>
+          </a:fillRef>
+          <a:effectRef idx="2">
+            <a:schemeClr val="accent1"/>
+          </a:effectRef>
+          <a:fontRef idx="minor">
+            <a:schemeClr val="lt1"/>
+          </a:fontRef>
+        </p:style>
+        <p:txBody>
+          <a:bodyPr rtlCol="0" anchor="ctr"/>
+          <a:lstStyle/>
+          <a:p>
+            <a:pPr algn="ctr"/>
+          </a:p>
+        </p:txBody>
+      </p:sp>
+      <p:sp>
+        <p:nvSpPr>
+          <p:cNvPr id="11" name="TextBox 10"/>
+          <p:cNvSpPr txBox="1"/>
+          <p:nvPr/>
+        </p:nvSpPr>
+        <p:spPr>
+          <a:xfrm>
+            <a:off x="320040" y="1298448"/>
+            <a:ext cx="5577840" cy="5212080"/>
+          </a:xfrm>
+          <a:prstGeom prst="rect">
+            <a:avLst/>
+          </a:prstGeom>
+          <a:noFill/>
+        </p:spPr>
+        <p:txBody>
+          <a:bodyPr wrap="square">
+            <a:spAutoFit/>
+          </a:bodyPr>
+          <a:lstStyle/>
+          <a:p>
             <a:pPr>
               <a:spcBef>
-                <a:spcPts val="800"/>
+                <a:spcPts val="900"/>
               </a:spcBef>
             </a:pPr>
             <a:r>
               <a:rPr sz="1500" b="1">
                 <a:solidFill>
-                  <a:srgbClr val="0053A5"/>
-                </a:solidFill>
-              </a:rPr>
-              <a:t>Core Libraries</a:t>
+                  <a:srgbClr val="1E355E"/>
+                </a:solidFill>
+              </a:rPr>
+              <a:t>System Requirements</a:t>
+            </a:r>
+          </a:p>
+          <a:p>
+            <a:pPr lvl="1"/>
+            <a:r>
+              <a:rPr sz="1300">
+                <a:solidFill>
+                  <a:srgbClr val="000000"/>
+                </a:solidFill>
+              </a:rPr>
+              <a:t>Python 3.12  |  Jupyter Notebook</a:t>
+            </a:r>
+          </a:p>
+          <a:p>
+            <a:pPr lvl="1"/>
+            <a:r>
+              <a:rPr sz="1300">
+                <a:solidFill>
+                  <a:srgbClr val="000000"/>
+                </a:solidFill>
+              </a:rPr>
+              <a:t>Git + GitHub  (version control &amp; hosting)</a:t>
+            </a:r>
+          </a:p>
+          <a:p>
+            <a:pPr lvl="1"/>
+            <a:r>
+              <a:rPr sz="1300">
+                <a:solidFill>
+                  <a:srgbClr val="000000"/>
+                </a:solidFill>
+              </a:rPr>
+              <a:t>Streamlit Cloud  (live deployment)</a:t>
             </a:r>
           </a:p>
           <a:p>
@@ -5331,116 +6682,198 @@
             <a:r>
               <a:rPr sz="1300">
                 <a:solidFill>
-                  <a:srgbClr val="1A1A2E"/>
-                </a:solidFill>
-              </a:rPr>
-              <a:t>● pandas / numpy — data wrangling</a:t>
-            </a:r>
-          </a:p>
-          <a:p>
-            <a:pPr/>
-            <a:r>
-              <a:rPr sz="1300">
-                <a:solidFill>
-                  <a:srgbClr val="1A1A2E"/>
-                </a:solidFill>
-              </a:rPr>
-              <a:t>● lifelines — Cox PH, Kaplan-Meier</a:t>
-            </a:r>
-          </a:p>
-          <a:p>
-            <a:pPr/>
-            <a:r>
-              <a:rPr sz="1300">
-                <a:solidFill>
-                  <a:srgbClr val="1A1A2E"/>
-                </a:solidFill>
-              </a:rPr>
-              <a:t>● scikit-survival — LASSO Cox, RSF</a:t>
-            </a:r>
-          </a:p>
-          <a:p>
-            <a:pPr/>
-            <a:r>
-              <a:rPr sz="1300">
-                <a:solidFill>
-                  <a:srgbClr val="1A1A2E"/>
-                </a:solidFill>
-              </a:rPr>
-              <a:t>● PyTorch — DeepSurv neural network</a:t>
-            </a:r>
-          </a:p>
-          <a:p>
-            <a:pPr/>
-            <a:r>
-              <a:rPr sz="1300">
-                <a:solidFill>
-                  <a:srgbClr val="1A1A2E"/>
-                </a:solidFill>
-              </a:rPr>
-              <a:t>● plotly / matplotlib — visualisations</a:t>
-            </a:r>
-          </a:p>
-          <a:p>
-            <a:pPr/>
-            <a:r>
-              <a:rPr sz="1300">
-                <a:solidFill>
-                  <a:srgbClr val="1A1A2E"/>
-                </a:solidFill>
-              </a:rPr>
-              <a:t>● scikit-learn — preprocessing, metrics</a:t>
+                  <a:srgbClr val="000000"/>
+                </a:solidFill>
+              </a:rPr>
+              <a:t/>
             </a:r>
           </a:p>
           <a:p>
             <a:pPr>
               <a:spcBef>
-                <a:spcPts val="800"/>
+                <a:spcPts val="900"/>
               </a:spcBef>
             </a:pPr>
             <a:r>
               <a:rPr sz="1500" b="1">
                 <a:solidFill>
-                  <a:srgbClr val="0053A5"/>
-                </a:solidFill>
-              </a:rPr>
-              <a:t>Infrastructure</a:t>
-            </a:r>
-          </a:p>
-          <a:p>
-            <a:pPr/>
+                  <a:srgbClr val="1E355E"/>
+                </a:solidFill>
+              </a:rPr>
+              <a:t>Data Sources</a:t>
+            </a:r>
+          </a:p>
+          <a:p>
+            <a:pPr lvl="1"/>
             <a:r>
               <a:rPr sz="1300">
                 <a:solidFill>
-                  <a:srgbClr val="1A1A2E"/>
-                </a:solidFill>
-              </a:rPr>
-              <a:t>● Streamlit Cloud / local deployment</a:t>
-            </a:r>
-          </a:p>
-          <a:p>
-            <a:pPr/>
+                  <a:srgbClr val="000000"/>
+                </a:solidFill>
+              </a:rPr>
+              <a:t>TCGA GDC Portal  —  clinical TSVs</a:t>
+            </a:r>
+          </a:p>
+          <a:p>
+            <a:pPr lvl="1"/>
             <a:r>
               <a:rPr sz="1300">
                 <a:solidFill>
-                  <a:srgbClr val="1A1A2E"/>
-                </a:solidFill>
-              </a:rPr>
-              <a:t>● kaleido — static chart export</a:t>
-            </a:r>
-          </a:p>
-        </p:txBody>
-      </p:sp>
-      <p:sp>
-        <p:nvSpPr>
-          <p:cNvPr id="6" name="Rectangle 5"/>
+                  <a:srgbClr val="000000"/>
+                </a:solidFill>
+              </a:rPr>
+              <a:t>UCSC Xena  —  RNA-seq gene expression</a:t>
+            </a:r>
+          </a:p>
+          <a:p>
+            <a:pPr lvl="1"/>
+            <a:r>
+              <a:rPr sz="1300">
+                <a:solidFill>
+                  <a:srgbClr val="000000"/>
+                </a:solidFill>
+              </a:rPr>
+              <a:t>529 patients  |  20,530 genes  -&gt;  2,000</a:t>
+            </a:r>
+          </a:p>
+        </p:txBody>
+      </p:sp>
+      <p:sp>
+        <p:nvSpPr>
+          <p:cNvPr id="12" name="TextBox 11"/>
+          <p:cNvSpPr txBox="1"/>
+          <p:nvPr/>
+        </p:nvSpPr>
+        <p:spPr>
+          <a:xfrm>
+            <a:off x="6035040" y="1298448"/>
+            <a:ext cx="5852160" cy="5212080"/>
+          </a:xfrm>
+          <a:prstGeom prst="rect">
+            <a:avLst/>
+          </a:prstGeom>
+          <a:noFill/>
+        </p:spPr>
+        <p:txBody>
+          <a:bodyPr wrap="square">
+            <a:spAutoFit/>
+          </a:bodyPr>
+          <a:lstStyle/>
+          <a:p>
+            <a:pPr>
+              <a:spcBef>
+                <a:spcPts val="900"/>
+              </a:spcBef>
+            </a:pPr>
+            <a:r>
+              <a:rPr sz="1500" b="1">
+                <a:solidFill>
+                  <a:srgbClr val="1E355E"/>
+                </a:solidFill>
+              </a:rPr>
+              <a:t>Libraries Required to Build the Model</a:t>
+            </a:r>
+          </a:p>
+          <a:p>
+            <a:pPr lvl="1"/>
+            <a:r>
+              <a:rPr sz="1300">
+                <a:solidFill>
+                  <a:srgbClr val="000000"/>
+                </a:solidFill>
+              </a:rPr>
+              <a:t>pandas, numpy          —  data wrangling</a:t>
+            </a:r>
+          </a:p>
+          <a:p>
+            <a:pPr lvl="1"/>
+            <a:r>
+              <a:rPr sz="1300">
+                <a:solidFill>
+                  <a:srgbClr val="000000"/>
+                </a:solidFill>
+              </a:rPr>
+              <a:t>lifelines              —  Cox PH, Kaplan-Meier</a:t>
+            </a:r>
+          </a:p>
+          <a:p>
+            <a:pPr lvl="1"/>
+            <a:r>
+              <a:rPr sz="1300">
+                <a:solidFill>
+                  <a:srgbClr val="000000"/>
+                </a:solidFill>
+              </a:rPr>
+              <a:t>scikit-survival        —  LASSO Cox, RSF</a:t>
+            </a:r>
+          </a:p>
+          <a:p>
+            <a:pPr lvl="1"/>
+            <a:r>
+              <a:rPr sz="1300">
+                <a:solidFill>
+                  <a:srgbClr val="000000"/>
+                </a:solidFill>
+              </a:rPr>
+              <a:t>PyTorch                —  DeepSurv neural network</a:t>
+            </a:r>
+          </a:p>
+          <a:p>
+            <a:pPr lvl="1"/>
+            <a:r>
+              <a:rPr sz="1300">
+                <a:solidFill>
+                  <a:srgbClr val="000000"/>
+                </a:solidFill>
+              </a:rPr>
+              <a:t>plotly, matplotlib     —  visualisations</a:t>
+            </a:r>
+          </a:p>
+          <a:p>
+            <a:pPr lvl="1"/>
+            <a:r>
+              <a:rPr sz="1300">
+                <a:solidFill>
+                  <a:srgbClr val="000000"/>
+                </a:solidFill>
+              </a:rPr>
+              <a:t>scikit-learn           —  preprocessing &amp; metrics</a:t>
+            </a:r>
+          </a:p>
+          <a:p>
+            <a:pPr lvl="1"/>
+            <a:r>
+              <a:rPr sz="1300">
+                <a:solidFill>
+                  <a:srgbClr val="000000"/>
+                </a:solidFill>
+              </a:rPr>
+              <a:t>streamlit              —  interactive dashboard</a:t>
+            </a:r>
+          </a:p>
+          <a:p>
+            <a:pPr lvl="1"/>
+            <a:r>
+              <a:rPr sz="1300">
+                <a:solidFill>
+                  <a:srgbClr val="000000"/>
+                </a:solidFill>
+              </a:rPr>
+              <a:t>python-pptx            —  this presentation</a:t>
+            </a:r>
+          </a:p>
+        </p:txBody>
+      </p:sp>
+      <p:sp>
+        <p:nvSpPr>
+          <p:cNvPr id="13" name="Rectangle 12"/>
           <p:cNvSpPr/>
           <p:nvPr/>
         </p:nvSpPr>
         <p:spPr>
           <a:xfrm>
-            <a:off x="4526280" y="1572768"/>
-            <a:ext cx="45720" cy="4754880"/>
+            <a:off x="5897880" y="1353312"/>
+            <a:ext cx="36576" cy="5120640"/>
           </a:xfrm>
           <a:prstGeom prst="rect">
             <a:avLst/>
@@ -5471,83 +6904,6 @@
           <a:lstStyle/>
           <a:p>
             <a:pPr algn="ctr"/>
-          </a:p>
-        </p:txBody>
-      </p:sp>
-      <p:sp>
-        <p:nvSpPr>
-          <p:cNvPr id="7" name="Rectangle 6"/>
-          <p:cNvSpPr/>
-          <p:nvPr/>
-        </p:nvSpPr>
-        <p:spPr>
-          <a:xfrm>
-            <a:off x="0" y="6583680"/>
-            <a:ext cx="9144000" cy="274320"/>
-          </a:xfrm>
-          <a:prstGeom prst="rect">
-            <a:avLst/>
-          </a:prstGeom>
-          <a:solidFill>
-            <a:srgbClr val="E0E6F0"/>
-          </a:solidFill>
-          <a:ln>
-            <a:noFill/>
-          </a:ln>
-        </p:spPr>
-        <p:style>
-          <a:lnRef idx="1">
-            <a:schemeClr val="accent1"/>
-          </a:lnRef>
-          <a:fillRef idx="3">
-            <a:schemeClr val="accent1"/>
-          </a:fillRef>
-          <a:effectRef idx="2">
-            <a:schemeClr val="accent1"/>
-          </a:effectRef>
-          <a:fontRef idx="minor">
-            <a:schemeClr val="lt1"/>
-          </a:fontRef>
-        </p:style>
-        <p:txBody>
-          <a:bodyPr rtlCol="0" anchor="ctr"/>
-          <a:lstStyle/>
-          <a:p>
-            <a:pPr algn="ctr"/>
-          </a:p>
-        </p:txBody>
-      </p:sp>
-      <p:sp>
-        <p:nvSpPr>
-          <p:cNvPr id="8" name="TextBox 7"/>
-          <p:cNvSpPr txBox="1"/>
-          <p:nvPr/>
-        </p:nvSpPr>
-        <p:spPr>
-          <a:xfrm>
-            <a:off x="182880" y="6592824"/>
-            <a:ext cx="8778240" cy="256032"/>
-          </a:xfrm>
-          <a:prstGeom prst="rect">
-            <a:avLst/>
-          </a:prstGeom>
-          <a:noFill/>
-        </p:spPr>
-        <p:txBody>
-          <a:bodyPr wrap="square">
-            <a:spAutoFit/>
-          </a:bodyPr>
-          <a:lstStyle/>
-          <a:p>
-            <a:pPr algn="ctr"/>
-            <a:r>
-              <a:rPr sz="900">
-                <a:solidFill>
-                  <a:srgbClr val="555555"/>
-                </a:solidFill>
-              </a:rPr>
-              <a:t>TCGA KIRC — Survival Analysis  ·  MS Elevate Internship Project</a:t>
-            </a:r>
           </a:p>
         </p:txBody>
       </p:sp>
@@ -5578,13 +6934,13 @@
         <p:spPr>
           <a:xfrm>
             <a:off x="0" y="0"/>
-            <a:ext cx="9144000" cy="1417320"/>
+            <a:ext cx="12188952" cy="1188720"/>
           </a:xfrm>
           <a:prstGeom prst="rect">
             <a:avLst/>
           </a:prstGeom>
           <a:solidFill>
-            <a:srgbClr val="0053A5"/>
+            <a:srgbClr val="1E355E"/>
           </a:solidFill>
           <a:ln>
             <a:noFill/>
@@ -5620,8 +6976,8 @@
         </p:nvSpPr>
         <p:spPr>
           <a:xfrm>
-            <a:off x="228600" y="109728"/>
-            <a:ext cx="8686800" cy="914400"/>
+            <a:off x="320040" y="164592"/>
+            <a:ext cx="9811512" cy="868680"/>
           </a:xfrm>
           <a:prstGeom prst="rect">
             <a:avLst/>
@@ -5635,195 +6991,32 @@
           <a:lstStyle/>
           <a:p>
             <a:r>
-              <a:rPr sz="2800" b="1">
+              <a:rPr sz="3000" b="1">
                 <a:solidFill>
                   <a:srgbClr val="FFFFFF"/>
                 </a:solidFill>
               </a:rPr>
-              <a:t>Algorithm &amp; Deployment</a:t>
-            </a:r>
-          </a:p>
-          <a:p>
-            <a:r>
-              <a:rPr sz="1300">
-                <a:solidFill>
-                  <a:srgbClr val="BBD4FF"/>
-                </a:solidFill>
-              </a:rPr>
-              <a:t>4 survival models · 529 patients · 70/30 stratified train/test split</a:t>
-            </a:r>
-          </a:p>
-        </p:txBody>
-      </p:sp>
-      <p:sp>
-        <p:nvSpPr>
-          <p:cNvPr id="4" name="TextBox 3"/>
-          <p:cNvSpPr txBox="1"/>
-          <p:nvPr/>
-        </p:nvSpPr>
-        <p:spPr>
-          <a:xfrm>
-            <a:off x="274320" y="1554480"/>
-            <a:ext cx="8595360" cy="4846320"/>
-          </a:xfrm>
-          <a:prstGeom prst="rect">
-            <a:avLst/>
-          </a:prstGeom>
-          <a:noFill/>
-        </p:spPr>
-        <p:txBody>
-          <a:bodyPr wrap="square">
-            <a:spAutoFit/>
-          </a:bodyPr>
-          <a:lstStyle/>
-          <a:p>
-            <a:pPr>
-              <a:spcBef>
-                <a:spcPts val="800"/>
-              </a:spcBef>
-            </a:pPr>
-            <a:r>
-              <a:rPr sz="1500" b="1">
-                <a:solidFill>
-                  <a:srgbClr val="0053A5"/>
-                </a:solidFill>
-              </a:rPr>
-              <a:t>1 — Cox Proportional Hazards  (Baseline)</a:t>
-            </a:r>
-          </a:p>
-          <a:p>
-            <a:pPr/>
-            <a:r>
-              <a:rPr sz="1300">
-                <a:solidFill>
-                  <a:srgbClr val="1A1A2E"/>
-                </a:solidFill>
-              </a:rPr>
-              <a:t>Clinical features only · hazard ratio interpretation · lifelines CoxPHFitter</a:t>
-            </a:r>
-          </a:p>
-          <a:p>
-            <a:pPr>
-              <a:spcBef>
-                <a:spcPts val="800"/>
-              </a:spcBef>
-            </a:pPr>
-            <a:r>
-              <a:rPr sz="1500" b="1">
-                <a:solidFill>
-                  <a:srgbClr val="0053A5"/>
-                </a:solidFill>
-              </a:rPr>
-              <a:t>2 — LASSO-penalised Cox  (Best Model ⭐)</a:t>
-            </a:r>
-          </a:p>
-          <a:p>
-            <a:pPr/>
-            <a:r>
-              <a:rPr sz="1300">
-                <a:solidFill>
-                  <a:srgbClr val="1A1A2E"/>
-                </a:solidFill>
-              </a:rPr>
-              <a:t>Clinical + 2,000 genes · L1 regularisation for automatic gene selection · scikit-survival CoxnetSurvivalAnalysis · 5-fold CV for alpha</a:t>
-            </a:r>
-          </a:p>
-          <a:p>
-            <a:pPr>
-              <a:spcBef>
-                <a:spcPts val="800"/>
-              </a:spcBef>
-            </a:pPr>
-            <a:r>
-              <a:rPr sz="1500" b="1">
-                <a:solidFill>
-                  <a:srgbClr val="0053A5"/>
-                </a:solidFill>
-              </a:rPr>
-              <a:t>3 — Random Survival Forest</a:t>
-            </a:r>
-          </a:p>
-          <a:p>
-            <a:pPr/>
-            <a:r>
-              <a:rPr sz="1300">
-                <a:solidFill>
-                  <a:srgbClr val="1A1A2E"/>
-                </a:solidFill>
-              </a:rPr>
-              <a:t>Non-linear ensemble · 200 trees · scikit-survival RandomSurvivalForest · permutation-based feature importance</a:t>
-            </a:r>
-          </a:p>
-          <a:p>
-            <a:pPr>
-              <a:spcBef>
-                <a:spcPts val="800"/>
-              </a:spcBef>
-            </a:pPr>
-            <a:r>
-              <a:rPr sz="1500" b="1">
-                <a:solidFill>
-                  <a:srgbClr val="0053A5"/>
-                </a:solidFill>
-              </a:rPr>
-              <a:t>4 — DeepSurv  (Deep Learning)</a:t>
-            </a:r>
-          </a:p>
-          <a:p>
-            <a:pPr/>
-            <a:r>
-              <a:rPr sz="1300">
-                <a:solidFill>
-                  <a:srgbClr val="1A1A2E"/>
-                </a:solidFill>
-              </a:rPr>
-              <a:t>3-layer MLP (input → 64 → 32 → 1) · PyTorch · Cox partial-likelihood loss · Adam optimiser · 200 epochs · batch norm + dropout</a:t>
-            </a:r>
-          </a:p>
-          <a:p>
-            <a:pPr>
-              <a:spcBef>
-                <a:spcPts val="800"/>
-              </a:spcBef>
-            </a:pPr>
-            <a:r>
-              <a:rPr sz="1500" b="1">
-                <a:solidFill>
-                  <a:srgbClr val="0053A5"/>
-                </a:solidFill>
-              </a:rPr>
-              <a:t>Deployment — Streamlit Dashboard</a:t>
-            </a:r>
-          </a:p>
-          <a:p>
-            <a:pPr/>
-            <a:r>
-              <a:rPr sz="1300">
-                <a:solidFill>
-                  <a:srgbClr val="1A1A2E"/>
-                </a:solidFill>
-              </a:rPr>
-              <a:t>Interactive single-page app · real-time risk score · KM stratification · gene importance explorer · risk prediction demo with adjustable inputs</a:t>
-            </a:r>
-          </a:p>
-        </p:txBody>
-      </p:sp>
-      <p:sp>
-        <p:nvSpPr>
-          <p:cNvPr id="5" name="Rectangle 4"/>
+              <a:t>ALGORITHM &amp; DEPLOYMENT:</a:t>
+            </a:r>
+          </a:p>
+        </p:txBody>
+      </p:sp>
+      <p:sp>
+        <p:nvSpPr>
+          <p:cNvPr id="4" name="Rectangle 3"/>
           <p:cNvSpPr/>
           <p:nvPr/>
         </p:nvSpPr>
         <p:spPr>
           <a:xfrm>
-            <a:off x="0" y="6583680"/>
-            <a:ext cx="9144000" cy="274320"/>
+            <a:off x="10268712" y="201168"/>
+            <a:ext cx="128016" cy="128016"/>
           </a:xfrm>
           <a:prstGeom prst="rect">
             <a:avLst/>
           </a:prstGeom>
           <a:solidFill>
-            <a:srgbClr val="E0E6F0"/>
+            <a:srgbClr val="F25022"/>
           </a:solidFill>
           <a:ln>
             <a:noFill/>
@@ -5853,14 +7046,143 @@
       </p:sp>
       <p:sp>
         <p:nvSpPr>
-          <p:cNvPr id="6" name="TextBox 5"/>
+          <p:cNvPr id="5" name="Rectangle 4"/>
+          <p:cNvSpPr/>
+          <p:nvPr/>
+        </p:nvSpPr>
+        <p:spPr>
+          <a:xfrm>
+            <a:off x="10419588" y="201168"/>
+            <a:ext cx="128016" cy="128016"/>
+          </a:xfrm>
+          <a:prstGeom prst="rect">
+            <a:avLst/>
+          </a:prstGeom>
+          <a:solidFill>
+            <a:srgbClr val="7FBA00"/>
+          </a:solidFill>
+          <a:ln>
+            <a:noFill/>
+          </a:ln>
+        </p:spPr>
+        <p:style>
+          <a:lnRef idx="1">
+            <a:schemeClr val="accent1"/>
+          </a:lnRef>
+          <a:fillRef idx="3">
+            <a:schemeClr val="accent1"/>
+          </a:fillRef>
+          <a:effectRef idx="2">
+            <a:schemeClr val="accent1"/>
+          </a:effectRef>
+          <a:fontRef idx="minor">
+            <a:schemeClr val="lt1"/>
+          </a:fontRef>
+        </p:style>
+        <p:txBody>
+          <a:bodyPr rtlCol="0" anchor="ctr"/>
+          <a:lstStyle/>
+          <a:p>
+            <a:pPr algn="ctr"/>
+          </a:p>
+        </p:txBody>
+      </p:sp>
+      <p:sp>
+        <p:nvSpPr>
+          <p:cNvPr id="6" name="Rectangle 5"/>
+          <p:cNvSpPr/>
+          <p:nvPr/>
+        </p:nvSpPr>
+        <p:spPr>
+          <a:xfrm>
+            <a:off x="10268712" y="352044"/>
+            <a:ext cx="128016" cy="128016"/>
+          </a:xfrm>
+          <a:prstGeom prst="rect">
+            <a:avLst/>
+          </a:prstGeom>
+          <a:solidFill>
+            <a:srgbClr val="00A4EF"/>
+          </a:solidFill>
+          <a:ln>
+            <a:noFill/>
+          </a:ln>
+        </p:spPr>
+        <p:style>
+          <a:lnRef idx="1">
+            <a:schemeClr val="accent1"/>
+          </a:lnRef>
+          <a:fillRef idx="3">
+            <a:schemeClr val="accent1"/>
+          </a:fillRef>
+          <a:effectRef idx="2">
+            <a:schemeClr val="accent1"/>
+          </a:effectRef>
+          <a:fontRef idx="minor">
+            <a:schemeClr val="lt1"/>
+          </a:fontRef>
+        </p:style>
+        <p:txBody>
+          <a:bodyPr rtlCol="0" anchor="ctr"/>
+          <a:lstStyle/>
+          <a:p>
+            <a:pPr algn="ctr"/>
+          </a:p>
+        </p:txBody>
+      </p:sp>
+      <p:sp>
+        <p:nvSpPr>
+          <p:cNvPr id="7" name="Rectangle 6"/>
+          <p:cNvSpPr/>
+          <p:nvPr/>
+        </p:nvSpPr>
+        <p:spPr>
+          <a:xfrm>
+            <a:off x="10419588" y="352044"/>
+            <a:ext cx="128016" cy="128016"/>
+          </a:xfrm>
+          <a:prstGeom prst="rect">
+            <a:avLst/>
+          </a:prstGeom>
+          <a:solidFill>
+            <a:srgbClr val="FFB900"/>
+          </a:solidFill>
+          <a:ln>
+            <a:noFill/>
+          </a:ln>
+        </p:spPr>
+        <p:style>
+          <a:lnRef idx="1">
+            <a:schemeClr val="accent1"/>
+          </a:lnRef>
+          <a:fillRef idx="3">
+            <a:schemeClr val="accent1"/>
+          </a:fillRef>
+          <a:effectRef idx="2">
+            <a:schemeClr val="accent1"/>
+          </a:effectRef>
+          <a:fontRef idx="minor">
+            <a:schemeClr val="lt1"/>
+          </a:fontRef>
+        </p:style>
+        <p:txBody>
+          <a:bodyPr rtlCol="0" anchor="ctr"/>
+          <a:lstStyle/>
+          <a:p>
+            <a:pPr algn="ctr"/>
+          </a:p>
+        </p:txBody>
+      </p:sp>
+      <p:sp>
+        <p:nvSpPr>
+          <p:cNvPr id="8" name="TextBox 7"/>
           <p:cNvSpPr txBox="1"/>
           <p:nvPr/>
         </p:nvSpPr>
         <p:spPr>
           <a:xfrm>
-            <a:off x="182880" y="6592824"/>
-            <a:ext cx="8778240" cy="256032"/>
+            <a:off x="10611612" y="192024"/>
+            <a:ext cx="1371600" cy="201168"/>
           </a:xfrm>
           <a:prstGeom prst="rect">
             <a:avLst/>
@@ -5873,14 +7195,304 @@
           </a:bodyPr>
           <a:lstStyle/>
           <a:p>
+            <a:r>
+              <a:rPr sz="1000">
+                <a:solidFill>
+                  <a:srgbClr val="FFFFFF"/>
+                </a:solidFill>
+              </a:rPr>
+              <a:t>Microsoft</a:t>
+            </a:r>
+          </a:p>
+        </p:txBody>
+      </p:sp>
+      <p:sp>
+        <p:nvSpPr>
+          <p:cNvPr id="9" name="TextBox 8"/>
+          <p:cNvSpPr txBox="1"/>
+          <p:nvPr/>
+        </p:nvSpPr>
+        <p:spPr>
+          <a:xfrm>
+            <a:off x="10611612" y="365760"/>
+            <a:ext cx="1371600" cy="201168"/>
+          </a:xfrm>
+          <a:prstGeom prst="rect">
+            <a:avLst/>
+          </a:prstGeom>
+          <a:noFill/>
+        </p:spPr>
+        <p:txBody>
+          <a:bodyPr wrap="square">
+            <a:spAutoFit/>
+          </a:bodyPr>
+          <a:lstStyle/>
+          <a:p>
+            <a:r>
+              <a:rPr sz="1000">
+                <a:solidFill>
+                  <a:srgbClr val="FFFFFF"/>
+                </a:solidFill>
+              </a:rPr>
+              <a:t>Elevate</a:t>
+            </a:r>
+          </a:p>
+        </p:txBody>
+      </p:sp>
+      <p:sp>
+        <p:nvSpPr>
+          <p:cNvPr id="10" name="Rectangle 9"/>
+          <p:cNvSpPr/>
+          <p:nvPr/>
+        </p:nvSpPr>
+        <p:spPr>
+          <a:xfrm>
+            <a:off x="0" y="6556248"/>
+            <a:ext cx="12188952" cy="301752"/>
+          </a:xfrm>
+          <a:prstGeom prst="rect">
+            <a:avLst/>
+          </a:prstGeom>
+          <a:solidFill>
+            <a:srgbClr val="00A050"/>
+          </a:solidFill>
+          <a:ln>
+            <a:noFill/>
+          </a:ln>
+        </p:spPr>
+        <p:style>
+          <a:lnRef idx="1">
+            <a:schemeClr val="accent1"/>
+          </a:lnRef>
+          <a:fillRef idx="3">
+            <a:schemeClr val="accent1"/>
+          </a:fillRef>
+          <a:effectRef idx="2">
+            <a:schemeClr val="accent1"/>
+          </a:effectRef>
+          <a:fontRef idx="minor">
+            <a:schemeClr val="lt1"/>
+          </a:fontRef>
+        </p:style>
+        <p:txBody>
+          <a:bodyPr rtlCol="0" anchor="ctr"/>
+          <a:lstStyle/>
+          <a:p>
             <a:pPr algn="ctr"/>
-            <a:r>
-              <a:rPr sz="900">
-                <a:solidFill>
-                  <a:srgbClr val="555555"/>
-                </a:solidFill>
-              </a:rPr>
-              <a:t>TCGA KIRC — Survival Analysis  ·  MS Elevate Internship Project</a:t>
+          </a:p>
+        </p:txBody>
+      </p:sp>
+      <p:sp>
+        <p:nvSpPr>
+          <p:cNvPr id="11" name="TextBox 10"/>
+          <p:cNvSpPr txBox="1"/>
+          <p:nvPr/>
+        </p:nvSpPr>
+        <p:spPr>
+          <a:xfrm>
+            <a:off x="320040" y="1298448"/>
+            <a:ext cx="11548872" cy="5148072"/>
+          </a:xfrm>
+          <a:prstGeom prst="rect">
+            <a:avLst/>
+          </a:prstGeom>
+          <a:noFill/>
+        </p:spPr>
+        <p:txBody>
+          <a:bodyPr wrap="square">
+            <a:spAutoFit/>
+          </a:bodyPr>
+          <a:lstStyle/>
+          <a:p>
+            <a:pPr>
+              <a:spcBef>
+                <a:spcPts val="900"/>
+              </a:spcBef>
+            </a:pPr>
+            <a:r>
+              <a:rPr sz="1500" b="1">
+                <a:solidFill>
+                  <a:srgbClr val="1E355E"/>
+                </a:solidFill>
+              </a:rPr>
+              <a:t>Algorithm Selection</a:t>
+            </a:r>
+          </a:p>
+          <a:p>
+            <a:pPr lvl="1"/>
+            <a:r>
+              <a:rPr sz="1300">
+                <a:solidFill>
+                  <a:srgbClr val="000000"/>
+                </a:solidFill>
+              </a:rPr>
+              <a:t>Four complementary survival models were chosen to capture linear, penalised, ensemble, and deep-learning representations of the survival task:</a:t>
+            </a:r>
+          </a:p>
+          <a:p>
+            <a:pPr lvl="1"/>
+            <a:r>
+              <a:rPr sz="1300">
+                <a:solidFill>
+                  <a:srgbClr val="000000"/>
+                </a:solidFill>
+              </a:rPr>
+              <a:t>Cox Proportional Hazards — clinical features only; interpretable hazard ratios (baseline)</a:t>
+            </a:r>
+          </a:p>
+          <a:p>
+            <a:pPr lvl="1"/>
+            <a:r>
+              <a:rPr sz="1300">
+                <a:solidFill>
+                  <a:srgbClr val="000000"/>
+                </a:solidFill>
+              </a:rPr>
+              <a:t>LASSO-penalised Cox (BEST) — clinical + 2,000 genes; L1 shrinkage auto-selects genes</a:t>
+            </a:r>
+          </a:p>
+          <a:p>
+            <a:pPr lvl="1"/>
+            <a:r>
+              <a:rPr sz="1300">
+                <a:solidFill>
+                  <a:srgbClr val="000000"/>
+                </a:solidFill>
+              </a:rPr>
+              <a:t>Random Survival Forest  — 200 trees; captures non-linear gene interactions</a:t>
+            </a:r>
+          </a:p>
+          <a:p>
+            <a:pPr lvl="1"/>
+            <a:r>
+              <a:rPr sz="1300">
+                <a:solidFill>
+                  <a:srgbClr val="000000"/>
+                </a:solidFill>
+              </a:rPr>
+              <a:t>DeepSurv (PyTorch)  — 3-layer MLP; Cox partial-likelihood loss; Adam; 200 epochs</a:t>
+            </a:r>
+          </a:p>
+          <a:p>
+            <a:pPr>
+              <a:spcBef>
+                <a:spcPts val="900"/>
+              </a:spcBef>
+            </a:pPr>
+            <a:r>
+              <a:rPr sz="1500" b="1">
+                <a:solidFill>
+                  <a:srgbClr val="1E355E"/>
+                </a:solidFill>
+              </a:rPr>
+              <a:t>Data Input</a:t>
+            </a:r>
+          </a:p>
+          <a:p>
+            <a:pPr lvl="1"/>
+            <a:r>
+              <a:rPr sz="1300">
+                <a:solidFill>
+                  <a:srgbClr val="000000"/>
+                </a:solidFill>
+              </a:rPr>
+              <a:t>Features: age, AJCC stage, gender + top 2,000 variance-ranked genes</a:t>
+            </a:r>
+          </a:p>
+          <a:p>
+            <a:pPr lvl="1"/>
+            <a:r>
+              <a:rPr sz="1300">
+                <a:solidFill>
+                  <a:srgbClr val="000000"/>
+                </a:solidFill>
+              </a:rPr>
+              <a:t>Target: right-censored overall survival (time in days, event = 1 if deceased)</a:t>
+            </a:r>
+          </a:p>
+          <a:p>
+            <a:pPr>
+              <a:spcBef>
+                <a:spcPts val="900"/>
+              </a:spcBef>
+            </a:pPr>
+            <a:r>
+              <a:rPr sz="1500" b="1">
+                <a:solidFill>
+                  <a:srgbClr val="1E355E"/>
+                </a:solidFill>
+              </a:rPr>
+              <a:t>Training Process</a:t>
+            </a:r>
+          </a:p>
+          <a:p>
+            <a:pPr lvl="1"/>
+            <a:r>
+              <a:rPr sz="1300">
+                <a:solidFill>
+                  <a:srgbClr val="000000"/>
+                </a:solidFill>
+              </a:rPr>
+              <a:t>70/30 stratified train/test split  (370 train, 159 test)</a:t>
+            </a:r>
+          </a:p>
+          <a:p>
+            <a:pPr lvl="1"/>
+            <a:r>
+              <a:rPr sz="1300">
+                <a:solidFill>
+                  <a:srgbClr val="000000"/>
+                </a:solidFill>
+              </a:rPr>
+              <a:t>5-fold CV for LASSO alpha  |  batch-norm + dropout(0.3) for DeepSurv</a:t>
+            </a:r>
+          </a:p>
+          <a:p>
+            <a:pPr>
+              <a:spcBef>
+                <a:spcPts val="900"/>
+              </a:spcBef>
+            </a:pPr>
+            <a:r>
+              <a:rPr sz="1500" b="1">
+                <a:solidFill>
+                  <a:srgbClr val="1E355E"/>
+                </a:solidFill>
+              </a:rPr>
+              <a:t>Deployment</a:t>
+            </a:r>
+          </a:p>
+          <a:p>
+            <a:pPr lvl="1"/>
+            <a:r>
+              <a:rPr sz="1300">
+                <a:solidFill>
+                  <a:srgbClr val="000000"/>
+                </a:solidFill>
+              </a:rPr>
+              <a:t>Models serialised via joblib (Cox/RSF) and torch.save (DeepSurv)</a:t>
+            </a:r>
+          </a:p>
+          <a:p>
+            <a:pPr lvl="1"/>
+            <a:r>
+              <a:rPr sz="1300">
+                <a:solidFill>
+                  <a:srgbClr val="000000"/>
+                </a:solidFill>
+              </a:rPr>
+              <a:t>Streamlit app loads Cox PH + scaler; user enters clinical inputs -&gt; survival curve</a:t>
+            </a:r>
+          </a:p>
+          <a:p>
+            <a:pPr lvl="1"/>
+            <a:r>
+              <a:rPr sz="1300">
+                <a:solidFill>
+                  <a:srgbClr val="000000"/>
+                </a:solidFill>
+              </a:rPr>
+              <a:t>Live:  https://tcga-kirc.streamlit.app/</a:t>
             </a:r>
           </a:p>
         </p:txBody>
@@ -5912,13 +7524,13 @@
         <p:spPr>
           <a:xfrm>
             <a:off x="0" y="0"/>
-            <a:ext cx="9144000" cy="1417320"/>
+            <a:ext cx="12188952" cy="1188720"/>
           </a:xfrm>
           <a:prstGeom prst="rect">
             <a:avLst/>
           </a:prstGeom>
           <a:solidFill>
-            <a:srgbClr val="0053A5"/>
+            <a:srgbClr val="1E355E"/>
           </a:solidFill>
           <a:ln>
             <a:noFill/>
@@ -5954,8 +7566,8 @@
         </p:nvSpPr>
         <p:spPr>
           <a:xfrm>
-            <a:off x="228600" y="109728"/>
-            <a:ext cx="8686800" cy="914400"/>
+            <a:off x="320040" y="164592"/>
+            <a:ext cx="9811512" cy="868680"/>
           </a:xfrm>
           <a:prstGeom prst="rect">
             <a:avLst/>
@@ -5969,22 +7581,12 @@
           <a:lstStyle/>
           <a:p>
             <a:r>
-              <a:rPr sz="2800" b="1">
+              <a:rPr sz="3000" b="1">
                 <a:solidFill>
                   <a:srgbClr val="FFFFFF"/>
                 </a:solidFill>
               </a:rPr>
-              <a:t>Results</a:t>
-            </a:r>
-          </a:p>
-          <a:p>
-            <a:r>
-              <a:rPr sz="1300">
-                <a:solidFill>
-                  <a:srgbClr val="BBD4FF"/>
-                </a:solidFill>
-              </a:rPr>
-              <a:t>LASSO Cox  C-index = 0.805  ·  RSF  Integrated Brier Score = 0.154</a:t>
+              <a:t>RESULT  (Output Images):</a:t>
             </a:r>
           </a:p>
         </p:txBody>
@@ -5997,8 +7599,289 @@
         </p:nvSpPr>
         <p:spPr>
           <a:xfrm>
-            <a:off x="182880" y="1508760"/>
-            <a:ext cx="2880360" cy="1737360"/>
+            <a:off x="10268712" y="201168"/>
+            <a:ext cx="128016" cy="128016"/>
+          </a:xfrm>
+          <a:prstGeom prst="rect">
+            <a:avLst/>
+          </a:prstGeom>
+          <a:solidFill>
+            <a:srgbClr val="F25022"/>
+          </a:solidFill>
+          <a:ln>
+            <a:noFill/>
+          </a:ln>
+        </p:spPr>
+        <p:style>
+          <a:lnRef idx="1">
+            <a:schemeClr val="accent1"/>
+          </a:lnRef>
+          <a:fillRef idx="3">
+            <a:schemeClr val="accent1"/>
+          </a:fillRef>
+          <a:effectRef idx="2">
+            <a:schemeClr val="accent1"/>
+          </a:effectRef>
+          <a:fontRef idx="minor">
+            <a:schemeClr val="lt1"/>
+          </a:fontRef>
+        </p:style>
+        <p:txBody>
+          <a:bodyPr rtlCol="0" anchor="ctr"/>
+          <a:lstStyle/>
+          <a:p>
+            <a:pPr algn="ctr"/>
+          </a:p>
+        </p:txBody>
+      </p:sp>
+      <p:sp>
+        <p:nvSpPr>
+          <p:cNvPr id="5" name="Rectangle 4"/>
+          <p:cNvSpPr/>
+          <p:nvPr/>
+        </p:nvSpPr>
+        <p:spPr>
+          <a:xfrm>
+            <a:off x="10419588" y="201168"/>
+            <a:ext cx="128016" cy="128016"/>
+          </a:xfrm>
+          <a:prstGeom prst="rect">
+            <a:avLst/>
+          </a:prstGeom>
+          <a:solidFill>
+            <a:srgbClr val="7FBA00"/>
+          </a:solidFill>
+          <a:ln>
+            <a:noFill/>
+          </a:ln>
+        </p:spPr>
+        <p:style>
+          <a:lnRef idx="1">
+            <a:schemeClr val="accent1"/>
+          </a:lnRef>
+          <a:fillRef idx="3">
+            <a:schemeClr val="accent1"/>
+          </a:fillRef>
+          <a:effectRef idx="2">
+            <a:schemeClr val="accent1"/>
+          </a:effectRef>
+          <a:fontRef idx="minor">
+            <a:schemeClr val="lt1"/>
+          </a:fontRef>
+        </p:style>
+        <p:txBody>
+          <a:bodyPr rtlCol="0" anchor="ctr"/>
+          <a:lstStyle/>
+          <a:p>
+            <a:pPr algn="ctr"/>
+          </a:p>
+        </p:txBody>
+      </p:sp>
+      <p:sp>
+        <p:nvSpPr>
+          <p:cNvPr id="6" name="Rectangle 5"/>
+          <p:cNvSpPr/>
+          <p:nvPr/>
+        </p:nvSpPr>
+        <p:spPr>
+          <a:xfrm>
+            <a:off x="10268712" y="352044"/>
+            <a:ext cx="128016" cy="128016"/>
+          </a:xfrm>
+          <a:prstGeom prst="rect">
+            <a:avLst/>
+          </a:prstGeom>
+          <a:solidFill>
+            <a:srgbClr val="00A4EF"/>
+          </a:solidFill>
+          <a:ln>
+            <a:noFill/>
+          </a:ln>
+        </p:spPr>
+        <p:style>
+          <a:lnRef idx="1">
+            <a:schemeClr val="accent1"/>
+          </a:lnRef>
+          <a:fillRef idx="3">
+            <a:schemeClr val="accent1"/>
+          </a:fillRef>
+          <a:effectRef idx="2">
+            <a:schemeClr val="accent1"/>
+          </a:effectRef>
+          <a:fontRef idx="minor">
+            <a:schemeClr val="lt1"/>
+          </a:fontRef>
+        </p:style>
+        <p:txBody>
+          <a:bodyPr rtlCol="0" anchor="ctr"/>
+          <a:lstStyle/>
+          <a:p>
+            <a:pPr algn="ctr"/>
+          </a:p>
+        </p:txBody>
+      </p:sp>
+      <p:sp>
+        <p:nvSpPr>
+          <p:cNvPr id="7" name="Rectangle 6"/>
+          <p:cNvSpPr/>
+          <p:nvPr/>
+        </p:nvSpPr>
+        <p:spPr>
+          <a:xfrm>
+            <a:off x="10419588" y="352044"/>
+            <a:ext cx="128016" cy="128016"/>
+          </a:xfrm>
+          <a:prstGeom prst="rect">
+            <a:avLst/>
+          </a:prstGeom>
+          <a:solidFill>
+            <a:srgbClr val="FFB900"/>
+          </a:solidFill>
+          <a:ln>
+            <a:noFill/>
+          </a:ln>
+        </p:spPr>
+        <p:style>
+          <a:lnRef idx="1">
+            <a:schemeClr val="accent1"/>
+          </a:lnRef>
+          <a:fillRef idx="3">
+            <a:schemeClr val="accent1"/>
+          </a:fillRef>
+          <a:effectRef idx="2">
+            <a:schemeClr val="accent1"/>
+          </a:effectRef>
+          <a:fontRef idx="minor">
+            <a:schemeClr val="lt1"/>
+          </a:fontRef>
+        </p:style>
+        <p:txBody>
+          <a:bodyPr rtlCol="0" anchor="ctr"/>
+          <a:lstStyle/>
+          <a:p>
+            <a:pPr algn="ctr"/>
+          </a:p>
+        </p:txBody>
+      </p:sp>
+      <p:sp>
+        <p:nvSpPr>
+          <p:cNvPr id="8" name="TextBox 7"/>
+          <p:cNvSpPr txBox="1"/>
+          <p:nvPr/>
+        </p:nvSpPr>
+        <p:spPr>
+          <a:xfrm>
+            <a:off x="10611612" y="192024"/>
+            <a:ext cx="1371600" cy="201168"/>
+          </a:xfrm>
+          <a:prstGeom prst="rect">
+            <a:avLst/>
+          </a:prstGeom>
+          <a:noFill/>
+        </p:spPr>
+        <p:txBody>
+          <a:bodyPr wrap="square">
+            <a:spAutoFit/>
+          </a:bodyPr>
+          <a:lstStyle/>
+          <a:p>
+            <a:r>
+              <a:rPr sz="1000">
+                <a:solidFill>
+                  <a:srgbClr val="FFFFFF"/>
+                </a:solidFill>
+              </a:rPr>
+              <a:t>Microsoft</a:t>
+            </a:r>
+          </a:p>
+        </p:txBody>
+      </p:sp>
+      <p:sp>
+        <p:nvSpPr>
+          <p:cNvPr id="9" name="TextBox 8"/>
+          <p:cNvSpPr txBox="1"/>
+          <p:nvPr/>
+        </p:nvSpPr>
+        <p:spPr>
+          <a:xfrm>
+            <a:off x="10611612" y="365760"/>
+            <a:ext cx="1371600" cy="201168"/>
+          </a:xfrm>
+          <a:prstGeom prst="rect">
+            <a:avLst/>
+          </a:prstGeom>
+          <a:noFill/>
+        </p:spPr>
+        <p:txBody>
+          <a:bodyPr wrap="square">
+            <a:spAutoFit/>
+          </a:bodyPr>
+          <a:lstStyle/>
+          <a:p>
+            <a:r>
+              <a:rPr sz="1000">
+                <a:solidFill>
+                  <a:srgbClr val="FFFFFF"/>
+                </a:solidFill>
+              </a:rPr>
+              <a:t>Elevate</a:t>
+            </a:r>
+          </a:p>
+        </p:txBody>
+      </p:sp>
+      <p:sp>
+        <p:nvSpPr>
+          <p:cNvPr id="10" name="Rectangle 9"/>
+          <p:cNvSpPr/>
+          <p:nvPr/>
+        </p:nvSpPr>
+        <p:spPr>
+          <a:xfrm>
+            <a:off x="0" y="6556248"/>
+            <a:ext cx="12188952" cy="301752"/>
+          </a:xfrm>
+          <a:prstGeom prst="rect">
+            <a:avLst/>
+          </a:prstGeom>
+          <a:solidFill>
+            <a:srgbClr val="00A050"/>
+          </a:solidFill>
+          <a:ln>
+            <a:noFill/>
+          </a:ln>
+        </p:spPr>
+        <p:style>
+          <a:lnRef idx="1">
+            <a:schemeClr val="accent1"/>
+          </a:lnRef>
+          <a:fillRef idx="3">
+            <a:schemeClr val="accent1"/>
+          </a:fillRef>
+          <a:effectRef idx="2">
+            <a:schemeClr val="accent1"/>
+          </a:effectRef>
+          <a:fontRef idx="minor">
+            <a:schemeClr val="lt1"/>
+          </a:fontRef>
+        </p:style>
+        <p:txBody>
+          <a:bodyPr rtlCol="0" anchor="ctr"/>
+          <a:lstStyle/>
+          <a:p>
+            <a:pPr algn="ctr"/>
+          </a:p>
+        </p:txBody>
+      </p:sp>
+      <p:sp>
+        <p:nvSpPr>
+          <p:cNvPr id="11" name="Rectangle 10"/>
+          <p:cNvSpPr/>
+          <p:nvPr/>
+        </p:nvSpPr>
+        <p:spPr>
+          <a:xfrm>
+            <a:off x="274320" y="1298448"/>
+            <a:ext cx="3566160" cy="2148840"/>
           </a:xfrm>
           <a:prstGeom prst="rect">
             <a:avLst/>
@@ -6034,14 +7917,14 @@
       </p:sp>
       <p:sp>
         <p:nvSpPr>
-          <p:cNvPr id="5" name="TextBox 4"/>
+          <p:cNvPr id="12" name="TextBox 11"/>
           <p:cNvSpPr txBox="1"/>
           <p:nvPr/>
         </p:nvSpPr>
         <p:spPr>
           <a:xfrm>
-            <a:off x="274320" y="1554480"/>
-            <a:ext cx="2743200" cy="1691640"/>
+            <a:off x="365760" y="1353312"/>
+            <a:ext cx="3383280" cy="2057400"/>
           </a:xfrm>
           <a:prstGeom prst="rect">
             <a:avLst/>
@@ -6057,10 +7940,20 @@
             <a:r>
               <a:rPr sz="1200" b="1">
                 <a:solidFill>
+                  <a:srgbClr val="1E355E"/>
+                </a:solidFill>
+              </a:rPr>
+              <a:t>C-index  (Test Set)</a:t>
+            </a:r>
+          </a:p>
+          <a:p>
+            <a:r>
+              <a:rPr sz="1100" b="1">
+                <a:solidFill>
                   <a:srgbClr val="0053A5"/>
                 </a:solidFill>
               </a:rPr>
-              <a:t>C-index comparison</a:t>
+              <a:t>  * LASSO Cox               0.8047</a:t>
             </a:r>
           </a:p>
           <a:p>
@@ -6070,17 +7963,7 @@
                   <a:srgbClr val="1A1A2E"/>
                 </a:solidFill>
               </a:rPr>
-              <a:t>  Cox PH (clinical)  0.781</a:t>
-            </a:r>
-          </a:p>
-          <a:p>
-            <a:r>
-              <a:rPr sz="1100" b="1">
-                <a:solidFill>
-                  <a:srgbClr val="0053A5"/>
-                </a:solidFill>
-              </a:rPr>
-              <a:t>  ⭐ LASSO Cox  0.805</a:t>
+              <a:t>    Cox PH (clinical)       0.7809</a:t>
             </a:r>
           </a:p>
           <a:p>
@@ -6090,7 +7973,7 @@
                   <a:srgbClr val="1A1A2E"/>
                 </a:solidFill>
               </a:rPr>
-              <a:t>  Random Survival Forest  0.716</a:t>
+              <a:t>    DeepSurv                0.7637</a:t>
             </a:r>
           </a:p>
           <a:p>
@@ -6100,21 +7983,21 @@
                   <a:srgbClr val="1A1A2E"/>
                 </a:solidFill>
               </a:rPr>
-              <a:t>  DeepSurv  0.764</a:t>
-            </a:r>
-          </a:p>
-        </p:txBody>
-      </p:sp>
-      <p:sp>
-        <p:nvSpPr>
-          <p:cNvPr id="6" name="TextBox 5"/>
+              <a:t>    Random Survival Forest  0.7161</a:t>
+            </a:r>
+          </a:p>
+        </p:txBody>
+      </p:sp>
+      <p:sp>
+        <p:nvSpPr>
+          <p:cNvPr id="13" name="TextBox 12"/>
           <p:cNvSpPr txBox="1"/>
           <p:nvPr/>
         </p:nvSpPr>
         <p:spPr>
           <a:xfrm>
-            <a:off x="274320" y="3337560"/>
-            <a:ext cx="2743200" cy="1737360"/>
+            <a:off x="365760" y="3566160"/>
+            <a:ext cx="3383280" cy="2560320"/>
           </a:xfrm>
           <a:prstGeom prst="rect">
             <a:avLst/>
@@ -6130,7 +8013,7 @@
             <a:r>
               <a:rPr sz="1200" b="1">
                 <a:solidFill>
-                  <a:srgbClr val="0053A5"/>
+                  <a:srgbClr val="1E355E"/>
                 </a:solidFill>
               </a:rPr>
               <a:t>Cohort Summary</a:t>
@@ -6143,7 +8026,7 @@
                   <a:srgbClr val="1A1A2E"/>
                 </a:solidFill>
               </a:rPr>
-              <a:t>  Total patients: 529</a:t>
+              <a:t>  Patients:          529</a:t>
             </a:r>
           </a:p>
           <a:p>
@@ -6153,7 +8036,7 @@
                   <a:srgbClr val="1A1A2E"/>
                 </a:solidFill>
               </a:rPr>
-              <a:t>  Events (deaths): 173</a:t>
+              <a:t>  Events (deceased): 173  (32.7%)</a:t>
             </a:r>
           </a:p>
           <a:p>
@@ -6163,7 +8046,7 @@
                   <a:srgbClr val="1A1A2E"/>
                 </a:solidFill>
               </a:rPr>
-              <a:t>  Censored: 356</a:t>
+              <a:t>  Censored (alive):  356</a:t>
             </a:r>
           </a:p>
           <a:p>
@@ -6173,7 +8056,7 @@
                   <a:srgbClr val="1A1A2E"/>
                 </a:solidFill>
               </a:rPr>
-              <a:t>  Median follow-up: 1191 days</a:t>
+              <a:t>  Median follow-up:  1191 days</a:t>
             </a:r>
           </a:p>
           <a:p>
@@ -6183,14 +8066,24 @@
                   <a:srgbClr val="1A1A2E"/>
                 </a:solidFill>
               </a:rPr>
-              <a:t>  Genes retained: 2,000</a:t>
+              <a:t>  Genes analysed:    2,000</a:t>
+            </a:r>
+          </a:p>
+          <a:p>
+            <a:r>
+              <a:rPr sz="1100">
+                <a:solidFill>
+                  <a:srgbClr val="1A1A2E"/>
+                </a:solidFill>
+              </a:rPr>
+              <a:t>  Brier Score (RSF): 0.154</a:t>
             </a:r>
           </a:p>
         </p:txBody>
       </p:sp>
       <p:pic>
         <p:nvPicPr>
-          <p:cNvPr id="7" name="Picture 6" descr="09_model_comparison.png"/>
+          <p:cNvPr id="14" name="Picture 13" descr="09_model_comparison.png"/>
           <p:cNvPicPr>
             <a:picLocks noChangeAspect="1"/>
           </p:cNvPicPr>
@@ -6204,8 +8097,8 @@
         </p:blipFill>
         <p:spPr>
           <a:xfrm>
-            <a:off x="182880" y="5166360"/>
-            <a:ext cx="2880360" cy="1737360"/>
+            <a:off x="3977639" y="1298448"/>
+            <a:ext cx="4069080" cy="2651760"/>
           </a:xfrm>
           <a:prstGeom prst="rect">
             <a:avLst/>
@@ -6214,7 +8107,7 @@
       </p:pic>
       <p:pic>
         <p:nvPicPr>
-          <p:cNvPr id="8" name="Picture 7" descr="03_km_overall.png"/>
+          <p:cNvPr id="15" name="Picture 14" descr="03_km_overall.png"/>
           <p:cNvPicPr>
             <a:picLocks noChangeAspect="1"/>
           </p:cNvPicPr>
@@ -6228,8 +8121,8 @@
         </p:blipFill>
         <p:spPr>
           <a:xfrm>
-            <a:off x="3200400" y="1508760"/>
-            <a:ext cx="2834640" cy="5394960"/>
+            <a:off x="8229600" y="1298448"/>
+            <a:ext cx="3794760" cy="2651760"/>
           </a:xfrm>
           <a:prstGeom prst="rect">
             <a:avLst/>
@@ -6238,7 +8131,7 @@
       </p:pic>
       <p:pic>
         <p:nvPicPr>
-          <p:cNvPr id="9" name="Picture 8" descr="11_gene_importance_combined.png"/>
+          <p:cNvPr id="16" name="Picture 15" descr="10_risk_stratification.png"/>
           <p:cNvPicPr>
             <a:picLocks noChangeAspect="1"/>
           </p:cNvPicPr>
@@ -6252,91 +8145,14 @@
         </p:blipFill>
         <p:spPr>
           <a:xfrm>
-            <a:off x="6126480" y="1508760"/>
-            <a:ext cx="2834640" cy="5394960"/>
+            <a:off x="3977639" y="4069080"/>
+            <a:ext cx="8046720" cy="2423160"/>
           </a:xfrm>
           <a:prstGeom prst="rect">
             <a:avLst/>
           </a:prstGeom>
         </p:spPr>
       </p:pic>
-      <p:sp>
-        <p:nvSpPr>
-          <p:cNvPr id="10" name="Rectangle 9"/>
-          <p:cNvSpPr/>
-          <p:nvPr/>
-        </p:nvSpPr>
-        <p:spPr>
-          <a:xfrm>
-            <a:off x="0" y="6583680"/>
-            <a:ext cx="9144000" cy="274320"/>
-          </a:xfrm>
-          <a:prstGeom prst="rect">
-            <a:avLst/>
-          </a:prstGeom>
-          <a:solidFill>
-            <a:srgbClr val="E0E6F0"/>
-          </a:solidFill>
-          <a:ln>
-            <a:noFill/>
-          </a:ln>
-        </p:spPr>
-        <p:style>
-          <a:lnRef idx="1">
-            <a:schemeClr val="accent1"/>
-          </a:lnRef>
-          <a:fillRef idx="3">
-            <a:schemeClr val="accent1"/>
-          </a:fillRef>
-          <a:effectRef idx="2">
-            <a:schemeClr val="accent1"/>
-          </a:effectRef>
-          <a:fontRef idx="minor">
-            <a:schemeClr val="lt1"/>
-          </a:fontRef>
-        </p:style>
-        <p:txBody>
-          <a:bodyPr rtlCol="0" anchor="ctr"/>
-          <a:lstStyle/>
-          <a:p>
-            <a:pPr algn="ctr"/>
-          </a:p>
-        </p:txBody>
-      </p:sp>
-      <p:sp>
-        <p:nvSpPr>
-          <p:cNvPr id="11" name="TextBox 10"/>
-          <p:cNvSpPr txBox="1"/>
-          <p:nvPr/>
-        </p:nvSpPr>
-        <p:spPr>
-          <a:xfrm>
-            <a:off x="182880" y="6592824"/>
-            <a:ext cx="8778240" cy="256032"/>
-          </a:xfrm>
-          <a:prstGeom prst="rect">
-            <a:avLst/>
-          </a:prstGeom>
-          <a:noFill/>
-        </p:spPr>
-        <p:txBody>
-          <a:bodyPr wrap="square">
-            <a:spAutoFit/>
-          </a:bodyPr>
-          <a:lstStyle/>
-          <a:p>
-            <a:pPr algn="ctr"/>
-            <a:r>
-              <a:rPr sz="900">
-                <a:solidFill>
-                  <a:srgbClr val="555555"/>
-                </a:solidFill>
-              </a:rPr>
-              <a:t>TCGA KIRC — Survival Analysis  ·  MS Elevate Internship Project</a:t>
-            </a:r>
-          </a:p>
-        </p:txBody>
-      </p:sp>
     </p:spTree>
   </p:cSld>
   <p:clrMapOvr>
@@ -6364,13 +8180,13 @@
         <p:spPr>
           <a:xfrm>
             <a:off x="0" y="0"/>
-            <a:ext cx="9144000" cy="1234440"/>
+            <a:ext cx="12188952" cy="1188720"/>
           </a:xfrm>
           <a:prstGeom prst="rect">
             <a:avLst/>
           </a:prstGeom>
           <a:solidFill>
-            <a:srgbClr val="0053A5"/>
+            <a:srgbClr val="1E355E"/>
           </a:solidFill>
           <a:ln>
             <a:noFill/>
@@ -6406,8 +8222,8 @@
         </p:nvSpPr>
         <p:spPr>
           <a:xfrm>
-            <a:off x="228600" y="109728"/>
-            <a:ext cx="8686800" cy="822960"/>
+            <a:off x="320040" y="164592"/>
+            <a:ext cx="9811512" cy="868680"/>
           </a:xfrm>
           <a:prstGeom prst="rect">
             <a:avLst/>
@@ -6421,199 +8237,32 @@
           <a:lstStyle/>
           <a:p>
             <a:r>
-              <a:rPr sz="2800" b="1">
+              <a:rPr sz="3000" b="1">
                 <a:solidFill>
                   <a:srgbClr val="FFFFFF"/>
                 </a:solidFill>
               </a:rPr>
-              <a:t>Conclusion</a:t>
-            </a:r>
-          </a:p>
-        </p:txBody>
-      </p:sp>
-      <p:sp>
-        <p:nvSpPr>
-          <p:cNvPr id="4" name="TextBox 3"/>
-          <p:cNvSpPr txBox="1"/>
-          <p:nvPr/>
-        </p:nvSpPr>
-        <p:spPr>
-          <a:xfrm>
-            <a:off x="274320" y="1554480"/>
-            <a:ext cx="8595360" cy="4846320"/>
-          </a:xfrm>
-          <a:prstGeom prst="rect">
-            <a:avLst/>
-          </a:prstGeom>
-          <a:noFill/>
-        </p:spPr>
-        <p:txBody>
-          <a:bodyPr wrap="square">
-            <a:spAutoFit/>
-          </a:bodyPr>
-          <a:lstStyle/>
-          <a:p>
-            <a:pPr>
-              <a:spcBef>
-                <a:spcPts val="800"/>
-              </a:spcBef>
-            </a:pPr>
-            <a:r>
-              <a:rPr sz="1500" b="1">
-                <a:solidFill>
-                  <a:srgbClr val="0053A5"/>
-                </a:solidFill>
-              </a:rPr>
-              <a:t>Key Findings</a:t>
-            </a:r>
-          </a:p>
-          <a:p>
-            <a:pPr/>
-            <a:r>
-              <a:rPr sz="1300">
-                <a:solidFill>
-                  <a:srgbClr val="1A1A2E"/>
-                </a:solidFill>
-              </a:rPr>
-              <a:t>● LASSO Cox achieved the highest C-index of 0.805 — outperforming clinical-only Cox by ΔC = 0.024.</a:t>
-            </a:r>
-          </a:p>
-          <a:p>
-            <a:pPr/>
-            <a:r>
-              <a:rPr sz="1300">
-                <a:solidFill>
-                  <a:srgbClr val="1A1A2E"/>
-                </a:solidFill>
-              </a:rPr>
-              <a:t>● RSF confirmed complementary non-linear gene interactions; Integrated Brier Score = 0.154.</a:t>
-            </a:r>
-          </a:p>
-          <a:p>
-            <a:pPr/>
-            <a:r>
-              <a:rPr sz="1300">
-                <a:solidFill>
-                  <a:srgbClr val="1A1A2E"/>
-                </a:solidFill>
-              </a:rPr>
-              <a:t>● Kaplan-Meier stratification confirms a clear separation between predicted high- and low-risk groups (log-rank p &lt; 0.001).</a:t>
-            </a:r>
-          </a:p>
-          <a:p>
-            <a:pPr/>
-            <a:r>
-              <a:rPr sz="1300">
-                <a:solidFill>
-                  <a:srgbClr val="1A1A2E"/>
-                </a:solidFill>
-              </a:rPr>
-              <a:t>● LASSO selected a sparse, interpretable gene signature predictive of KIRC mortality.</a:t>
-            </a:r>
-          </a:p>
-          <a:p>
-            <a:pPr>
-              <a:spcBef>
-                <a:spcPts val="800"/>
-              </a:spcBef>
-            </a:pPr>
-            <a:r>
-              <a:rPr sz="1500" b="1">
-                <a:solidFill>
-                  <a:srgbClr val="0053A5"/>
-                </a:solidFill>
-              </a:rPr>
-              <a:t>Project Outcomes</a:t>
-            </a:r>
-          </a:p>
-          <a:p>
-            <a:pPr/>
-            <a:r>
-              <a:rPr sz="1300">
-                <a:solidFill>
-                  <a:srgbClr val="1A1A2E"/>
-                </a:solidFill>
-              </a:rPr>
-              <a:t>● Reproducible end-to-end pipeline from raw TCGA data to trained survival models.</a:t>
-            </a:r>
-          </a:p>
-          <a:p>
-            <a:pPr/>
-            <a:r>
-              <a:rPr sz="1300">
-                <a:solidFill>
-                  <a:srgbClr val="1A1A2E"/>
-                </a:solidFill>
-              </a:rPr>
-              <a:t>● Interactive Streamlit dashboard enabling real-time patient risk prediction.</a:t>
-            </a:r>
-          </a:p>
-          <a:p>
-            <a:pPr/>
-            <a:r>
-              <a:rPr sz="1300">
-                <a:solidFill>
-                  <a:srgbClr val="1A1A2E"/>
-                </a:solidFill>
-              </a:rPr>
-              <a:t>● Clean GitHub repository with complete documentation and requirements.</a:t>
-            </a:r>
-          </a:p>
-          <a:p>
-            <a:pPr>
-              <a:spcBef>
-                <a:spcPts val="800"/>
-              </a:spcBef>
-            </a:pPr>
-            <a:r>
-              <a:rPr sz="1500" b="1">
-                <a:solidFill>
-                  <a:srgbClr val="0053A5"/>
-                </a:solidFill>
-              </a:rPr>
-              <a:t>Limitations</a:t>
-            </a:r>
-          </a:p>
-          <a:p>
-            <a:pPr/>
-            <a:r>
-              <a:rPr sz="1300">
-                <a:solidFill>
-                  <a:srgbClr val="1A1A2E"/>
-                </a:solidFill>
-              </a:rPr>
-              <a:t>● TCGA data may carry selection bias; model not validated on an external cohort.</a:t>
-            </a:r>
-          </a:p>
-          <a:p>
-            <a:pPr/>
-            <a:r>
-              <a:rPr sz="1300">
-                <a:solidFill>
-                  <a:srgbClr val="1A1A2E"/>
-                </a:solidFill>
-              </a:rPr>
-              <a:t>● DeepSurv performance is constrained by the relatively small sample size (n = 529).</a:t>
-            </a:r>
-          </a:p>
-        </p:txBody>
-      </p:sp>
-      <p:sp>
-        <p:nvSpPr>
-          <p:cNvPr id="5" name="Rectangle 4"/>
+              <a:t>CONCLUSION:</a:t>
+            </a:r>
+          </a:p>
+        </p:txBody>
+      </p:sp>
+      <p:sp>
+        <p:nvSpPr>
+          <p:cNvPr id="4" name="Rectangle 3"/>
           <p:cNvSpPr/>
           <p:nvPr/>
         </p:nvSpPr>
         <p:spPr>
           <a:xfrm>
-            <a:off x="0" y="6583680"/>
-            <a:ext cx="9144000" cy="274320"/>
+            <a:off x="10268712" y="201168"/>
+            <a:ext cx="128016" cy="128016"/>
           </a:xfrm>
           <a:prstGeom prst="rect">
             <a:avLst/>
           </a:prstGeom>
           <a:solidFill>
-            <a:srgbClr val="E0E6F0"/>
+            <a:srgbClr val="F25022"/>
           </a:solidFill>
           <a:ln>
             <a:noFill/>
@@ -6643,14 +8292,143 @@
       </p:sp>
       <p:sp>
         <p:nvSpPr>
-          <p:cNvPr id="6" name="TextBox 5"/>
+          <p:cNvPr id="5" name="Rectangle 4"/>
+          <p:cNvSpPr/>
+          <p:nvPr/>
+        </p:nvSpPr>
+        <p:spPr>
+          <a:xfrm>
+            <a:off x="10419588" y="201168"/>
+            <a:ext cx="128016" cy="128016"/>
+          </a:xfrm>
+          <a:prstGeom prst="rect">
+            <a:avLst/>
+          </a:prstGeom>
+          <a:solidFill>
+            <a:srgbClr val="7FBA00"/>
+          </a:solidFill>
+          <a:ln>
+            <a:noFill/>
+          </a:ln>
+        </p:spPr>
+        <p:style>
+          <a:lnRef idx="1">
+            <a:schemeClr val="accent1"/>
+          </a:lnRef>
+          <a:fillRef idx="3">
+            <a:schemeClr val="accent1"/>
+          </a:fillRef>
+          <a:effectRef idx="2">
+            <a:schemeClr val="accent1"/>
+          </a:effectRef>
+          <a:fontRef idx="minor">
+            <a:schemeClr val="lt1"/>
+          </a:fontRef>
+        </p:style>
+        <p:txBody>
+          <a:bodyPr rtlCol="0" anchor="ctr"/>
+          <a:lstStyle/>
+          <a:p>
+            <a:pPr algn="ctr"/>
+          </a:p>
+        </p:txBody>
+      </p:sp>
+      <p:sp>
+        <p:nvSpPr>
+          <p:cNvPr id="6" name="Rectangle 5"/>
+          <p:cNvSpPr/>
+          <p:nvPr/>
+        </p:nvSpPr>
+        <p:spPr>
+          <a:xfrm>
+            <a:off x="10268712" y="352044"/>
+            <a:ext cx="128016" cy="128016"/>
+          </a:xfrm>
+          <a:prstGeom prst="rect">
+            <a:avLst/>
+          </a:prstGeom>
+          <a:solidFill>
+            <a:srgbClr val="00A4EF"/>
+          </a:solidFill>
+          <a:ln>
+            <a:noFill/>
+          </a:ln>
+        </p:spPr>
+        <p:style>
+          <a:lnRef idx="1">
+            <a:schemeClr val="accent1"/>
+          </a:lnRef>
+          <a:fillRef idx="3">
+            <a:schemeClr val="accent1"/>
+          </a:fillRef>
+          <a:effectRef idx="2">
+            <a:schemeClr val="accent1"/>
+          </a:effectRef>
+          <a:fontRef idx="minor">
+            <a:schemeClr val="lt1"/>
+          </a:fontRef>
+        </p:style>
+        <p:txBody>
+          <a:bodyPr rtlCol="0" anchor="ctr"/>
+          <a:lstStyle/>
+          <a:p>
+            <a:pPr algn="ctr"/>
+          </a:p>
+        </p:txBody>
+      </p:sp>
+      <p:sp>
+        <p:nvSpPr>
+          <p:cNvPr id="7" name="Rectangle 6"/>
+          <p:cNvSpPr/>
+          <p:nvPr/>
+        </p:nvSpPr>
+        <p:spPr>
+          <a:xfrm>
+            <a:off x="10419588" y="352044"/>
+            <a:ext cx="128016" cy="128016"/>
+          </a:xfrm>
+          <a:prstGeom prst="rect">
+            <a:avLst/>
+          </a:prstGeom>
+          <a:solidFill>
+            <a:srgbClr val="FFB900"/>
+          </a:solidFill>
+          <a:ln>
+            <a:noFill/>
+          </a:ln>
+        </p:spPr>
+        <p:style>
+          <a:lnRef idx="1">
+            <a:schemeClr val="accent1"/>
+          </a:lnRef>
+          <a:fillRef idx="3">
+            <a:schemeClr val="accent1"/>
+          </a:fillRef>
+          <a:effectRef idx="2">
+            <a:schemeClr val="accent1"/>
+          </a:effectRef>
+          <a:fontRef idx="minor">
+            <a:schemeClr val="lt1"/>
+          </a:fontRef>
+        </p:style>
+        <p:txBody>
+          <a:bodyPr rtlCol="0" anchor="ctr"/>
+          <a:lstStyle/>
+          <a:p>
+            <a:pPr algn="ctr"/>
+          </a:p>
+        </p:txBody>
+      </p:sp>
+      <p:sp>
+        <p:nvSpPr>
+          <p:cNvPr id="8" name="TextBox 7"/>
           <p:cNvSpPr txBox="1"/>
           <p:nvPr/>
         </p:nvSpPr>
         <p:spPr>
           <a:xfrm>
-            <a:off x="182880" y="6592824"/>
-            <a:ext cx="8778240" cy="256032"/>
+            <a:off x="10611612" y="192024"/>
+            <a:ext cx="1371600" cy="201168"/>
           </a:xfrm>
           <a:prstGeom prst="rect">
             <a:avLst/>
@@ -6663,14 +8441,289 @@
           </a:bodyPr>
           <a:lstStyle/>
           <a:p>
+            <a:r>
+              <a:rPr sz="1000">
+                <a:solidFill>
+                  <a:srgbClr val="FFFFFF"/>
+                </a:solidFill>
+              </a:rPr>
+              <a:t>Microsoft</a:t>
+            </a:r>
+          </a:p>
+        </p:txBody>
+      </p:sp>
+      <p:sp>
+        <p:nvSpPr>
+          <p:cNvPr id="9" name="TextBox 8"/>
+          <p:cNvSpPr txBox="1"/>
+          <p:nvPr/>
+        </p:nvSpPr>
+        <p:spPr>
+          <a:xfrm>
+            <a:off x="10611612" y="365760"/>
+            <a:ext cx="1371600" cy="201168"/>
+          </a:xfrm>
+          <a:prstGeom prst="rect">
+            <a:avLst/>
+          </a:prstGeom>
+          <a:noFill/>
+        </p:spPr>
+        <p:txBody>
+          <a:bodyPr wrap="square">
+            <a:spAutoFit/>
+          </a:bodyPr>
+          <a:lstStyle/>
+          <a:p>
+            <a:r>
+              <a:rPr sz="1000">
+                <a:solidFill>
+                  <a:srgbClr val="FFFFFF"/>
+                </a:solidFill>
+              </a:rPr>
+              <a:t>Elevate</a:t>
+            </a:r>
+          </a:p>
+        </p:txBody>
+      </p:sp>
+      <p:sp>
+        <p:nvSpPr>
+          <p:cNvPr id="10" name="Rectangle 9"/>
+          <p:cNvSpPr/>
+          <p:nvPr/>
+        </p:nvSpPr>
+        <p:spPr>
+          <a:xfrm>
+            <a:off x="0" y="6556248"/>
+            <a:ext cx="12188952" cy="301752"/>
+          </a:xfrm>
+          <a:prstGeom prst="rect">
+            <a:avLst/>
+          </a:prstGeom>
+          <a:solidFill>
+            <a:srgbClr val="00A050"/>
+          </a:solidFill>
+          <a:ln>
+            <a:noFill/>
+          </a:ln>
+        </p:spPr>
+        <p:style>
+          <a:lnRef idx="1">
+            <a:schemeClr val="accent1"/>
+          </a:lnRef>
+          <a:fillRef idx="3">
+            <a:schemeClr val="accent1"/>
+          </a:fillRef>
+          <a:effectRef idx="2">
+            <a:schemeClr val="accent1"/>
+          </a:effectRef>
+          <a:fontRef idx="minor">
+            <a:schemeClr val="lt1"/>
+          </a:fontRef>
+        </p:style>
+        <p:txBody>
+          <a:bodyPr rtlCol="0" anchor="ctr"/>
+          <a:lstStyle/>
+          <a:p>
             <a:pPr algn="ctr"/>
-            <a:r>
-              <a:rPr sz="900">
-                <a:solidFill>
-                  <a:srgbClr val="555555"/>
-                </a:solidFill>
-              </a:rPr>
-              <a:t>TCGA KIRC — Survival Analysis  ·  MS Elevate Internship Project</a:t>
+          </a:p>
+        </p:txBody>
+      </p:sp>
+      <p:sp>
+        <p:nvSpPr>
+          <p:cNvPr id="11" name="TextBox 10"/>
+          <p:cNvSpPr txBox="1"/>
+          <p:nvPr/>
+        </p:nvSpPr>
+        <p:spPr>
+          <a:xfrm>
+            <a:off x="320040" y="1298448"/>
+            <a:ext cx="11548872" cy="5148072"/>
+          </a:xfrm>
+          <a:prstGeom prst="rect">
+            <a:avLst/>
+          </a:prstGeom>
+          <a:noFill/>
+        </p:spPr>
+        <p:txBody>
+          <a:bodyPr wrap="square">
+            <a:spAutoFit/>
+          </a:bodyPr>
+          <a:lstStyle/>
+          <a:p>
+            <a:pPr/>
+            <a:r>
+              <a:rPr sz="1300">
+                <a:solidFill>
+                  <a:srgbClr val="000000"/>
+                </a:solidFill>
+              </a:rPr>
+              <a:t>This project developed and evaluated a complete end-to-end survival analysis pipeline on 529 TCGA-KIRC patients using high-dimensional gene expression data combined with clinical variables, comparing four distinct model families.</a:t>
+            </a:r>
+          </a:p>
+          <a:p>
+            <a:pPr/>
+            <a:r>
+              <a:rPr sz="1300">
+                <a:solidFill>
+                  <a:srgbClr val="000000"/>
+                </a:solidFill>
+              </a:rPr>
+              <a:t/>
+            </a:r>
+          </a:p>
+          <a:p>
+            <a:pPr>
+              <a:spcBef>
+                <a:spcPts val="900"/>
+              </a:spcBef>
+            </a:pPr>
+            <a:r>
+              <a:rPr sz="1500" b="1">
+                <a:solidFill>
+                  <a:srgbClr val="1E355E"/>
+                </a:solidFill>
+              </a:rPr>
+              <a:t>Key Findings</a:t>
+            </a:r>
+          </a:p>
+          <a:p>
+            <a:pPr lvl="1"/>
+            <a:r>
+              <a:rPr sz="1300">
+                <a:solidFill>
+                  <a:srgbClr val="000000"/>
+                </a:solidFill>
+              </a:rPr>
+              <a:t>LASSO-penalised Cox achieved the best C-index of 0.8047, outperforming clinical-only Cox PH by delta-C = 0.0238.</a:t>
+            </a:r>
+          </a:p>
+          <a:p>
+            <a:pPr lvl="1"/>
+            <a:r>
+              <a:rPr sz="1300">
+                <a:solidFill>
+                  <a:srgbClr val="000000"/>
+                </a:solidFill>
+              </a:rPr>
+              <a:t>Random Survival Forest confirmed non-linear gene interactions (Integrated Brier Score = 0.154).</a:t>
+            </a:r>
+          </a:p>
+          <a:p>
+            <a:pPr lvl="1"/>
+            <a:r>
+              <a:rPr sz="1300">
+                <a:solidFill>
+                  <a:srgbClr val="000000"/>
+                </a:solidFill>
+              </a:rPr>
+              <a:t>Kaplan-Meier risk stratification shows clear high/low-risk separation (log-rank p &lt; 0.001).</a:t>
+            </a:r>
+          </a:p>
+          <a:p>
+            <a:pPr lvl="1"/>
+            <a:r>
+              <a:rPr sz="1300">
+                <a:solidFill>
+                  <a:srgbClr val="000000"/>
+                </a:solidFill>
+              </a:rPr>
+              <a:t>LASSO identified a sparse, interpretable gene signature predictive of KIRC mortality.</a:t>
+            </a:r>
+          </a:p>
+          <a:p>
+            <a:pPr/>
+            <a:r>
+              <a:rPr sz="1300">
+                <a:solidFill>
+                  <a:srgbClr val="000000"/>
+                </a:solidFill>
+              </a:rPr>
+              <a:t/>
+            </a:r>
+          </a:p>
+          <a:p>
+            <a:pPr>
+              <a:spcBef>
+                <a:spcPts val="900"/>
+              </a:spcBef>
+            </a:pPr>
+            <a:r>
+              <a:rPr sz="1500" b="1">
+                <a:solidFill>
+                  <a:srgbClr val="1E355E"/>
+                </a:solidFill>
+              </a:rPr>
+              <a:t>Project Outcomes</a:t>
+            </a:r>
+          </a:p>
+          <a:p>
+            <a:pPr lvl="1"/>
+            <a:r>
+              <a:rPr sz="1300">
+                <a:solidFill>
+                  <a:srgbClr val="000000"/>
+                </a:solidFill>
+              </a:rPr>
+              <a:t>Reproducible pipeline: raw TCGA data -&gt; trained models -&gt; interactive dashboard.</a:t>
+            </a:r>
+          </a:p>
+          <a:p>
+            <a:pPr lvl="1"/>
+            <a:r>
+              <a:rPr sz="1300">
+                <a:solidFill>
+                  <a:srgbClr val="000000"/>
+                </a:solidFill>
+              </a:rPr>
+              <a:t>Live Streamlit app: https://tcga-kirc.streamlit.app/</a:t>
+            </a:r>
+          </a:p>
+          <a:p>
+            <a:pPr lvl="1"/>
+            <a:r>
+              <a:rPr sz="1300">
+                <a:solidFill>
+                  <a:srgbClr val="000000"/>
+                </a:solidFill>
+              </a:rPr>
+              <a:t>Source code: https://github.com/LikithaDudala/tcga-kirc-project</a:t>
+            </a:r>
+          </a:p>
+          <a:p>
+            <a:pPr/>
+            <a:r>
+              <a:rPr sz="1300">
+                <a:solidFill>
+                  <a:srgbClr val="000000"/>
+                </a:solidFill>
+              </a:rPr>
+              <a:t/>
+            </a:r>
+          </a:p>
+          <a:p>
+            <a:pPr>
+              <a:spcBef>
+                <a:spcPts val="900"/>
+              </a:spcBef>
+            </a:pPr>
+            <a:r>
+              <a:rPr sz="1500" b="1">
+                <a:solidFill>
+                  <a:srgbClr val="1E355E"/>
+                </a:solidFill>
+              </a:rPr>
+              <a:t>Limitations</a:t>
+            </a:r>
+          </a:p>
+          <a:p>
+            <a:pPr lvl="1"/>
+            <a:r>
+              <a:rPr sz="1300">
+                <a:solidFill>
+                  <a:srgbClr val="000000"/>
+                </a:solidFill>
+              </a:rPr>
+              <a:t>TCGA data may carry selection bias; model not validated on an external cohort.</a:t>
             </a:r>
           </a:p>
         </p:txBody>
@@ -6702,13 +8755,13 @@
         <p:spPr>
           <a:xfrm>
             <a:off x="0" y="0"/>
-            <a:ext cx="9144000" cy="1234440"/>
+            <a:ext cx="12188952" cy="1188720"/>
           </a:xfrm>
           <a:prstGeom prst="rect">
             <a:avLst/>
           </a:prstGeom>
           <a:solidFill>
-            <a:srgbClr val="0053A5"/>
+            <a:srgbClr val="1E355E"/>
           </a:solidFill>
           <a:ln>
             <a:noFill/>
@@ -6744,8 +8797,8 @@
         </p:nvSpPr>
         <p:spPr>
           <a:xfrm>
-            <a:off x="228600" y="109728"/>
-            <a:ext cx="8686800" cy="822960"/>
+            <a:off x="320040" y="164592"/>
+            <a:ext cx="9811512" cy="868680"/>
           </a:xfrm>
           <a:prstGeom prst="rect">
             <a:avLst/>
@@ -6759,199 +8812,32 @@
           <a:lstStyle/>
           <a:p>
             <a:r>
-              <a:rPr sz="2800" b="1">
+              <a:rPr sz="3000" b="1">
                 <a:solidFill>
                   <a:srgbClr val="FFFFFF"/>
                 </a:solidFill>
               </a:rPr>
-              <a:t>Future Scope</a:t>
-            </a:r>
-          </a:p>
-        </p:txBody>
-      </p:sp>
-      <p:sp>
-        <p:nvSpPr>
-          <p:cNvPr id="4" name="TextBox 3"/>
-          <p:cNvSpPr txBox="1"/>
-          <p:nvPr/>
-        </p:nvSpPr>
-        <p:spPr>
-          <a:xfrm>
-            <a:off x="274320" y="1554480"/>
-            <a:ext cx="8595360" cy="4846320"/>
-          </a:xfrm>
-          <a:prstGeom prst="rect">
-            <a:avLst/>
-          </a:prstGeom>
-          <a:noFill/>
-        </p:spPr>
-        <p:txBody>
-          <a:bodyPr wrap="square">
-            <a:spAutoFit/>
-          </a:bodyPr>
-          <a:lstStyle/>
-          <a:p>
-            <a:pPr>
-              <a:spcBef>
-                <a:spcPts val="800"/>
-              </a:spcBef>
-            </a:pPr>
-            <a:r>
-              <a:rPr sz="1500" b="1">
-                <a:solidFill>
-                  <a:srgbClr val="0053A5"/>
-                </a:solidFill>
-              </a:rPr>
-              <a:t>Model Improvements</a:t>
-            </a:r>
-          </a:p>
-          <a:p>
-            <a:pPr/>
-            <a:r>
-              <a:rPr sz="1300">
-                <a:solidFill>
-                  <a:srgbClr val="1A1A2E"/>
-                </a:solidFill>
-              </a:rPr>
-              <a:t>● Stacking / ensemble of all 4 models for improved concordance.</a:t>
-            </a:r>
-          </a:p>
-          <a:p>
-            <a:pPr/>
-            <a:r>
-              <a:rPr sz="1300">
-                <a:solidFill>
-                  <a:srgbClr val="1A1A2E"/>
-                </a:solidFill>
-              </a:rPr>
-              <a:t>● Attention-based DeepSurv with pathway-level gene embeddings (Gene Ontology / KEGG).</a:t>
-            </a:r>
-          </a:p>
-          <a:p>
-            <a:pPr/>
-            <a:r>
-              <a:rPr sz="1300">
-                <a:solidFill>
-                  <a:srgbClr val="1A1A2E"/>
-                </a:solidFill>
-              </a:rPr>
-              <a:t>● Multi-omics integration: copy number variation, methylation, proteomics.</a:t>
-            </a:r>
-          </a:p>
-          <a:p>
-            <a:pPr>
-              <a:spcBef>
-                <a:spcPts val="800"/>
-              </a:spcBef>
-            </a:pPr>
-            <a:r>
-              <a:rPr sz="1500" b="1">
-                <a:solidFill>
-                  <a:srgbClr val="0053A5"/>
-                </a:solidFill>
-              </a:rPr>
-              <a:t>Validation &amp; Clinical Translation</a:t>
-            </a:r>
-          </a:p>
-          <a:p>
-            <a:pPr/>
-            <a:r>
-              <a:rPr sz="1300">
-                <a:solidFill>
-                  <a:srgbClr val="1A1A2E"/>
-                </a:solidFill>
-              </a:rPr>
-              <a:t>● External validation on ICGC or CheckMate-025 / IMmotion151 datasets.</a:t>
-            </a:r>
-          </a:p>
-          <a:p>
-            <a:pPr/>
-            <a:r>
-              <a:rPr sz="1300">
-                <a:solidFill>
-                  <a:srgbClr val="1A1A2E"/>
-                </a:solidFill>
-              </a:rPr>
-              <a:t>● Prospective clinical pilot: integrate risk scores with EHR systems.</a:t>
-            </a:r>
-          </a:p>
-          <a:p>
-            <a:pPr/>
-            <a:r>
-              <a:rPr sz="1300">
-                <a:solidFill>
-                  <a:srgbClr val="1A1A2E"/>
-                </a:solidFill>
-              </a:rPr>
-              <a:t>● SHAP values for per-patient risk factor explanation (interpretable AI).</a:t>
-            </a:r>
-          </a:p>
-          <a:p>
-            <a:pPr>
-              <a:spcBef>
-                <a:spcPts val="800"/>
-              </a:spcBef>
-            </a:pPr>
-            <a:r>
-              <a:rPr sz="1500" b="1">
-                <a:solidFill>
-                  <a:srgbClr val="0053A5"/>
-                </a:solidFill>
-              </a:rPr>
-              <a:t>Engineering &amp; Deployment</a:t>
-            </a:r>
-          </a:p>
-          <a:p>
-            <a:pPr/>
-            <a:r>
-              <a:rPr sz="1300">
-                <a:solidFill>
-                  <a:srgbClr val="1A1A2E"/>
-                </a:solidFill>
-              </a:rPr>
-              <a:t>● Deploy Streamlit app to Streamlit Community Cloud or Azure App Service.</a:t>
-            </a:r>
-          </a:p>
-          <a:p>
-            <a:pPr/>
-            <a:r>
-              <a:rPr sz="1300">
-                <a:solidFill>
-                  <a:srgbClr val="1A1A2E"/>
-                </a:solidFill>
-              </a:rPr>
-              <a:t>● REST API (FastAPI) for programmatic risk score queries from clinical systems.</a:t>
-            </a:r>
-          </a:p>
-          <a:p>
-            <a:pPr/>
-            <a:r>
-              <a:rPr sz="1300">
-                <a:solidFill>
-                  <a:srgbClr val="1A1A2E"/>
-                </a:solidFill>
-              </a:rPr>
-              <a:t>● Automated retraining pipeline as new TCGA data releases become available.</a:t>
-            </a:r>
-          </a:p>
-        </p:txBody>
-      </p:sp>
-      <p:sp>
-        <p:nvSpPr>
-          <p:cNvPr id="5" name="Rectangle 4"/>
+              <a:t>FUTURE SCOPE:</a:t>
+            </a:r>
+          </a:p>
+        </p:txBody>
+      </p:sp>
+      <p:sp>
+        <p:nvSpPr>
+          <p:cNvPr id="4" name="Rectangle 3"/>
           <p:cNvSpPr/>
           <p:nvPr/>
         </p:nvSpPr>
         <p:spPr>
           <a:xfrm>
-            <a:off x="0" y="6583680"/>
-            <a:ext cx="9144000" cy="274320"/>
+            <a:off x="10268712" y="201168"/>
+            <a:ext cx="128016" cy="128016"/>
           </a:xfrm>
           <a:prstGeom prst="rect">
             <a:avLst/>
           </a:prstGeom>
           <a:solidFill>
-            <a:srgbClr val="E0E6F0"/>
+            <a:srgbClr val="F25022"/>
           </a:solidFill>
           <a:ln>
             <a:noFill/>
@@ -6981,14 +8867,143 @@
       </p:sp>
       <p:sp>
         <p:nvSpPr>
-          <p:cNvPr id="6" name="TextBox 5"/>
+          <p:cNvPr id="5" name="Rectangle 4"/>
+          <p:cNvSpPr/>
+          <p:nvPr/>
+        </p:nvSpPr>
+        <p:spPr>
+          <a:xfrm>
+            <a:off x="10419588" y="201168"/>
+            <a:ext cx="128016" cy="128016"/>
+          </a:xfrm>
+          <a:prstGeom prst="rect">
+            <a:avLst/>
+          </a:prstGeom>
+          <a:solidFill>
+            <a:srgbClr val="7FBA00"/>
+          </a:solidFill>
+          <a:ln>
+            <a:noFill/>
+          </a:ln>
+        </p:spPr>
+        <p:style>
+          <a:lnRef idx="1">
+            <a:schemeClr val="accent1"/>
+          </a:lnRef>
+          <a:fillRef idx="3">
+            <a:schemeClr val="accent1"/>
+          </a:fillRef>
+          <a:effectRef idx="2">
+            <a:schemeClr val="accent1"/>
+          </a:effectRef>
+          <a:fontRef idx="minor">
+            <a:schemeClr val="lt1"/>
+          </a:fontRef>
+        </p:style>
+        <p:txBody>
+          <a:bodyPr rtlCol="0" anchor="ctr"/>
+          <a:lstStyle/>
+          <a:p>
+            <a:pPr algn="ctr"/>
+          </a:p>
+        </p:txBody>
+      </p:sp>
+      <p:sp>
+        <p:nvSpPr>
+          <p:cNvPr id="6" name="Rectangle 5"/>
+          <p:cNvSpPr/>
+          <p:nvPr/>
+        </p:nvSpPr>
+        <p:spPr>
+          <a:xfrm>
+            <a:off x="10268712" y="352044"/>
+            <a:ext cx="128016" cy="128016"/>
+          </a:xfrm>
+          <a:prstGeom prst="rect">
+            <a:avLst/>
+          </a:prstGeom>
+          <a:solidFill>
+            <a:srgbClr val="00A4EF"/>
+          </a:solidFill>
+          <a:ln>
+            <a:noFill/>
+          </a:ln>
+        </p:spPr>
+        <p:style>
+          <a:lnRef idx="1">
+            <a:schemeClr val="accent1"/>
+          </a:lnRef>
+          <a:fillRef idx="3">
+            <a:schemeClr val="accent1"/>
+          </a:fillRef>
+          <a:effectRef idx="2">
+            <a:schemeClr val="accent1"/>
+          </a:effectRef>
+          <a:fontRef idx="minor">
+            <a:schemeClr val="lt1"/>
+          </a:fontRef>
+        </p:style>
+        <p:txBody>
+          <a:bodyPr rtlCol="0" anchor="ctr"/>
+          <a:lstStyle/>
+          <a:p>
+            <a:pPr algn="ctr"/>
+          </a:p>
+        </p:txBody>
+      </p:sp>
+      <p:sp>
+        <p:nvSpPr>
+          <p:cNvPr id="7" name="Rectangle 6"/>
+          <p:cNvSpPr/>
+          <p:nvPr/>
+        </p:nvSpPr>
+        <p:spPr>
+          <a:xfrm>
+            <a:off x="10419588" y="352044"/>
+            <a:ext cx="128016" cy="128016"/>
+          </a:xfrm>
+          <a:prstGeom prst="rect">
+            <a:avLst/>
+          </a:prstGeom>
+          <a:solidFill>
+            <a:srgbClr val="FFB900"/>
+          </a:solidFill>
+          <a:ln>
+            <a:noFill/>
+          </a:ln>
+        </p:spPr>
+        <p:style>
+          <a:lnRef idx="1">
+            <a:schemeClr val="accent1"/>
+          </a:lnRef>
+          <a:fillRef idx="3">
+            <a:schemeClr val="accent1"/>
+          </a:fillRef>
+          <a:effectRef idx="2">
+            <a:schemeClr val="accent1"/>
+          </a:effectRef>
+          <a:fontRef idx="minor">
+            <a:schemeClr val="lt1"/>
+          </a:fontRef>
+        </p:style>
+        <p:txBody>
+          <a:bodyPr rtlCol="0" anchor="ctr"/>
+          <a:lstStyle/>
+          <a:p>
+            <a:pPr algn="ctr"/>
+          </a:p>
+        </p:txBody>
+      </p:sp>
+      <p:sp>
+        <p:nvSpPr>
+          <p:cNvPr id="8" name="TextBox 7"/>
           <p:cNvSpPr txBox="1"/>
           <p:nvPr/>
         </p:nvSpPr>
         <p:spPr>
           <a:xfrm>
-            <a:off x="182880" y="6592824"/>
-            <a:ext cx="8778240" cy="256032"/>
+            <a:off x="10611612" y="192024"/>
+            <a:ext cx="1371600" cy="201168"/>
           </a:xfrm>
           <a:prstGeom prst="rect">
             <a:avLst/>
@@ -7001,14 +9016,278 @@
           </a:bodyPr>
           <a:lstStyle/>
           <a:p>
+            <a:r>
+              <a:rPr sz="1000">
+                <a:solidFill>
+                  <a:srgbClr val="FFFFFF"/>
+                </a:solidFill>
+              </a:rPr>
+              <a:t>Microsoft</a:t>
+            </a:r>
+          </a:p>
+        </p:txBody>
+      </p:sp>
+      <p:sp>
+        <p:nvSpPr>
+          <p:cNvPr id="9" name="TextBox 8"/>
+          <p:cNvSpPr txBox="1"/>
+          <p:nvPr/>
+        </p:nvSpPr>
+        <p:spPr>
+          <a:xfrm>
+            <a:off x="10611612" y="365760"/>
+            <a:ext cx="1371600" cy="201168"/>
+          </a:xfrm>
+          <a:prstGeom prst="rect">
+            <a:avLst/>
+          </a:prstGeom>
+          <a:noFill/>
+        </p:spPr>
+        <p:txBody>
+          <a:bodyPr wrap="square">
+            <a:spAutoFit/>
+          </a:bodyPr>
+          <a:lstStyle/>
+          <a:p>
+            <a:r>
+              <a:rPr sz="1000">
+                <a:solidFill>
+                  <a:srgbClr val="FFFFFF"/>
+                </a:solidFill>
+              </a:rPr>
+              <a:t>Elevate</a:t>
+            </a:r>
+          </a:p>
+        </p:txBody>
+      </p:sp>
+      <p:sp>
+        <p:nvSpPr>
+          <p:cNvPr id="10" name="Rectangle 9"/>
+          <p:cNvSpPr/>
+          <p:nvPr/>
+        </p:nvSpPr>
+        <p:spPr>
+          <a:xfrm>
+            <a:off x="0" y="6556248"/>
+            <a:ext cx="12188952" cy="301752"/>
+          </a:xfrm>
+          <a:prstGeom prst="rect">
+            <a:avLst/>
+          </a:prstGeom>
+          <a:solidFill>
+            <a:srgbClr val="00A050"/>
+          </a:solidFill>
+          <a:ln>
+            <a:noFill/>
+          </a:ln>
+        </p:spPr>
+        <p:style>
+          <a:lnRef idx="1">
+            <a:schemeClr val="accent1"/>
+          </a:lnRef>
+          <a:fillRef idx="3">
+            <a:schemeClr val="accent1"/>
+          </a:fillRef>
+          <a:effectRef idx="2">
+            <a:schemeClr val="accent1"/>
+          </a:effectRef>
+          <a:fontRef idx="minor">
+            <a:schemeClr val="lt1"/>
+          </a:fontRef>
+        </p:style>
+        <p:txBody>
+          <a:bodyPr rtlCol="0" anchor="ctr"/>
+          <a:lstStyle/>
+          <a:p>
             <a:pPr algn="ctr"/>
-            <a:r>
-              <a:rPr sz="900">
-                <a:solidFill>
-                  <a:srgbClr val="555555"/>
-                </a:solidFill>
-              </a:rPr>
-              <a:t>TCGA KIRC — Survival Analysis  ·  MS Elevate Internship Project</a:t>
+          </a:p>
+        </p:txBody>
+      </p:sp>
+      <p:sp>
+        <p:nvSpPr>
+          <p:cNvPr id="11" name="TextBox 10"/>
+          <p:cNvSpPr txBox="1"/>
+          <p:nvPr/>
+        </p:nvSpPr>
+        <p:spPr>
+          <a:xfrm>
+            <a:off x="320040" y="1298448"/>
+            <a:ext cx="11548872" cy="5148072"/>
+          </a:xfrm>
+          <a:prstGeom prst="rect">
+            <a:avLst/>
+          </a:prstGeom>
+          <a:noFill/>
+        </p:spPr>
+        <p:txBody>
+          <a:bodyPr wrap="square">
+            <a:spAutoFit/>
+          </a:bodyPr>
+          <a:lstStyle/>
+          <a:p>
+            <a:pPr>
+              <a:spcBef>
+                <a:spcPts val="900"/>
+              </a:spcBef>
+            </a:pPr>
+            <a:r>
+              <a:rPr sz="1500" b="1">
+                <a:solidFill>
+                  <a:srgbClr val="1E355E"/>
+                </a:solidFill>
+              </a:rPr>
+              <a:t>Model Improvements</a:t>
+            </a:r>
+          </a:p>
+          <a:p>
+            <a:pPr lvl="1"/>
+            <a:r>
+              <a:rPr sz="1300">
+                <a:solidFill>
+                  <a:srgbClr val="000000"/>
+                </a:solidFill>
+              </a:rPr>
+              <a:t>Ensemble / stacking of all 4 models for improved concordance.</a:t>
+            </a:r>
+          </a:p>
+          <a:p>
+            <a:pPr lvl="1"/>
+            <a:r>
+              <a:rPr sz="1300">
+                <a:solidFill>
+                  <a:srgbClr val="000000"/>
+                </a:solidFill>
+              </a:rPr>
+              <a:t>Attention-based DeepSurv with pathway-level gene embeddings (Gene Ontology / KEGG).</a:t>
+            </a:r>
+          </a:p>
+          <a:p>
+            <a:pPr lvl="1"/>
+            <a:r>
+              <a:rPr sz="1300">
+                <a:solidFill>
+                  <a:srgbClr val="000000"/>
+                </a:solidFill>
+              </a:rPr>
+              <a:t>Multi-omics integration: copy number variation, methylation, proteomics.</a:t>
+            </a:r>
+          </a:p>
+          <a:p>
+            <a:pPr lvl="1"/>
+            <a:r>
+              <a:rPr sz="1300">
+                <a:solidFill>
+                  <a:srgbClr val="000000"/>
+                </a:solidFill>
+              </a:rPr>
+              <a:t>SHAP values for per-patient risk factor explanation (explainable AI).</a:t>
+            </a:r>
+          </a:p>
+          <a:p>
+            <a:pPr/>
+            <a:r>
+              <a:rPr sz="1300">
+                <a:solidFill>
+                  <a:srgbClr val="000000"/>
+                </a:solidFill>
+              </a:rPr>
+              <a:t/>
+            </a:r>
+          </a:p>
+          <a:p>
+            <a:pPr>
+              <a:spcBef>
+                <a:spcPts val="900"/>
+              </a:spcBef>
+            </a:pPr>
+            <a:r>
+              <a:rPr sz="1500" b="1">
+                <a:solidFill>
+                  <a:srgbClr val="1E355E"/>
+                </a:solidFill>
+              </a:rPr>
+              <a:t>Validation &amp; Clinical Translation</a:t>
+            </a:r>
+          </a:p>
+          <a:p>
+            <a:pPr lvl="1"/>
+            <a:r>
+              <a:rPr sz="1300">
+                <a:solidFill>
+                  <a:srgbClr val="000000"/>
+                </a:solidFill>
+              </a:rPr>
+              <a:t>External validation on ICGC or CheckMate-025 / IMmotion151 datasets.</a:t>
+            </a:r>
+          </a:p>
+          <a:p>
+            <a:pPr lvl="1"/>
+            <a:r>
+              <a:rPr sz="1300">
+                <a:solidFill>
+                  <a:srgbClr val="000000"/>
+                </a:solidFill>
+              </a:rPr>
+              <a:t>Prospective clinical pilot: integrate risk scores with EHR systems.</a:t>
+            </a:r>
+          </a:p>
+          <a:p>
+            <a:pPr/>
+            <a:r>
+              <a:rPr sz="1300">
+                <a:solidFill>
+                  <a:srgbClr val="000000"/>
+                </a:solidFill>
+              </a:rPr>
+              <a:t/>
+            </a:r>
+          </a:p>
+          <a:p>
+            <a:pPr>
+              <a:spcBef>
+                <a:spcPts val="900"/>
+              </a:spcBef>
+            </a:pPr>
+            <a:r>
+              <a:rPr sz="1500" b="1">
+                <a:solidFill>
+                  <a:srgbClr val="1E355E"/>
+                </a:solidFill>
+              </a:rPr>
+              <a:t>Engineering &amp; Deployment  (App already live: https://tcga-kirc.streamlit.app/)</a:t>
+            </a:r>
+          </a:p>
+          <a:p>
+            <a:pPr lvl="1"/>
+            <a:r>
+              <a:rPr sz="1300">
+                <a:solidFill>
+                  <a:srgbClr val="000000"/>
+                </a:solidFill>
+              </a:rPr>
+              <a:t>REST API (FastAPI) for programmatic risk score queries from clinical systems.</a:t>
+            </a:r>
+          </a:p>
+          <a:p>
+            <a:pPr lvl="1"/>
+            <a:r>
+              <a:rPr sz="1300">
+                <a:solidFill>
+                  <a:srgbClr val="000000"/>
+                </a:solidFill>
+              </a:rPr>
+              <a:t>Automated retraining pipeline as new TCGA data releases become available.</a:t>
+            </a:r>
+          </a:p>
+          <a:p>
+            <a:pPr lvl="1"/>
+            <a:r>
+              <a:rPr sz="1300">
+                <a:solidFill>
+                  <a:srgbClr val="000000"/>
+                </a:solidFill>
+              </a:rPr>
+              <a:t>Multi-cancer extension: apply pipeline to TCGA-LUAD, TCGA-BRCA, TCGA-GBM.</a:t>
             </a:r>
           </a:p>
         </p:txBody>
